--- a/Project Presentation Final.pptx
+++ b/Project Presentation Final.pptx
@@ -5,7 +5,7 @@
     <p:sldMasterId id="2147483648" r:id="rId1"/>
   </p:sldMasterIdLst>
   <p:notesMasterIdLst>
-    <p:notesMasterId r:id="rId33"/>
+    <p:notesMasterId r:id="rId34"/>
   </p:notesMasterIdLst>
   <p:sldIdLst>
     <p:sldId id="256" r:id="rId2"/>
@@ -26,19 +26,20 @@
     <p:sldId id="300" r:id="rId17"/>
     <p:sldId id="302" r:id="rId18"/>
     <p:sldId id="303" r:id="rId19"/>
-    <p:sldId id="304" r:id="rId20"/>
-    <p:sldId id="305" r:id="rId21"/>
-    <p:sldId id="306" r:id="rId22"/>
-    <p:sldId id="308" r:id="rId23"/>
-    <p:sldId id="309" r:id="rId24"/>
-    <p:sldId id="291" r:id="rId25"/>
-    <p:sldId id="311" r:id="rId26"/>
-    <p:sldId id="312" r:id="rId27"/>
-    <p:sldId id="313" r:id="rId28"/>
-    <p:sldId id="314" r:id="rId29"/>
-    <p:sldId id="290" r:id="rId30"/>
-    <p:sldId id="316" r:id="rId31"/>
-    <p:sldId id="277" r:id="rId32"/>
+    <p:sldId id="317" r:id="rId20"/>
+    <p:sldId id="304" r:id="rId21"/>
+    <p:sldId id="305" r:id="rId22"/>
+    <p:sldId id="306" r:id="rId23"/>
+    <p:sldId id="308" r:id="rId24"/>
+    <p:sldId id="309" r:id="rId25"/>
+    <p:sldId id="291" r:id="rId26"/>
+    <p:sldId id="311" r:id="rId27"/>
+    <p:sldId id="312" r:id="rId28"/>
+    <p:sldId id="313" r:id="rId29"/>
+    <p:sldId id="314" r:id="rId30"/>
+    <p:sldId id="290" r:id="rId31"/>
+    <p:sldId id="316" r:id="rId32"/>
+    <p:sldId id="277" r:id="rId33"/>
   </p:sldIdLst>
   <p:sldSz cx="9144000" cy="6858000" type="screen4x3"/>
   <p:notesSz cx="6858000" cy="9144000"/>
@@ -276,7 +277,7 @@
       <p15:sldGuideLst xmlns:p15="http://schemas.microsoft.com/office/powerpoint/2012/main"/>
     </p:ext>
     <p:ext uri="GoogleSlidesCustomDataVersion2">
-      <go:slidesCustomData xmlns="" xmlns:mc="http://schemas.openxmlformats.org/markup-compatibility/2006" xmlns:mv="urn:schemas-microsoft-com:mac:vml" xmlns:c="http://schemas.openxmlformats.org/drawingml/2006/chart" xmlns:dgm="http://schemas.openxmlformats.org/drawingml/2006/diagram" xmlns:o="urn:schemas-microsoft-com:office:office" xmlns:v="urn:schemas-microsoft-com:vml" xmlns:pvml="urn:schemas-microsoft-com:office:powerpoint" xmlns:com="http://schemas.openxmlformats.org/drawingml/2006/compatibility" xmlns:p14="http://schemas.microsoft.com/office/powerpoint/2010/main" xmlns:p15="http://schemas.microsoft.com/office/powerpoint/2012/main" xmlns:ahyp="http://schemas.microsoft.com/office/drawing/2018/hyperlinkcolor" xmlns:go="http://customooxmlschemas.google.com/" r:id="rId34" roundtripDataSignature="AMtx7mhJ8L8rZvXpIpP40bJJTgxOGqaY1g=="/>
+      <go:slidesCustomData xmlns:go="http://customooxmlschemas.google.com/" xmlns:ahyp="http://schemas.microsoft.com/office/drawing/2018/hyperlinkcolor" xmlns:p15="http://schemas.microsoft.com/office/powerpoint/2012/main" xmlns:p14="http://schemas.microsoft.com/office/powerpoint/2010/main" xmlns:com="http://schemas.openxmlformats.org/drawingml/2006/compatibility" xmlns:pvml="urn:schemas-microsoft-com:office:powerpoint" xmlns:v="urn:schemas-microsoft-com:vml" xmlns:o="urn:schemas-microsoft-com:office:office" xmlns:dgm="http://schemas.openxmlformats.org/drawingml/2006/diagram" xmlns:c="http://schemas.openxmlformats.org/drawingml/2006/chart" xmlns:mv="urn:schemas-microsoft-com:mac:vml" xmlns:mc="http://schemas.openxmlformats.org/markup-compatibility/2006" xmlns="" r:id="rId35" roundtripDataSignature="AMtx7mhJ8L8rZvXpIpP40bJJTgxOGqaY1g=="/>
     </p:ext>
   </p:extLst>
 </p:presentation>
@@ -968,6 +969,72 @@
     <p:extLst>
       <p:ext uri="{BB962C8B-B14F-4D97-AF65-F5344CB8AC3E}">
         <p14:creationId xmlns:p14="http://schemas.microsoft.com/office/powerpoint/2010/main" val="3448615863"/>
+      </p:ext>
+    </p:extLst>
+  </p:cSld>
+  <p:clrMapOvr>
+    <a:masterClrMapping/>
+  </p:clrMapOvr>
+</p:notes>
+</file>
+
+<file path=ppt/notesSlides/notesSlide4.xml><?xml version="1.0" encoding="utf-8"?>
+<p:notes xmlns:a="http://schemas.openxmlformats.org/drawingml/2006/main" xmlns:r="http://schemas.openxmlformats.org/officeDocument/2006/relationships" xmlns:p="http://schemas.openxmlformats.org/presentationml/2006/main">
+  <p:cSld>
+    <p:spTree>
+      <p:nvGrpSpPr>
+        <p:cNvPr id="1" name=""/>
+        <p:cNvGrpSpPr/>
+        <p:nvPr/>
+      </p:nvGrpSpPr>
+      <p:grpSpPr>
+        <a:xfrm>
+          <a:off x="0" y="0"/>
+          <a:ext cx="0" cy="0"/>
+          <a:chOff x="0" y="0"/>
+          <a:chExt cx="0" cy="0"/>
+        </a:xfrm>
+      </p:grpSpPr>
+      <p:sp>
+        <p:nvSpPr>
+          <p:cNvPr id="2" name="Slide Image Placeholder 1"/>
+          <p:cNvSpPr>
+            <a:spLocks noGrp="1" noRot="1" noChangeAspect="1"/>
+          </p:cNvSpPr>
+          <p:nvPr>
+            <p:ph type="sldImg"/>
+          </p:nvPr>
+        </p:nvSpPr>
+        <p:spPr>
+          <a:xfrm>
+            <a:off x="1143000" y="685800"/>
+            <a:ext cx="4572000" cy="3429000"/>
+          </a:xfrm>
+        </p:spPr>
+      </p:sp>
+      <p:sp>
+        <p:nvSpPr>
+          <p:cNvPr id="3" name="Notes Placeholder 2"/>
+          <p:cNvSpPr>
+            <a:spLocks noGrp="1"/>
+          </p:cNvSpPr>
+          <p:nvPr>
+            <p:ph type="body" idx="1"/>
+          </p:nvPr>
+        </p:nvSpPr>
+        <p:spPr/>
+        <p:txBody>
+          <a:bodyPr/>
+          <a:lstStyle/>
+          <a:p>
+            <a:endParaRPr lang="en-US" dirty="0"/>
+          </a:p>
+        </p:txBody>
+      </p:sp>
+    </p:spTree>
+    <p:extLst>
+      <p:ext uri="{BB962C8B-B14F-4D97-AF65-F5344CB8AC3E}">
+        <p14:creationId xmlns:p14="http://schemas.microsoft.com/office/powerpoint/2010/main" val="2940065346"/>
       </p:ext>
     </p:extLst>
   </p:cSld>
@@ -7822,7 +7889,7 @@
           <p:nvPr>
             <p:extLst>
               <p:ext uri="{D42A27DB-BD31-4B8C-83A1-F6EECF244321}">
-                <p14:modId xmlns:p14="http://schemas.microsoft.com/office/powerpoint/2010/main" val="2555270427"/>
+                <p14:modId xmlns:p14="http://schemas.microsoft.com/office/powerpoint/2010/main" val="1037574722"/>
               </p:ext>
             </p:extLst>
           </p:nvPr>
@@ -8036,7 +8103,12 @@
                         </a:defRPr>
                       </a:pPr>
                       <a:r>
-                        <a:t>54%</a:t>
+                        <a:rPr lang="vi-VN" dirty="0"/>
+                        <a:t>35</a:t>
+                      </a:r>
+                      <a:r>
+                        <a:rPr dirty="0"/>
+                        <a:t>%</a:t>
                       </a:r>
                     </a:p>
                   </a:txBody>
@@ -8128,7 +8200,12 @@
                         </a:defRPr>
                       </a:pPr>
                       <a:r>
-                        <a:t>23%</a:t>
+                        <a:rPr lang="vi-VN" dirty="0"/>
+                        <a:t>15</a:t>
+                      </a:r>
+                      <a:r>
+                        <a:rPr dirty="0"/>
+                        <a:t>%</a:t>
                       </a:r>
                     </a:p>
                   </a:txBody>
@@ -8219,7 +8296,12 @@
                         </a:defRPr>
                       </a:pPr>
                       <a:r>
-                        <a:t>15%</a:t>
+                        <a:rPr lang="vi-VN" dirty="0"/>
+                        <a:t>10</a:t>
+                      </a:r>
+                      <a:r>
+                        <a:rPr dirty="0"/>
+                        <a:t>%</a:t>
                       </a:r>
                     </a:p>
                   </a:txBody>
@@ -8310,7 +8392,12 @@
                         </a:defRPr>
                       </a:pPr>
                       <a:r>
-                        <a:t>8%</a:t>
+                        <a:rPr lang="vi-VN" dirty="0"/>
+                        <a:t>5</a:t>
+                      </a:r>
+                      <a:r>
+                        <a:rPr dirty="0"/>
+                        <a:t>%</a:t>
                       </a:r>
                     </a:p>
                   </a:txBody>
@@ -8401,7 +8488,12 @@
                         </a:defRPr>
                       </a:pPr>
                       <a:r>
-                        <a:t>0%*</a:t>
+                        <a:rPr lang="vi-VN" dirty="0"/>
+                        <a:t>35</a:t>
+                      </a:r>
+                      <a:r>
+                        <a:rPr dirty="0"/>
+                        <a:t>%*</a:t>
                       </a:r>
                     </a:p>
                   </a:txBody>
@@ -9406,7 +9498,27 @@
                   </a:schemeClr>
                 </a:solidFill>
               </a:rPr>
-              <a:t>) — 54%</a:t>
+              <a:t>) — </a:t>
+            </a:r>
+            <a:r>
+              <a:rPr lang="vi-VN" sz="2000" dirty="0">
+                <a:solidFill>
+                  <a:schemeClr val="bg2">
+                    <a:lumMod val="50000"/>
+                  </a:schemeClr>
+                </a:solidFill>
+              </a:rPr>
+              <a:t>35</a:t>
+            </a:r>
+            <a:r>
+              <a:rPr lang="en-US" sz="2000" dirty="0">
+                <a:solidFill>
+                  <a:schemeClr val="bg2">
+                    <a:lumMod val="50000"/>
+                  </a:schemeClr>
+                </a:solidFill>
+              </a:rPr>
+              <a:t>%</a:t>
             </a:r>
           </a:p>
           <a:p>
@@ -10933,7 +11045,27 @@
                   </a:schemeClr>
                 </a:solidFill>
               </a:rPr>
-              <a:t>) — 23%</a:t>
+              <a:t>) — </a:t>
+            </a:r>
+            <a:r>
+              <a:rPr lang="vi-VN" sz="2000" dirty="0">
+                <a:solidFill>
+                  <a:schemeClr val="bg2">
+                    <a:lumMod val="50000"/>
+                  </a:schemeClr>
+                </a:solidFill>
+              </a:rPr>
+              <a:t>15</a:t>
+            </a:r>
+            <a:r>
+              <a:rPr lang="en-US" sz="2000" dirty="0">
+                <a:solidFill>
+                  <a:schemeClr val="bg2">
+                    <a:lumMod val="50000"/>
+                  </a:schemeClr>
+                </a:solidFill>
+              </a:rPr>
+              <a:t>%</a:t>
             </a:r>
           </a:p>
           <a:p>
@@ -12049,7 +12181,27 @@
                   </a:schemeClr>
                 </a:solidFill>
               </a:rPr>
-              <a:t>) — 15%</a:t>
+              <a:t>) — </a:t>
+            </a:r>
+            <a:r>
+              <a:rPr lang="vi-VN" sz="2000" dirty="0">
+                <a:solidFill>
+                  <a:schemeClr val="bg2">
+                    <a:lumMod val="50000"/>
+                  </a:schemeClr>
+                </a:solidFill>
+              </a:rPr>
+              <a:t>10</a:t>
+            </a:r>
+            <a:r>
+              <a:rPr lang="en-US" sz="2000" dirty="0">
+                <a:solidFill>
+                  <a:schemeClr val="bg2">
+                    <a:lumMod val="50000"/>
+                  </a:schemeClr>
+                </a:solidFill>
+              </a:rPr>
+              <a:t>%</a:t>
             </a:r>
           </a:p>
           <a:p>
@@ -12816,7 +12968,27 @@
                   </a:schemeClr>
                 </a:solidFill>
               </a:rPr>
-              <a:t>) — 8%</a:t>
+              <a:t>) — </a:t>
+            </a:r>
+            <a:r>
+              <a:rPr lang="vi-VN" sz="2000" dirty="0">
+                <a:solidFill>
+                  <a:schemeClr val="bg2">
+                    <a:lumMod val="50000"/>
+                  </a:schemeClr>
+                </a:solidFill>
+              </a:rPr>
+              <a:t>5</a:t>
+            </a:r>
+            <a:r>
+              <a:rPr lang="en-US" sz="2000" dirty="0">
+                <a:solidFill>
+                  <a:schemeClr val="bg2">
+                    <a:lumMod val="50000"/>
+                  </a:schemeClr>
+                </a:solidFill>
+              </a:rPr>
+              <a:t>%</a:t>
             </a:r>
           </a:p>
           <a:p>
@@ -13166,7 +13338,7 @@
         <p:cNvPr id="1" name="">
           <a:extLst>
             <a:ext uri="{FF2B5EF4-FFF2-40B4-BE49-F238E27FC236}">
-              <a16:creationId xmlns:a16="http://schemas.microsoft.com/office/drawing/2014/main" id="{5EAEC9C1-5393-617A-43AE-E94847B48AE5}"/>
+              <a16:creationId xmlns:a16="http://schemas.microsoft.com/office/drawing/2014/main" id="{9D9B457C-AF65-186C-CE4B-23B7C450A34A}"/>
             </a:ext>
           </a:extLst>
         </p:cNvPr>
@@ -13186,7 +13358,7 @@
           <p:cNvPr id="2" name="Title 1">
             <a:extLst>
               <a:ext uri="{FF2B5EF4-FFF2-40B4-BE49-F238E27FC236}">
-                <a16:creationId xmlns:a16="http://schemas.microsoft.com/office/drawing/2014/main" id="{4BD28313-39B4-7B64-FC42-750164868A1C}"/>
+                <a16:creationId xmlns:a16="http://schemas.microsoft.com/office/drawing/2014/main" id="{E5509957-80CB-198E-38A8-DCB3E3AA0C50}"/>
               </a:ext>
             </a:extLst>
           </p:cNvPr>
@@ -13212,10 +13384,60 @@
       </p:sp>
       <p:sp>
         <p:nvSpPr>
-          <p:cNvPr id="12" name="TextBox 11">
-            <a:extLst>
-              <a:ext uri="{FF2B5EF4-FFF2-40B4-BE49-F238E27FC236}">
-                <a16:creationId xmlns:a16="http://schemas.microsoft.com/office/drawing/2014/main" id="{04CC88E2-C4AA-835A-D533-C3672DF63BE7}"/>
+          <p:cNvPr id="4" name="Rounded Rectangle 3">
+            <a:extLst>
+              <a:ext uri="{FF2B5EF4-FFF2-40B4-BE49-F238E27FC236}">
+                <a16:creationId xmlns:a16="http://schemas.microsoft.com/office/drawing/2014/main" id="{E91178E4-A654-162B-507C-E8E0891F9FE9}"/>
+              </a:ext>
+            </a:extLst>
+          </p:cNvPr>
+          <p:cNvSpPr/>
+          <p:nvPr/>
+        </p:nvSpPr>
+        <p:spPr>
+          <a:xfrm>
+            <a:off x="297962" y="1568336"/>
+            <a:ext cx="1457858" cy="416468"/>
+          </a:xfrm>
+          <a:prstGeom prst="roundRect">
+            <a:avLst/>
+          </a:prstGeom>
+          <a:solidFill>
+            <a:srgbClr val="FF9900"/>
+          </a:solidFill>
+          <a:ln>
+            <a:noFill/>
+          </a:ln>
+        </p:spPr>
+        <p:style>
+          <a:lnRef idx="1">
+            <a:schemeClr val="accent1"/>
+          </a:lnRef>
+          <a:fillRef idx="3">
+            <a:schemeClr val="accent1"/>
+          </a:fillRef>
+          <a:effectRef idx="2">
+            <a:schemeClr val="accent1"/>
+          </a:effectRef>
+          <a:fontRef idx="minor">
+            <a:schemeClr val="lt1"/>
+          </a:fontRef>
+        </p:style>
+        <p:txBody>
+          <a:bodyPr rtlCol="0" anchor="ctr"/>
+          <a:lstStyle/>
+          <a:p>
+            <a:pPr algn="ctr"/>
+            <a:endParaRPr/>
+          </a:p>
+        </p:txBody>
+      </p:sp>
+      <p:sp>
+        <p:nvSpPr>
+          <p:cNvPr id="5" name="TextBox 4">
+            <a:extLst>
+              <a:ext uri="{FF2B5EF4-FFF2-40B4-BE49-F238E27FC236}">
+                <a16:creationId xmlns:a16="http://schemas.microsoft.com/office/drawing/2014/main" id="{12B21BE8-4214-E07E-6469-BC817A4C9571}"/>
               </a:ext>
             </a:extLst>
           </p:cNvPr>
@@ -13224,8 +13446,8 @@
         </p:nvSpPr>
         <p:spPr>
           <a:xfrm>
-            <a:off x="731520" y="1304835"/>
-            <a:ext cx="3446777" cy="400110"/>
+            <a:off x="304115" y="1619597"/>
+            <a:ext cx="1366742" cy="307777"/>
           </a:xfrm>
           <a:prstGeom prst="rect">
             <a:avLst/>
@@ -13233,11 +13455,581 @@
           <a:noFill/>
         </p:spPr>
         <p:txBody>
-          <a:bodyPr wrap="none">
+          <a:bodyPr wrap="square">
             <a:spAutoFit/>
           </a:bodyPr>
           <a:lstStyle/>
           <a:p>
+            <a:pPr algn="ctr">
+              <a:defRPr sz="1400" b="1" i="0">
+                <a:solidFill>
+                  <a:srgbClr val="FFFFFF"/>
+                </a:solidFill>
+              </a:defRPr>
+            </a:pPr>
+            <a:r>
+              <a:rPr lang="en-US" dirty="0" err="1"/>
+              <a:t>Thuật</a:t>
+            </a:r>
+            <a:r>
+              <a:rPr lang="en-US" dirty="0"/>
+              <a:t> </a:t>
+            </a:r>
+            <a:r>
+              <a:rPr lang="en-US" dirty="0" err="1"/>
+              <a:t>toán</a:t>
+            </a:r>
+            <a:endParaRPr dirty="0"/>
+          </a:p>
+        </p:txBody>
+      </p:sp>
+      <p:sp>
+        <p:nvSpPr>
+          <p:cNvPr id="6" name="Rounded Rectangle 5">
+            <a:extLst>
+              <a:ext uri="{FF2B5EF4-FFF2-40B4-BE49-F238E27FC236}">
+                <a16:creationId xmlns:a16="http://schemas.microsoft.com/office/drawing/2014/main" id="{FE255ED1-5CE5-762B-5434-970F883AED74}"/>
+              </a:ext>
+            </a:extLst>
+          </p:cNvPr>
+          <p:cNvSpPr/>
+          <p:nvPr/>
+        </p:nvSpPr>
+        <p:spPr>
+          <a:xfrm>
+            <a:off x="1852442" y="1568336"/>
+            <a:ext cx="7015942" cy="400110"/>
+          </a:xfrm>
+          <a:prstGeom prst="roundRect">
+            <a:avLst/>
+          </a:prstGeom>
+          <a:solidFill>
+            <a:srgbClr val="F8F8F8"/>
+          </a:solidFill>
+          <a:ln>
+            <a:solidFill>
+              <a:srgbClr val="FF9900"/>
+            </a:solidFill>
+          </a:ln>
+        </p:spPr>
+        <p:style>
+          <a:lnRef idx="1">
+            <a:schemeClr val="accent1"/>
+          </a:lnRef>
+          <a:fillRef idx="3">
+            <a:schemeClr val="accent1"/>
+          </a:fillRef>
+          <a:effectRef idx="2">
+            <a:schemeClr val="accent1"/>
+          </a:effectRef>
+          <a:fontRef idx="minor">
+            <a:schemeClr val="lt1"/>
+          </a:fontRef>
+        </p:style>
+        <p:txBody>
+          <a:bodyPr rtlCol="0" anchor="ctr"/>
+          <a:lstStyle/>
+          <a:p>
+            <a:pPr algn="ctr"/>
+            <a:endParaRPr/>
+          </a:p>
+        </p:txBody>
+      </p:sp>
+      <p:sp>
+        <p:nvSpPr>
+          <p:cNvPr id="7" name="TextBox 6">
+            <a:extLst>
+              <a:ext uri="{FF2B5EF4-FFF2-40B4-BE49-F238E27FC236}">
+                <a16:creationId xmlns:a16="http://schemas.microsoft.com/office/drawing/2014/main" id="{06C1921F-DDF3-47AE-42F9-5B0BD90DC661}"/>
+              </a:ext>
+            </a:extLst>
+          </p:cNvPr>
+          <p:cNvSpPr txBox="1"/>
+          <p:nvPr/>
+        </p:nvSpPr>
+        <p:spPr>
+          <a:xfrm>
+            <a:off x="2035322" y="1619597"/>
+            <a:ext cx="6651477" cy="338554"/>
+          </a:xfrm>
+          <a:prstGeom prst="rect">
+            <a:avLst/>
+          </a:prstGeom>
+          <a:noFill/>
+        </p:spPr>
+        <p:txBody>
+          <a:bodyPr wrap="square">
+            <a:spAutoFit/>
+          </a:bodyPr>
+          <a:lstStyle/>
+          <a:p>
+            <a:pPr>
+              <a:defRPr sz="1600" b="1" i="0">
+                <a:solidFill>
+                  <a:srgbClr val="003366"/>
+                </a:solidFill>
+              </a:defRPr>
+            </a:pPr>
+            <a:r>
+              <a:rPr lang="en-US" sz="1600" b="1" dirty="0"/>
+              <a:t>Sentence Transformer</a:t>
+            </a:r>
+          </a:p>
+        </p:txBody>
+      </p:sp>
+      <p:sp>
+        <p:nvSpPr>
+          <p:cNvPr id="9" name="Rounded Rectangle 8">
+            <a:extLst>
+              <a:ext uri="{FF2B5EF4-FFF2-40B4-BE49-F238E27FC236}">
+                <a16:creationId xmlns:a16="http://schemas.microsoft.com/office/drawing/2014/main" id="{FF04E204-BC09-C85D-4D97-C5DBF8A6D045}"/>
+              </a:ext>
+            </a:extLst>
+          </p:cNvPr>
+          <p:cNvSpPr/>
+          <p:nvPr/>
+        </p:nvSpPr>
+        <p:spPr>
+          <a:xfrm>
+            <a:off x="297962" y="2240379"/>
+            <a:ext cx="1457858" cy="603815"/>
+          </a:xfrm>
+          <a:prstGeom prst="roundRect">
+            <a:avLst/>
+          </a:prstGeom>
+          <a:solidFill>
+            <a:srgbClr val="0070C0"/>
+          </a:solidFill>
+          <a:ln>
+            <a:noFill/>
+          </a:ln>
+        </p:spPr>
+        <p:style>
+          <a:lnRef idx="1">
+            <a:schemeClr val="accent1"/>
+          </a:lnRef>
+          <a:fillRef idx="3">
+            <a:schemeClr val="accent1"/>
+          </a:fillRef>
+          <a:effectRef idx="2">
+            <a:schemeClr val="accent1"/>
+          </a:effectRef>
+          <a:fontRef idx="minor">
+            <a:schemeClr val="lt1"/>
+          </a:fontRef>
+        </p:style>
+        <p:txBody>
+          <a:bodyPr rtlCol="0" anchor="ctr"/>
+          <a:lstStyle/>
+          <a:p>
+            <a:pPr algn="ctr"/>
+            <a:endParaRPr/>
+          </a:p>
+        </p:txBody>
+      </p:sp>
+      <p:sp>
+        <p:nvSpPr>
+          <p:cNvPr id="10" name="TextBox 9">
+            <a:extLst>
+              <a:ext uri="{FF2B5EF4-FFF2-40B4-BE49-F238E27FC236}">
+                <a16:creationId xmlns:a16="http://schemas.microsoft.com/office/drawing/2014/main" id="{08F63AD2-A28E-4E6B-9946-1DB45ADD0433}"/>
+              </a:ext>
+            </a:extLst>
+          </p:cNvPr>
+          <p:cNvSpPr txBox="1"/>
+          <p:nvPr/>
+        </p:nvSpPr>
+        <p:spPr>
+          <a:xfrm>
+            <a:off x="342264" y="2282875"/>
+            <a:ext cx="1366742" cy="523220"/>
+          </a:xfrm>
+          <a:prstGeom prst="rect">
+            <a:avLst/>
+          </a:prstGeom>
+          <a:noFill/>
+        </p:spPr>
+        <p:txBody>
+          <a:bodyPr wrap="square">
+            <a:spAutoFit/>
+          </a:bodyPr>
+          <a:lstStyle/>
+          <a:p>
+            <a:pPr algn="ctr">
+              <a:defRPr sz="1400" b="1" i="0">
+                <a:solidFill>
+                  <a:srgbClr val="FFFFFF"/>
+                </a:solidFill>
+              </a:defRPr>
+            </a:pPr>
+            <a:r>
+              <a:rPr lang="vi-VN" dirty="0"/>
+              <a:t>Nghĩa đơn giản</a:t>
+            </a:r>
+            <a:endParaRPr dirty="0"/>
+          </a:p>
+        </p:txBody>
+      </p:sp>
+      <p:sp>
+        <p:nvSpPr>
+          <p:cNvPr id="11" name="Rounded Rectangle 10">
+            <a:extLst>
+              <a:ext uri="{FF2B5EF4-FFF2-40B4-BE49-F238E27FC236}">
+                <a16:creationId xmlns:a16="http://schemas.microsoft.com/office/drawing/2014/main" id="{882DBC16-895B-5969-D1BC-A7F34D43B4B7}"/>
+              </a:ext>
+            </a:extLst>
+          </p:cNvPr>
+          <p:cNvSpPr/>
+          <p:nvPr/>
+        </p:nvSpPr>
+        <p:spPr>
+          <a:xfrm>
+            <a:off x="1829822" y="2246720"/>
+            <a:ext cx="7015942" cy="597474"/>
+          </a:xfrm>
+          <a:prstGeom prst="roundRect">
+            <a:avLst/>
+          </a:prstGeom>
+          <a:solidFill>
+            <a:srgbClr val="F8F8F8"/>
+          </a:solidFill>
+          <a:ln>
+            <a:solidFill>
+              <a:srgbClr val="0070C0"/>
+            </a:solidFill>
+          </a:ln>
+        </p:spPr>
+        <p:style>
+          <a:lnRef idx="1">
+            <a:schemeClr val="accent1"/>
+          </a:lnRef>
+          <a:fillRef idx="3">
+            <a:schemeClr val="accent1"/>
+          </a:fillRef>
+          <a:effectRef idx="2">
+            <a:schemeClr val="accent1"/>
+          </a:effectRef>
+          <a:fontRef idx="minor">
+            <a:schemeClr val="lt1"/>
+          </a:fontRef>
+        </p:style>
+        <p:txBody>
+          <a:bodyPr rtlCol="0" anchor="ctr"/>
+          <a:lstStyle/>
+          <a:p>
+            <a:pPr algn="ctr"/>
+            <a:endParaRPr/>
+          </a:p>
+        </p:txBody>
+      </p:sp>
+      <p:sp>
+        <p:nvSpPr>
+          <p:cNvPr id="12" name="TextBox 11">
+            <a:extLst>
+              <a:ext uri="{FF2B5EF4-FFF2-40B4-BE49-F238E27FC236}">
+                <a16:creationId xmlns:a16="http://schemas.microsoft.com/office/drawing/2014/main" id="{6D642405-71B4-6611-F104-373449DB7C65}"/>
+              </a:ext>
+            </a:extLst>
+          </p:cNvPr>
+          <p:cNvSpPr txBox="1"/>
+          <p:nvPr/>
+        </p:nvSpPr>
+        <p:spPr>
+          <a:xfrm>
+            <a:off x="1978571" y="2363047"/>
+            <a:ext cx="6651477" cy="338554"/>
+          </a:xfrm>
+          <a:prstGeom prst="rect">
+            <a:avLst/>
+          </a:prstGeom>
+          <a:noFill/>
+        </p:spPr>
+        <p:txBody>
+          <a:bodyPr wrap="square">
+            <a:spAutoFit/>
+          </a:bodyPr>
+          <a:lstStyle/>
+          <a:p>
+            <a:pPr>
+              <a:defRPr sz="1600" b="1" i="0">
+                <a:solidFill>
+                  <a:srgbClr val="003366"/>
+                </a:solidFill>
+              </a:defRPr>
+            </a:pPr>
+            <a:r>
+              <a:rPr lang="vi-VN" sz="1600" b="1" dirty="0"/>
+              <a:t>D</a:t>
+            </a:r>
+            <a:r>
+              <a:rPr lang="en-US" sz="1600" b="1" dirty="0" err="1"/>
+              <a:t>ùng</a:t>
+            </a:r>
+            <a:r>
+              <a:rPr lang="en-US" sz="1600" b="1" dirty="0"/>
+              <a:t> </a:t>
+            </a:r>
+            <a:r>
+              <a:rPr lang="en-US" sz="1600" b="1" dirty="0" err="1"/>
+              <a:t>để</a:t>
+            </a:r>
+            <a:r>
+              <a:rPr lang="en-US" sz="1600" b="1" dirty="0"/>
+              <a:t> </a:t>
+            </a:r>
+            <a:r>
+              <a:rPr lang="en-US" sz="1600" b="1" dirty="0" err="1"/>
+              <a:t>chỉ</a:t>
+            </a:r>
+            <a:r>
+              <a:rPr lang="en-US" sz="1600" b="1" dirty="0"/>
+              <a:t> ý </a:t>
+            </a:r>
+            <a:r>
+              <a:rPr lang="en-US" sz="1600" b="1" dirty="0" err="1"/>
+              <a:t>nghĩa</a:t>
+            </a:r>
+            <a:r>
+              <a:rPr lang="en-US" sz="1600" b="1" dirty="0"/>
+              <a:t> </a:t>
+            </a:r>
+            <a:r>
+              <a:rPr lang="en-US" sz="1600" b="1" dirty="0" err="1"/>
+              <a:t>thực</a:t>
+            </a:r>
+            <a:r>
+              <a:rPr lang="en-US" sz="1600" b="1" dirty="0"/>
+              <a:t> </a:t>
+            </a:r>
+            <a:r>
+              <a:rPr lang="en-US" sz="1600" b="1" dirty="0" err="1"/>
+              <a:t>sự</a:t>
+            </a:r>
+            <a:r>
+              <a:rPr lang="en-US" sz="1600" b="1" dirty="0"/>
+              <a:t> </a:t>
+            </a:r>
+            <a:r>
+              <a:rPr lang="en-US" sz="1600" b="1" dirty="0" err="1"/>
+              <a:t>đằng</a:t>
+            </a:r>
+            <a:r>
+              <a:rPr lang="en-US" sz="1600" b="1" dirty="0"/>
+              <a:t> </a:t>
+            </a:r>
+            <a:r>
+              <a:rPr lang="en-US" sz="1600" b="1" dirty="0" err="1"/>
+              <a:t>sau</a:t>
+            </a:r>
+            <a:r>
+              <a:rPr lang="en-US" sz="1600" b="1" dirty="0"/>
+              <a:t> </a:t>
+            </a:r>
+            <a:r>
+              <a:rPr lang="en-US" sz="1600" b="1" dirty="0" err="1"/>
+              <a:t>những</a:t>
+            </a:r>
+            <a:r>
+              <a:rPr lang="en-US" sz="1600" b="1" dirty="0"/>
+              <a:t> con </a:t>
+            </a:r>
+            <a:r>
+              <a:rPr lang="en-US" sz="1600" b="1" dirty="0" err="1"/>
+              <a:t>chữ</a:t>
+            </a:r>
+            <a:endParaRPr dirty="0"/>
+          </a:p>
+        </p:txBody>
+      </p:sp>
+      <p:sp>
+        <p:nvSpPr>
+          <p:cNvPr id="14" name="Rounded Rectangle 13">
+            <a:extLst>
+              <a:ext uri="{FF2B5EF4-FFF2-40B4-BE49-F238E27FC236}">
+                <a16:creationId xmlns:a16="http://schemas.microsoft.com/office/drawing/2014/main" id="{9E68C565-B5FE-E909-1985-2BC0517697C9}"/>
+              </a:ext>
+            </a:extLst>
+          </p:cNvPr>
+          <p:cNvSpPr/>
+          <p:nvPr/>
+        </p:nvSpPr>
+        <p:spPr>
+          <a:xfrm>
+            <a:off x="296706" y="3284025"/>
+            <a:ext cx="1457858" cy="1114349"/>
+          </a:xfrm>
+          <a:prstGeom prst="roundRect">
+            <a:avLst/>
+          </a:prstGeom>
+          <a:solidFill>
+            <a:srgbClr val="00B050"/>
+          </a:solidFill>
+          <a:ln>
+            <a:noFill/>
+          </a:ln>
+        </p:spPr>
+        <p:style>
+          <a:lnRef idx="1">
+            <a:schemeClr val="accent1"/>
+          </a:lnRef>
+          <a:fillRef idx="3">
+            <a:schemeClr val="accent1"/>
+          </a:fillRef>
+          <a:effectRef idx="2">
+            <a:schemeClr val="accent1"/>
+          </a:effectRef>
+          <a:fontRef idx="minor">
+            <a:schemeClr val="lt1"/>
+          </a:fontRef>
+        </p:style>
+        <p:txBody>
+          <a:bodyPr rtlCol="0" anchor="ctr"/>
+          <a:lstStyle/>
+          <a:p>
+            <a:pPr algn="ctr"/>
+            <a:endParaRPr/>
+          </a:p>
+        </p:txBody>
+      </p:sp>
+      <p:sp>
+        <p:nvSpPr>
+          <p:cNvPr id="15" name="TextBox 14">
+            <a:extLst>
+              <a:ext uri="{FF2B5EF4-FFF2-40B4-BE49-F238E27FC236}">
+                <a16:creationId xmlns:a16="http://schemas.microsoft.com/office/drawing/2014/main" id="{01704616-CAAE-FA16-0B77-D9E6D31A1280}"/>
+              </a:ext>
+            </a:extLst>
+          </p:cNvPr>
+          <p:cNvSpPr txBox="1"/>
+          <p:nvPr/>
+        </p:nvSpPr>
+        <p:spPr>
+          <a:xfrm>
+            <a:off x="304115" y="3527250"/>
+            <a:ext cx="1366742" cy="523220"/>
+          </a:xfrm>
+          <a:prstGeom prst="rect">
+            <a:avLst/>
+          </a:prstGeom>
+          <a:noFill/>
+        </p:spPr>
+        <p:txBody>
+          <a:bodyPr wrap="square">
+            <a:spAutoFit/>
+          </a:bodyPr>
+          <a:lstStyle/>
+          <a:p>
+            <a:pPr algn="ctr">
+              <a:defRPr sz="1400" b="1" i="0">
+                <a:solidFill>
+                  <a:srgbClr val="FFFFFF"/>
+                </a:solidFill>
+              </a:defRPr>
+            </a:pPr>
+            <a:r>
+              <a:rPr lang="en-US" dirty="0" err="1"/>
+              <a:t>Cách</a:t>
+            </a:r>
+            <a:r>
+              <a:rPr lang="en-US" dirty="0"/>
+              <a:t> </a:t>
+            </a:r>
+            <a:r>
+              <a:rPr lang="en-US" dirty="0" err="1"/>
+              <a:t>hoạt</a:t>
+            </a:r>
+            <a:r>
+              <a:rPr lang="en-US" dirty="0"/>
+              <a:t> </a:t>
+            </a:r>
+            <a:r>
+              <a:rPr lang="en-US" dirty="0" err="1"/>
+              <a:t>động</a:t>
+            </a:r>
+            <a:endParaRPr dirty="0"/>
+          </a:p>
+        </p:txBody>
+      </p:sp>
+      <p:sp>
+        <p:nvSpPr>
+          <p:cNvPr id="16" name="Rounded Rectangle 15">
+            <a:extLst>
+              <a:ext uri="{FF2B5EF4-FFF2-40B4-BE49-F238E27FC236}">
+                <a16:creationId xmlns:a16="http://schemas.microsoft.com/office/drawing/2014/main" id="{CFD35431-A1E2-2719-F933-CD91A527732F}"/>
+              </a:ext>
+            </a:extLst>
+          </p:cNvPr>
+          <p:cNvSpPr/>
+          <p:nvPr/>
+        </p:nvSpPr>
+        <p:spPr>
+          <a:xfrm>
+            <a:off x="1852442" y="3303323"/>
+            <a:ext cx="7015942" cy="1114349"/>
+          </a:xfrm>
+          <a:prstGeom prst="roundRect">
+            <a:avLst/>
+          </a:prstGeom>
+          <a:solidFill>
+            <a:srgbClr val="F8F8F8"/>
+          </a:solidFill>
+          <a:ln>
+            <a:solidFill>
+              <a:srgbClr val="00B050"/>
+            </a:solidFill>
+          </a:ln>
+        </p:spPr>
+        <p:style>
+          <a:lnRef idx="1">
+            <a:schemeClr val="accent1"/>
+          </a:lnRef>
+          <a:fillRef idx="3">
+            <a:schemeClr val="accent1"/>
+          </a:fillRef>
+          <a:effectRef idx="2">
+            <a:schemeClr val="accent1"/>
+          </a:effectRef>
+          <a:fontRef idx="minor">
+            <a:schemeClr val="lt1"/>
+          </a:fontRef>
+        </p:style>
+        <p:txBody>
+          <a:bodyPr rtlCol="0" anchor="ctr"/>
+          <a:lstStyle/>
+          <a:p>
+            <a:pPr algn="ctr"/>
+            <a:endParaRPr/>
+          </a:p>
+        </p:txBody>
+      </p:sp>
+      <p:sp>
+        <p:nvSpPr>
+          <p:cNvPr id="20" name="TextBox 19">
+            <a:extLst>
+              <a:ext uri="{FF2B5EF4-FFF2-40B4-BE49-F238E27FC236}">
+                <a16:creationId xmlns:a16="http://schemas.microsoft.com/office/drawing/2014/main" id="{236A3C44-F8BC-E321-785B-A49365DCAAD2}"/>
+              </a:ext>
+            </a:extLst>
+          </p:cNvPr>
+          <p:cNvSpPr txBox="1"/>
+          <p:nvPr/>
+        </p:nvSpPr>
+        <p:spPr>
+          <a:xfrm>
+            <a:off x="343682" y="999200"/>
+            <a:ext cx="7511935" cy="707886"/>
+          </a:xfrm>
+          <a:prstGeom prst="rect">
+            <a:avLst/>
+          </a:prstGeom>
+          <a:noFill/>
+        </p:spPr>
+        <p:txBody>
+          <a:bodyPr wrap="square">
+            <a:spAutoFit/>
+          </a:bodyPr>
+          <a:lstStyle/>
+          <a:p>
             <a:pPr>
               <a:defRPr sz="2800" b="1">
                 <a:solidFill>
@@ -13246,86 +14038,175 @@
               </a:defRPr>
             </a:pPr>
             <a:r>
-              <a:rPr sz="2000" dirty="0">
+              <a:rPr lang="en-US" sz="2000" dirty="0" err="1">
                 <a:solidFill>
                   <a:schemeClr val="bg2">
                     <a:lumMod val="50000"/>
                   </a:schemeClr>
                 </a:solidFill>
               </a:rPr>
-              <a:t>Công </a:t>
-            </a:r>
-            <a:r>
-              <a:rPr sz="2000" dirty="0" err="1">
+              <a:t>Tiêu</a:t>
+            </a:r>
+            <a:r>
+              <a:rPr lang="en-US" sz="2000" dirty="0">
                 <a:solidFill>
                   <a:schemeClr val="bg2">
                     <a:lumMod val="50000"/>
                   </a:schemeClr>
                 </a:solidFill>
               </a:rPr>
-              <a:t>thức</a:t>
-            </a:r>
-            <a:r>
-              <a:rPr sz="2000" dirty="0">
+              <a:t> </a:t>
+            </a:r>
+            <a:r>
+              <a:rPr lang="en-US" sz="2000" dirty="0" err="1">
                 <a:solidFill>
                   <a:schemeClr val="bg2">
                     <a:lumMod val="50000"/>
                   </a:schemeClr>
                 </a:solidFill>
               </a:rPr>
-              <a:t> </a:t>
-            </a:r>
-            <a:r>
-              <a:rPr sz="2000" dirty="0" err="1">
+              <a:t>chí</a:t>
+            </a:r>
+            <a:r>
+              <a:rPr lang="en-US" sz="2000" dirty="0">
                 <a:solidFill>
                   <a:schemeClr val="bg2">
                     <a:lumMod val="50000"/>
                   </a:schemeClr>
                 </a:solidFill>
               </a:rPr>
-              <a:t>Tổng</a:t>
-            </a:r>
-            <a:r>
-              <a:rPr sz="2000" dirty="0">
+              <a:t> </a:t>
+            </a:r>
+            <a:r>
+              <a:rPr lang="vi-VN" sz="2000" dirty="0">
                 <a:solidFill>
                   <a:schemeClr val="bg2">
                     <a:lumMod val="50000"/>
                   </a:schemeClr>
                 </a:solidFill>
               </a:rPr>
-              <a:t> </a:t>
-            </a:r>
-            <a:r>
-              <a:rPr sz="2000" dirty="0" err="1">
+              <a:t>5</a:t>
+            </a:r>
+            <a:r>
+              <a:rPr lang="en-US" sz="2000" dirty="0">
                 <a:solidFill>
                   <a:schemeClr val="bg2">
                     <a:lumMod val="50000"/>
                   </a:schemeClr>
                 </a:solidFill>
               </a:rPr>
-              <a:t>hợp</a:t>
-            </a:r>
-            <a:r>
-              <a:rPr sz="2000" dirty="0">
+              <a:t>: </a:t>
+            </a:r>
+            <a:r>
+              <a:rPr lang="vi-VN" sz="2000" dirty="0">
                 <a:solidFill>
                   <a:schemeClr val="bg2">
                     <a:lumMod val="50000"/>
                   </a:schemeClr>
                 </a:solidFill>
               </a:rPr>
-              <a:t> </a:t>
-            </a:r>
-            <a:r>
-              <a:rPr sz="2000" dirty="0" err="1">
+              <a:t>SEMANTIC</a:t>
+            </a:r>
+            <a:r>
+              <a:rPr lang="en-US" sz="2000" dirty="0">
                 <a:solidFill>
                   <a:schemeClr val="bg2">
                     <a:lumMod val="50000"/>
                   </a:schemeClr>
                 </a:solidFill>
               </a:rPr>
+              <a:t> SCORE (</a:t>
+            </a:r>
+            <a:r>
+              <a:rPr lang="en-US" sz="2000" dirty="0" err="1">
+                <a:solidFill>
+                  <a:schemeClr val="bg2">
+                    <a:lumMod val="50000"/>
+                  </a:schemeClr>
+                </a:solidFill>
+              </a:rPr>
               <a:t>Điểm</a:t>
             </a:r>
-            <a:endParaRPr sz="2000" dirty="0">
+            <a:r>
+              <a:rPr lang="en-US" sz="2000" dirty="0">
+                <a:solidFill>
+                  <a:schemeClr val="bg2">
+                    <a:lumMod val="50000"/>
+                  </a:schemeClr>
+                </a:solidFill>
+              </a:rPr>
+              <a:t> </a:t>
+            </a:r>
+            <a:r>
+              <a:rPr lang="en-US" sz="2000" dirty="0" err="1">
+                <a:solidFill>
+                  <a:schemeClr val="bg2">
+                    <a:lumMod val="50000"/>
+                  </a:schemeClr>
+                </a:solidFill>
+              </a:rPr>
+              <a:t>Từ</a:t>
+            </a:r>
+            <a:r>
+              <a:rPr lang="en-US" sz="2000" dirty="0">
+                <a:solidFill>
+                  <a:schemeClr val="bg2">
+                    <a:lumMod val="50000"/>
+                  </a:schemeClr>
+                </a:solidFill>
+              </a:rPr>
+              <a:t> </a:t>
+            </a:r>
+            <a:r>
+              <a:rPr lang="en-US" sz="2000" dirty="0" err="1">
+                <a:solidFill>
+                  <a:schemeClr val="bg2">
+                    <a:lumMod val="50000"/>
+                  </a:schemeClr>
+                </a:solidFill>
+              </a:rPr>
+              <a:t>vựng</a:t>
+            </a:r>
+            <a:r>
+              <a:rPr lang="en-US" sz="2000" dirty="0">
+                <a:solidFill>
+                  <a:schemeClr val="bg2">
+                    <a:lumMod val="50000"/>
+                  </a:schemeClr>
+                </a:solidFill>
+              </a:rPr>
+              <a:t>) — </a:t>
+            </a:r>
+            <a:r>
+              <a:rPr lang="vi-VN" sz="2000" dirty="0">
+                <a:solidFill>
+                  <a:schemeClr val="bg2">
+                    <a:lumMod val="50000"/>
+                  </a:schemeClr>
+                </a:solidFill>
+              </a:rPr>
+              <a:t>35</a:t>
+            </a:r>
+            <a:r>
+              <a:rPr lang="en-US" sz="2000" dirty="0">
+                <a:solidFill>
+                  <a:schemeClr val="bg2">
+                    <a:lumMod val="50000"/>
+                  </a:schemeClr>
+                </a:solidFill>
+              </a:rPr>
+              <a:t>%</a:t>
+            </a:r>
+          </a:p>
+          <a:p>
+            <a:pPr>
+              <a:defRPr sz="2800" b="1">
+                <a:solidFill>
+                  <a:srgbClr val="FFFFFF"/>
+                </a:solidFill>
+              </a:defRPr>
+            </a:pPr>
+            <a:endParaRPr lang="vi-VN" sz="2000" dirty="0">
               <a:solidFill>
                 <a:schemeClr val="bg2">
                   <a:lumMod val="50000"/>
@@ -13337,10 +14218,52 @@
       </p:sp>
       <p:sp>
         <p:nvSpPr>
-          <p:cNvPr id="13" name="Rounded Rectangle 3">
-            <a:extLst>
-              <a:ext uri="{FF2B5EF4-FFF2-40B4-BE49-F238E27FC236}">
-                <a16:creationId xmlns:a16="http://schemas.microsoft.com/office/drawing/2014/main" id="{5788F7FE-A235-2BC5-D476-AE2D376E82DE}"/>
+          <p:cNvPr id="3" name="TextBox 2">
+            <a:extLst>
+              <a:ext uri="{FF2B5EF4-FFF2-40B4-BE49-F238E27FC236}">
+                <a16:creationId xmlns:a16="http://schemas.microsoft.com/office/drawing/2014/main" id="{4A980E64-5113-ED32-F3B8-E6593A8C181A}"/>
+              </a:ext>
+            </a:extLst>
+          </p:cNvPr>
+          <p:cNvSpPr txBox="1"/>
+          <p:nvPr/>
+        </p:nvSpPr>
+        <p:spPr>
+          <a:xfrm>
+            <a:off x="1670857" y="4657446"/>
+            <a:ext cx="1366742" cy="307777"/>
+          </a:xfrm>
+          <a:prstGeom prst="rect">
+            <a:avLst/>
+          </a:prstGeom>
+          <a:noFill/>
+        </p:spPr>
+        <p:txBody>
+          <a:bodyPr wrap="square">
+            <a:spAutoFit/>
+          </a:bodyPr>
+          <a:lstStyle/>
+          <a:p>
+            <a:pPr algn="ctr">
+              <a:defRPr sz="1400" b="1" i="0">
+                <a:solidFill>
+                  <a:srgbClr val="FFFFFF"/>
+                </a:solidFill>
+              </a:defRPr>
+            </a:pPr>
+            <a:r>
+              <a:rPr dirty="0"/>
+              <a:t>BƯỚC 2</a:t>
+            </a:r>
+          </a:p>
+        </p:txBody>
+      </p:sp>
+      <p:sp>
+        <p:nvSpPr>
+          <p:cNvPr id="21" name="Rounded Rectangle 3">
+            <a:extLst>
+              <a:ext uri="{FF2B5EF4-FFF2-40B4-BE49-F238E27FC236}">
+                <a16:creationId xmlns:a16="http://schemas.microsoft.com/office/drawing/2014/main" id="{9CF21952-3370-B728-56DC-D3D81852433D}"/>
               </a:ext>
             </a:extLst>
           </p:cNvPr>
@@ -13349,14 +14272,14 @@
         </p:nvSpPr>
         <p:spPr>
           <a:xfrm>
-            <a:off x="398236" y="2573565"/>
-            <a:ext cx="1487714" cy="822960"/>
+            <a:off x="285644" y="4787830"/>
+            <a:ext cx="1457858" cy="1181577"/>
           </a:xfrm>
           <a:prstGeom prst="roundRect">
             <a:avLst/>
           </a:prstGeom>
           <a:solidFill>
-            <a:srgbClr val="005293"/>
+            <a:srgbClr val="FF9900"/>
           </a:solidFill>
           <a:ln>
             <a:noFill/>
@@ -13387,10 +14310,10 @@
       </p:sp>
       <p:sp>
         <p:nvSpPr>
-          <p:cNvPr id="14" name="TextBox 13">
-            <a:extLst>
-              <a:ext uri="{FF2B5EF4-FFF2-40B4-BE49-F238E27FC236}">
-                <a16:creationId xmlns:a16="http://schemas.microsoft.com/office/drawing/2014/main" id="{886871AF-BE16-238C-5FC4-924ABEDF7D88}"/>
+          <p:cNvPr id="22" name="TextBox 21">
+            <a:extLst>
+              <a:ext uri="{FF2B5EF4-FFF2-40B4-BE49-F238E27FC236}">
+                <a16:creationId xmlns:a16="http://schemas.microsoft.com/office/drawing/2014/main" id="{AB2664C2-04F2-CC66-194A-256D9F0E3ADE}"/>
               </a:ext>
             </a:extLst>
           </p:cNvPr>
@@ -13399,8 +14322,8 @@
         </p:nvSpPr>
         <p:spPr>
           <a:xfrm>
-            <a:off x="296636" y="2710725"/>
-            <a:ext cx="1589314" cy="461665"/>
+            <a:off x="304115" y="4989392"/>
+            <a:ext cx="1366742" cy="307777"/>
           </a:xfrm>
           <a:prstGeom prst="rect">
             <a:avLst/>
@@ -13414,28 +14337,34 @@
           <a:lstStyle/>
           <a:p>
             <a:pPr algn="ctr">
-              <a:defRPr sz="1200" b="1">
+              <a:defRPr sz="1400" b="1" i="0">
                 <a:solidFill>
                   <a:srgbClr val="FFFFFF"/>
                 </a:solidFill>
               </a:defRPr>
             </a:pPr>
             <a:r>
-              <a:t>W₁×Lex</a:t>
-            </a:r>
-            <a:br/>
-            <a:r>
-              <a:t>Lexical</a:t>
-            </a:r>
-          </a:p>
-        </p:txBody>
-      </p:sp>
-      <p:sp>
-        <p:nvSpPr>
-          <p:cNvPr id="15" name="Right Arrow 5">
-            <a:extLst>
-              <a:ext uri="{FF2B5EF4-FFF2-40B4-BE49-F238E27FC236}">
-                <a16:creationId xmlns:a16="http://schemas.microsoft.com/office/drawing/2014/main" id="{EEC667EF-E440-C008-50B6-A2EBAE7183F8}"/>
+              <a:rPr lang="en-US" dirty="0" err="1"/>
+              <a:t>Ví</a:t>
+            </a:r>
+            <a:r>
+              <a:rPr lang="en-US" dirty="0"/>
+              <a:t> </a:t>
+            </a:r>
+            <a:r>
+              <a:rPr lang="en-US" dirty="0" err="1"/>
+              <a:t>dụ</a:t>
+            </a:r>
+            <a:endParaRPr lang="en-US" dirty="0"/>
+          </a:p>
+        </p:txBody>
+      </p:sp>
+      <p:sp>
+        <p:nvSpPr>
+          <p:cNvPr id="24" name="Rounded Rectangle 5">
+            <a:extLst>
+              <a:ext uri="{FF2B5EF4-FFF2-40B4-BE49-F238E27FC236}">
+                <a16:creationId xmlns:a16="http://schemas.microsoft.com/office/drawing/2014/main" id="{456DE6AB-539F-CD18-CA78-40CE5420B26A}"/>
               </a:ext>
             </a:extLst>
           </p:cNvPr>
@@ -13444,17 +14373,19 @@
         </p:nvSpPr>
         <p:spPr>
           <a:xfrm>
-            <a:off x="1904238" y="2847885"/>
-            <a:ext cx="137160" cy="274320"/>
-          </a:xfrm>
-          <a:prstGeom prst="rightArrow">
+            <a:off x="1869501" y="4787831"/>
+            <a:ext cx="7015942" cy="1181577"/>
+          </a:xfrm>
+          <a:prstGeom prst="roundRect">
             <a:avLst/>
           </a:prstGeom>
           <a:solidFill>
-            <a:srgbClr val="7F8C8D"/>
+            <a:srgbClr val="F8F8F8"/>
           </a:solidFill>
           <a:ln>
-            <a:noFill/>
+            <a:solidFill>
+              <a:srgbClr val="FF9900"/>
+            </a:solidFill>
           </a:ln>
         </p:spPr>
         <p:style>
@@ -13482,60 +14413,10 @@
       </p:sp>
       <p:sp>
         <p:nvSpPr>
-          <p:cNvPr id="16" name="Rounded Rectangle 6">
-            <a:extLst>
-              <a:ext uri="{FF2B5EF4-FFF2-40B4-BE49-F238E27FC236}">
-                <a16:creationId xmlns:a16="http://schemas.microsoft.com/office/drawing/2014/main" id="{36BA45FF-9C2D-9BDE-0C83-272124F34DF4}"/>
-              </a:ext>
-            </a:extLst>
-          </p:cNvPr>
-          <p:cNvSpPr/>
-          <p:nvPr/>
-        </p:nvSpPr>
-        <p:spPr>
-          <a:xfrm>
-            <a:off x="2023110" y="2573565"/>
-            <a:ext cx="1487714" cy="822960"/>
-          </a:xfrm>
-          <a:prstGeom prst="roundRect">
-            <a:avLst/>
-          </a:prstGeom>
-          <a:solidFill>
-            <a:srgbClr val="008CBA"/>
-          </a:solidFill>
-          <a:ln>
-            <a:noFill/>
-          </a:ln>
-        </p:spPr>
-        <p:style>
-          <a:lnRef idx="1">
-            <a:schemeClr val="accent1"/>
-          </a:lnRef>
-          <a:fillRef idx="3">
-            <a:schemeClr val="accent1"/>
-          </a:fillRef>
-          <a:effectRef idx="2">
-            <a:schemeClr val="accent1"/>
-          </a:effectRef>
-          <a:fontRef idx="minor">
-            <a:schemeClr val="lt1"/>
-          </a:fontRef>
-        </p:style>
-        <p:txBody>
-          <a:bodyPr rtlCol="0" anchor="ctr"/>
-          <a:lstStyle/>
-          <a:p>
-            <a:pPr algn="ctr"/>
-            <a:endParaRPr/>
-          </a:p>
-        </p:txBody>
-      </p:sp>
-      <p:sp>
-        <p:nvSpPr>
-          <p:cNvPr id="17" name="TextBox 16">
-            <a:extLst>
-              <a:ext uri="{FF2B5EF4-FFF2-40B4-BE49-F238E27FC236}">
-                <a16:creationId xmlns:a16="http://schemas.microsoft.com/office/drawing/2014/main" id="{FB45B8B5-F1C4-BED2-125B-893C761D9110}"/>
+          <p:cNvPr id="31" name="TextBox 30">
+            <a:extLst>
+              <a:ext uri="{FF2B5EF4-FFF2-40B4-BE49-F238E27FC236}">
+                <a16:creationId xmlns:a16="http://schemas.microsoft.com/office/drawing/2014/main" id="{C3313002-5088-4605-AD89-B6783C4AC412}"/>
               </a:ext>
             </a:extLst>
           </p:cNvPr>
@@ -13544,8 +14425,8 @@
         </p:nvSpPr>
         <p:spPr>
           <a:xfrm>
-            <a:off x="1832024" y="2710725"/>
-            <a:ext cx="1828800" cy="822960"/>
+            <a:off x="1921822" y="3352442"/>
+            <a:ext cx="6651477" cy="892552"/>
           </a:xfrm>
           <a:prstGeom prst="rect">
             <a:avLst/>
@@ -13558,133 +14439,153 @@
           </a:bodyPr>
           <a:lstStyle/>
           <a:p>
-            <a:pPr algn="ctr">
-              <a:defRPr sz="1200" b="1">
-                <a:solidFill>
-                  <a:srgbClr val="FFFFFF"/>
+            <a:pPr>
+              <a:defRPr sz="1300" b="0" i="0">
+                <a:solidFill>
+                  <a:srgbClr val="595959"/>
                 </a:solidFill>
               </a:defRPr>
             </a:pPr>
             <a:r>
-              <a:rPr dirty="0"/>
-              <a:t>W₂×Hist</a:t>
-            </a:r>
-            <a:br>
-              <a:rPr dirty="0"/>
-            </a:br>
-            <a:r>
-              <a:rPr dirty="0"/>
-              <a:t>Historical</a:t>
-            </a:r>
-          </a:p>
-        </p:txBody>
-      </p:sp>
-      <p:sp>
-        <p:nvSpPr>
-          <p:cNvPr id="18" name="Right Arrow 8">
-            <a:extLst>
-              <a:ext uri="{FF2B5EF4-FFF2-40B4-BE49-F238E27FC236}">
-                <a16:creationId xmlns:a16="http://schemas.microsoft.com/office/drawing/2014/main" id="{6D4B51CE-53E4-09C3-024C-00FF38338571}"/>
-              </a:ext>
-            </a:extLst>
-          </p:cNvPr>
-          <p:cNvSpPr/>
-          <p:nvPr/>
-        </p:nvSpPr>
-        <p:spPr>
-          <a:xfrm>
-            <a:off x="3561116" y="2847885"/>
-            <a:ext cx="137160" cy="274320"/>
-          </a:xfrm>
-          <a:prstGeom prst="rightArrow">
-            <a:avLst/>
-          </a:prstGeom>
-          <a:solidFill>
-            <a:srgbClr val="7F8C8D"/>
-          </a:solidFill>
-          <a:ln>
-            <a:noFill/>
-          </a:ln>
-        </p:spPr>
-        <p:style>
-          <a:lnRef idx="1">
-            <a:schemeClr val="accent1"/>
-          </a:lnRef>
-          <a:fillRef idx="3">
-            <a:schemeClr val="accent1"/>
-          </a:fillRef>
-          <a:effectRef idx="2">
-            <a:schemeClr val="accent1"/>
-          </a:effectRef>
-          <a:fontRef idx="minor">
-            <a:schemeClr val="lt1"/>
-          </a:fontRef>
-        </p:style>
-        <p:txBody>
-          <a:bodyPr rtlCol="0" anchor="ctr"/>
-          <a:lstStyle/>
-          <a:p>
-            <a:pPr algn="ctr"/>
-            <a:endParaRPr/>
-          </a:p>
-        </p:txBody>
-      </p:sp>
-      <p:sp>
-        <p:nvSpPr>
-          <p:cNvPr id="19" name="Rounded Rectangle 9">
-            <a:extLst>
-              <a:ext uri="{FF2B5EF4-FFF2-40B4-BE49-F238E27FC236}">
-                <a16:creationId xmlns:a16="http://schemas.microsoft.com/office/drawing/2014/main" id="{BAF974BB-7BA6-DE4E-0B5C-9B381BDF46BB}"/>
-              </a:ext>
-            </a:extLst>
-          </p:cNvPr>
-          <p:cNvSpPr/>
-          <p:nvPr/>
-        </p:nvSpPr>
-        <p:spPr>
-          <a:xfrm>
-            <a:off x="3738548" y="2573565"/>
-            <a:ext cx="1487715" cy="822960"/>
-          </a:xfrm>
-          <a:prstGeom prst="roundRect">
-            <a:avLst/>
-          </a:prstGeom>
-          <a:solidFill>
-            <a:srgbClr val="008CBA"/>
-          </a:solidFill>
-          <a:ln>
-            <a:noFill/>
-          </a:ln>
-        </p:spPr>
-        <p:style>
-          <a:lnRef idx="1">
-            <a:schemeClr val="accent1"/>
-          </a:lnRef>
-          <a:fillRef idx="3">
-            <a:schemeClr val="accent1"/>
-          </a:fillRef>
-          <a:effectRef idx="2">
-            <a:schemeClr val="accent1"/>
-          </a:effectRef>
-          <a:fontRef idx="minor">
-            <a:schemeClr val="lt1"/>
-          </a:fontRef>
-        </p:style>
-        <p:txBody>
-          <a:bodyPr rtlCol="0" anchor="ctr"/>
-          <a:lstStyle/>
-          <a:p>
-            <a:pPr algn="ctr"/>
-            <a:endParaRPr/>
-          </a:p>
-        </p:txBody>
-      </p:sp>
-      <p:sp>
-        <p:nvSpPr>
-          <p:cNvPr id="21" name="TextBox 20">
-            <a:extLst>
-              <a:ext uri="{FF2B5EF4-FFF2-40B4-BE49-F238E27FC236}">
-                <a16:creationId xmlns:a16="http://schemas.microsoft.com/office/drawing/2014/main" id="{B601B279-CFA6-041C-2074-FE14A03D90E8}"/>
+              <a:rPr lang="vi-VN" dirty="0"/>
+              <a:t>  Bước 1: </a:t>
+            </a:r>
+            <a:r>
+              <a:rPr lang="en-US" sz="1300" dirty="0" err="1"/>
+              <a:t>Phá</a:t>
+            </a:r>
+            <a:r>
+              <a:rPr lang="en-US" sz="1300" dirty="0"/>
+              <a:t> </a:t>
+            </a:r>
+            <a:r>
+              <a:rPr lang="en-US" sz="1300" dirty="0" err="1"/>
+              <a:t>vỡ</a:t>
+            </a:r>
+            <a:r>
+              <a:rPr lang="en-US" sz="1300" dirty="0"/>
+              <a:t> </a:t>
+            </a:r>
+            <a:r>
+              <a:rPr lang="en-US" sz="1300" dirty="0" err="1"/>
+              <a:t>văn</a:t>
+            </a:r>
+            <a:r>
+              <a:rPr lang="en-US" sz="1300" dirty="0"/>
+              <a:t> </a:t>
+            </a:r>
+            <a:r>
+              <a:rPr lang="en-US" sz="1300" dirty="0" err="1"/>
+              <a:t>bản</a:t>
+            </a:r>
+            <a:r>
+              <a:rPr lang="en-US" sz="1300" dirty="0"/>
+              <a:t> (Tokenization)</a:t>
+            </a:r>
+            <a:endParaRPr lang="vi-VN" dirty="0"/>
+          </a:p>
+          <a:p>
+            <a:pPr>
+              <a:defRPr sz="1300" b="0" i="0">
+                <a:solidFill>
+                  <a:srgbClr val="595959"/>
+                </a:solidFill>
+              </a:defRPr>
+            </a:pPr>
+            <a:r>
+              <a:rPr lang="vi-VN" dirty="0"/>
+              <a:t>  Bước 2: </a:t>
+            </a:r>
+            <a:r>
+              <a:rPr lang="en-US" sz="1300" dirty="0" err="1"/>
+              <a:t>Nhúng</a:t>
+            </a:r>
+            <a:r>
+              <a:rPr lang="en-US" sz="1300" dirty="0"/>
+              <a:t> </a:t>
+            </a:r>
+            <a:r>
+              <a:rPr lang="en-US" sz="1300" dirty="0" err="1"/>
+              <a:t>vào</a:t>
+            </a:r>
+            <a:r>
+              <a:rPr lang="en-US" sz="1300" dirty="0"/>
+              <a:t> </a:t>
+            </a:r>
+            <a:r>
+              <a:rPr lang="en-US" sz="1300" dirty="0" err="1"/>
+              <a:t>không</a:t>
+            </a:r>
+            <a:r>
+              <a:rPr lang="en-US" sz="1300" dirty="0"/>
+              <a:t> </a:t>
+            </a:r>
+            <a:r>
+              <a:rPr lang="en-US" sz="1300" dirty="0" err="1"/>
+              <a:t>gian</a:t>
+            </a:r>
+            <a:r>
+              <a:rPr lang="en-US" sz="1300" dirty="0"/>
+              <a:t> Vector (Embedding)</a:t>
+            </a:r>
+            <a:endParaRPr lang="vi-VN" dirty="0"/>
+          </a:p>
+          <a:p>
+            <a:pPr>
+              <a:defRPr sz="1300" b="0" i="0">
+                <a:solidFill>
+                  <a:srgbClr val="595959"/>
+                </a:solidFill>
+              </a:defRPr>
+            </a:pPr>
+            <a:r>
+              <a:rPr lang="vi-VN" dirty="0"/>
+              <a:t> </a:t>
+            </a:r>
+            <a:r>
+              <a:rPr lang="en-US" dirty="0"/>
+              <a:t> </a:t>
+            </a:r>
+            <a:r>
+              <a:rPr lang="en-US" dirty="0" err="1"/>
+              <a:t>Bước</a:t>
+            </a:r>
+            <a:r>
+              <a:rPr lang="en-US" dirty="0"/>
+              <a:t> 3: </a:t>
+            </a:r>
+            <a:r>
+              <a:rPr lang="vi-VN" sz="1300" dirty="0"/>
+              <a:t>Cơ chế Chú ý (Attention Mechanism)</a:t>
+            </a:r>
+            <a:endParaRPr lang="vi-VN" dirty="0"/>
+          </a:p>
+          <a:p>
+            <a:pPr>
+              <a:defRPr sz="1300" b="0" i="0">
+                <a:solidFill>
+                  <a:srgbClr val="595959"/>
+                </a:solidFill>
+              </a:defRPr>
+            </a:pPr>
+            <a:r>
+              <a:rPr lang="vi-VN" dirty="0"/>
+              <a:t>  Bước 4: </a:t>
+            </a:r>
+            <a:r>
+              <a:rPr lang="vi-VN" sz="1300" dirty="0"/>
+              <a:t>Tính toán độ tương đồng (Similarity Calculation)</a:t>
+            </a:r>
+            <a:endParaRPr dirty="0"/>
+          </a:p>
+        </p:txBody>
+      </p:sp>
+      <p:sp>
+        <p:nvSpPr>
+          <p:cNvPr id="32" name="TextBox 31">
+            <a:extLst>
+              <a:ext uri="{FF2B5EF4-FFF2-40B4-BE49-F238E27FC236}">
+                <a16:creationId xmlns:a16="http://schemas.microsoft.com/office/drawing/2014/main" id="{73A7A0F9-53C6-FBB8-28BE-A3081CBCCA78}"/>
               </a:ext>
             </a:extLst>
           </p:cNvPr>
@@ -13693,8 +14594,8 @@
         </p:nvSpPr>
         <p:spPr>
           <a:xfrm>
-            <a:off x="3397464" y="2710725"/>
-            <a:ext cx="1828800" cy="822960"/>
+            <a:off x="1921822" y="4876801"/>
+            <a:ext cx="6651477" cy="1092607"/>
           </a:xfrm>
           <a:prstGeom prst="rect">
             <a:avLst/>
@@ -13707,364 +14608,258 @@
           </a:bodyPr>
           <a:lstStyle/>
           <a:p>
-            <a:pPr algn="ctr">
-              <a:defRPr sz="1200" b="1">
-                <a:solidFill>
-                  <a:srgbClr val="FFFFFF"/>
+            <a:pPr>
+              <a:defRPr sz="1300" b="0" i="0">
+                <a:solidFill>
+                  <a:srgbClr val="595959"/>
                 </a:solidFill>
               </a:defRPr>
             </a:pPr>
             <a:r>
-              <a:t>W₃×Price</a:t>
-            </a:r>
-            <a:br/>
-            <a:r>
-              <a:t>Price</a:t>
-            </a:r>
-          </a:p>
-        </p:txBody>
-      </p:sp>
-      <p:sp>
-        <p:nvSpPr>
-          <p:cNvPr id="22" name="Right Arrow 11">
-            <a:extLst>
-              <a:ext uri="{FF2B5EF4-FFF2-40B4-BE49-F238E27FC236}">
-                <a16:creationId xmlns:a16="http://schemas.microsoft.com/office/drawing/2014/main" id="{49A03528-C4D0-F3C4-DFE7-A3378DC6BC21}"/>
-              </a:ext>
-            </a:extLst>
-          </p:cNvPr>
-          <p:cNvSpPr/>
-          <p:nvPr/>
-        </p:nvSpPr>
-        <p:spPr>
-          <a:xfrm>
-            <a:off x="5244552" y="2847885"/>
-            <a:ext cx="137160" cy="274320"/>
-          </a:xfrm>
-          <a:prstGeom prst="rightArrow">
-            <a:avLst/>
-          </a:prstGeom>
-          <a:solidFill>
-            <a:srgbClr val="7F8C8D"/>
-          </a:solidFill>
-          <a:ln>
-            <a:noFill/>
-          </a:ln>
-        </p:spPr>
-        <p:style>
-          <a:lnRef idx="1">
-            <a:schemeClr val="accent1"/>
-          </a:lnRef>
-          <a:fillRef idx="3">
-            <a:schemeClr val="accent1"/>
-          </a:fillRef>
-          <a:effectRef idx="2">
-            <a:schemeClr val="accent1"/>
-          </a:effectRef>
-          <a:fontRef idx="minor">
-            <a:schemeClr val="lt1"/>
-          </a:fontRef>
-        </p:style>
-        <p:txBody>
-          <a:bodyPr rtlCol="0" anchor="ctr"/>
-          <a:lstStyle/>
-          <a:p>
-            <a:pPr algn="ctr"/>
-            <a:endParaRPr/>
-          </a:p>
-        </p:txBody>
-      </p:sp>
-      <p:sp>
-        <p:nvSpPr>
-          <p:cNvPr id="23" name="Rounded Rectangle 12">
-            <a:extLst>
-              <a:ext uri="{FF2B5EF4-FFF2-40B4-BE49-F238E27FC236}">
-                <a16:creationId xmlns:a16="http://schemas.microsoft.com/office/drawing/2014/main" id="{0456A7F6-8900-F67D-7782-C10C228CBF23}"/>
-              </a:ext>
-            </a:extLst>
-          </p:cNvPr>
-          <p:cNvSpPr/>
-          <p:nvPr/>
-        </p:nvSpPr>
-        <p:spPr>
-          <a:xfrm>
-            <a:off x="5376172" y="2573565"/>
-            <a:ext cx="1487718" cy="822960"/>
-          </a:xfrm>
-          <a:prstGeom prst="roundRect">
-            <a:avLst/>
-          </a:prstGeom>
-          <a:solidFill>
-            <a:srgbClr val="008CBA"/>
-          </a:solidFill>
-          <a:ln>
-            <a:noFill/>
-          </a:ln>
-        </p:spPr>
-        <p:style>
-          <a:lnRef idx="1">
-            <a:schemeClr val="accent1"/>
-          </a:lnRef>
-          <a:fillRef idx="3">
-            <a:schemeClr val="accent1"/>
-          </a:fillRef>
-          <a:effectRef idx="2">
-            <a:schemeClr val="accent1"/>
-          </a:effectRef>
-          <a:fontRef idx="minor">
-            <a:schemeClr val="lt1"/>
-          </a:fontRef>
-        </p:style>
-        <p:txBody>
-          <a:bodyPr rtlCol="0" anchor="ctr"/>
-          <a:lstStyle/>
-          <a:p>
-            <a:pPr algn="ctr"/>
-            <a:endParaRPr/>
-          </a:p>
-        </p:txBody>
-      </p:sp>
-      <p:sp>
-        <p:nvSpPr>
-          <p:cNvPr id="24" name="TextBox 23">
-            <a:extLst>
-              <a:ext uri="{FF2B5EF4-FFF2-40B4-BE49-F238E27FC236}">
-                <a16:creationId xmlns:a16="http://schemas.microsoft.com/office/drawing/2014/main" id="{27384991-6CE3-61D1-2606-D9E84C298EF2}"/>
-              </a:ext>
-            </a:extLst>
-          </p:cNvPr>
-          <p:cNvSpPr txBox="1"/>
-          <p:nvPr/>
-        </p:nvSpPr>
-        <p:spPr>
-          <a:xfrm>
-            <a:off x="5244551" y="2705746"/>
-            <a:ext cx="1643165" cy="461665"/>
-          </a:xfrm>
-          <a:prstGeom prst="rect">
-            <a:avLst/>
-          </a:prstGeom>
-          <a:noFill/>
-        </p:spPr>
-        <p:txBody>
-          <a:bodyPr wrap="square">
-            <a:spAutoFit/>
-          </a:bodyPr>
-          <a:lstStyle/>
-          <a:p>
-            <a:pPr algn="ctr">
-              <a:defRPr sz="1200" b="1">
-                <a:solidFill>
-                  <a:srgbClr val="FFFFFF"/>
+              <a:rPr lang="en-US" sz="1300" dirty="0" err="1"/>
+              <a:t>Giả</a:t>
+            </a:r>
+            <a:r>
+              <a:rPr lang="en-US" sz="1300" dirty="0"/>
+              <a:t> </a:t>
+            </a:r>
+            <a:r>
+              <a:rPr lang="en-US" sz="1300" dirty="0" err="1"/>
+              <a:t>sử</a:t>
+            </a:r>
+            <a:r>
+              <a:rPr lang="en-US" sz="1300" dirty="0"/>
+              <a:t> Database </a:t>
+            </a:r>
+            <a:r>
+              <a:rPr lang="en-US" sz="1300" dirty="0" err="1"/>
+              <a:t>có</a:t>
+            </a:r>
+            <a:r>
+              <a:rPr lang="en-US" sz="1300" dirty="0"/>
+              <a:t> </a:t>
+            </a:r>
+            <a:r>
+              <a:rPr lang="en-US" sz="1300" dirty="0" err="1"/>
+              <a:t>gói</a:t>
+            </a:r>
+            <a:r>
+              <a:rPr lang="en-US" sz="1300" dirty="0"/>
+              <a:t> </a:t>
+            </a:r>
+            <a:r>
+              <a:rPr lang="en-US" sz="1300" dirty="0" err="1"/>
+              <a:t>thầu</a:t>
+            </a:r>
+            <a:r>
+              <a:rPr lang="en-US" sz="1300" dirty="0"/>
+              <a:t>: </a:t>
+            </a:r>
+            <a:r>
+              <a:rPr lang="en-US" sz="1300" i="1" dirty="0"/>
+              <a:t>"</a:t>
+            </a:r>
+            <a:r>
+              <a:rPr lang="en-US" sz="1300" i="1" dirty="0" err="1"/>
+              <a:t>Xây</a:t>
+            </a:r>
+            <a:r>
+              <a:rPr lang="en-US" sz="1300" i="1" dirty="0"/>
+              <a:t> </a:t>
+            </a:r>
+            <a:r>
+              <a:rPr lang="en-US" sz="1300" i="1" dirty="0" err="1"/>
+              <a:t>dựng</a:t>
+            </a:r>
+            <a:r>
+              <a:rPr lang="en-US" sz="1300" i="1" dirty="0"/>
+              <a:t> </a:t>
+            </a:r>
+            <a:r>
+              <a:rPr lang="en-US" sz="1300" i="1" dirty="0" err="1"/>
+              <a:t>hạ</a:t>
+            </a:r>
+            <a:r>
+              <a:rPr lang="en-US" sz="1300" i="1" dirty="0"/>
+              <a:t> </a:t>
+            </a:r>
+            <a:r>
+              <a:rPr lang="en-US" sz="1300" i="1" dirty="0" err="1"/>
+              <a:t>tầng</a:t>
+            </a:r>
+            <a:r>
+              <a:rPr lang="en-US" sz="1300" i="1" dirty="0"/>
+              <a:t> </a:t>
+            </a:r>
+            <a:r>
+              <a:rPr lang="en-US" sz="1300" i="1" dirty="0" err="1"/>
+              <a:t>giao</a:t>
+            </a:r>
+            <a:r>
+              <a:rPr lang="en-US" sz="1300" i="1" dirty="0"/>
+              <a:t> </a:t>
+            </a:r>
+            <a:r>
+              <a:rPr lang="en-US" sz="1300" i="1" dirty="0" err="1"/>
+              <a:t>thông</a:t>
+            </a:r>
+            <a:r>
+              <a:rPr lang="en-US" sz="1300" i="1" dirty="0"/>
+              <a:t> </a:t>
+            </a:r>
+            <a:r>
+              <a:rPr lang="en-US" sz="1300" i="1" dirty="0" err="1"/>
+              <a:t>đô</a:t>
+            </a:r>
+            <a:r>
+              <a:rPr lang="en-US" sz="1300" i="1" dirty="0"/>
+              <a:t> </a:t>
+            </a:r>
+            <a:r>
+              <a:rPr lang="en-US" sz="1300" i="1" dirty="0" err="1"/>
+              <a:t>thị</a:t>
+            </a:r>
+            <a:r>
+              <a:rPr lang="en-US" sz="1300" i="1" dirty="0"/>
+              <a:t>"</a:t>
+            </a:r>
+            <a:r>
+              <a:rPr lang="en-US" sz="1300" dirty="0"/>
+              <a:t>.</a:t>
+            </a:r>
+            <a:endParaRPr lang="vi-VN" sz="1300" dirty="0"/>
+          </a:p>
+          <a:p>
+            <a:pPr>
+              <a:defRPr sz="1300" b="0" i="0">
+                <a:solidFill>
+                  <a:srgbClr val="595959"/>
                 </a:solidFill>
               </a:defRPr>
             </a:pPr>
             <a:r>
-              <a:rPr dirty="0"/>
-              <a:t>W₄×Rec</a:t>
-            </a:r>
-            <a:br>
-              <a:rPr dirty="0"/>
-            </a:br>
-            <a:r>
-              <a:rPr dirty="0"/>
-              <a:t>Recency</a:t>
-            </a:r>
-          </a:p>
-        </p:txBody>
-      </p:sp>
-      <p:sp>
-        <p:nvSpPr>
-          <p:cNvPr id="25" name="Right Arrow 14">
-            <a:extLst>
-              <a:ext uri="{FF2B5EF4-FFF2-40B4-BE49-F238E27FC236}">
-                <a16:creationId xmlns:a16="http://schemas.microsoft.com/office/drawing/2014/main" id="{6FE5F59A-C69C-B700-9E0A-7C45FBE714DB}"/>
-              </a:ext>
-            </a:extLst>
-          </p:cNvPr>
-          <p:cNvSpPr/>
-          <p:nvPr/>
-        </p:nvSpPr>
-        <p:spPr>
-          <a:xfrm>
-            <a:off x="6882178" y="2847885"/>
-            <a:ext cx="137160" cy="274320"/>
-          </a:xfrm>
-          <a:prstGeom prst="rightArrow">
-            <a:avLst/>
-          </a:prstGeom>
-          <a:solidFill>
-            <a:srgbClr val="7F8C8D"/>
-          </a:solidFill>
-          <a:ln>
-            <a:noFill/>
-          </a:ln>
-        </p:spPr>
-        <p:style>
-          <a:lnRef idx="1">
-            <a:schemeClr val="accent1"/>
-          </a:lnRef>
-          <a:fillRef idx="3">
-            <a:schemeClr val="accent1"/>
-          </a:fillRef>
-          <a:effectRef idx="2">
-            <a:schemeClr val="accent1"/>
-          </a:effectRef>
-          <a:fontRef idx="minor">
-            <a:schemeClr val="lt1"/>
-          </a:fontRef>
-        </p:style>
-        <p:txBody>
-          <a:bodyPr rtlCol="0" anchor="ctr"/>
-          <a:lstStyle/>
-          <a:p>
-            <a:pPr algn="ctr"/>
-            <a:endParaRPr/>
-          </a:p>
-        </p:txBody>
-      </p:sp>
-      <p:sp>
-        <p:nvSpPr>
-          <p:cNvPr id="26" name="Rounded Rectangle 15">
-            <a:extLst>
-              <a:ext uri="{FF2B5EF4-FFF2-40B4-BE49-F238E27FC236}">
-                <a16:creationId xmlns:a16="http://schemas.microsoft.com/office/drawing/2014/main" id="{A999DC81-0A6D-A583-9E2B-08AFB951D066}"/>
-              </a:ext>
-            </a:extLst>
-          </p:cNvPr>
-          <p:cNvSpPr/>
-          <p:nvPr/>
-        </p:nvSpPr>
-        <p:spPr>
-          <a:xfrm>
-            <a:off x="7001050" y="2573565"/>
-            <a:ext cx="1487718" cy="822960"/>
-          </a:xfrm>
-          <a:prstGeom prst="roundRect">
-            <a:avLst/>
-          </a:prstGeom>
-          <a:solidFill>
-            <a:srgbClr val="008000"/>
-          </a:solidFill>
-          <a:ln>
-            <a:noFill/>
-          </a:ln>
-        </p:spPr>
-        <p:style>
-          <a:lnRef idx="1">
-            <a:schemeClr val="accent1"/>
-          </a:lnRef>
-          <a:fillRef idx="3">
-            <a:schemeClr val="accent1"/>
-          </a:fillRef>
-          <a:effectRef idx="2">
-            <a:schemeClr val="accent1"/>
-          </a:effectRef>
-          <a:fontRef idx="minor">
-            <a:schemeClr val="lt1"/>
-          </a:fontRef>
-        </p:style>
-        <p:txBody>
-          <a:bodyPr rtlCol="0" anchor="ctr"/>
-          <a:lstStyle/>
-          <a:p>
-            <a:pPr algn="ctr"/>
-            <a:endParaRPr/>
-          </a:p>
-        </p:txBody>
-      </p:sp>
-      <p:sp>
-        <p:nvSpPr>
-          <p:cNvPr id="27" name="TextBox 26">
-            <a:extLst>
-              <a:ext uri="{FF2B5EF4-FFF2-40B4-BE49-F238E27FC236}">
-                <a16:creationId xmlns:a16="http://schemas.microsoft.com/office/drawing/2014/main" id="{A0BD6590-D3DF-9457-51AA-968B2D5C1ABC}"/>
-              </a:ext>
-            </a:extLst>
-          </p:cNvPr>
-          <p:cNvSpPr txBox="1"/>
-          <p:nvPr/>
-        </p:nvSpPr>
-        <p:spPr>
-          <a:xfrm>
-            <a:off x="6714405" y="2821264"/>
-            <a:ext cx="1828800" cy="276999"/>
-          </a:xfrm>
-          <a:prstGeom prst="rect">
-            <a:avLst/>
-          </a:prstGeom>
-          <a:noFill/>
-        </p:spPr>
-        <p:txBody>
-          <a:bodyPr wrap="square">
-            <a:spAutoFit/>
-          </a:bodyPr>
-          <a:lstStyle/>
-          <a:p>
-            <a:pPr algn="ctr">
-              <a:defRPr sz="1200" b="1">
-                <a:solidFill>
-                  <a:srgbClr val="FFFFFF"/>
+              <a:rPr lang="vi-VN" sz="1300" dirty="0"/>
+              <a:t>Người dùng tìm “Làm đường xá”</a:t>
+            </a:r>
+          </a:p>
+          <a:p>
+            <a:pPr>
+              <a:defRPr sz="1300" b="0" i="0">
+                <a:solidFill>
+                  <a:srgbClr val="595959"/>
                 </a:solidFill>
               </a:defRPr>
             </a:pPr>
             <a:r>
-              <a:rPr dirty="0"/>
-              <a:t>= </a:t>
-            </a:r>
-            <a:r>
-              <a:rPr dirty="0" err="1"/>
-              <a:t>Tổng</a:t>
-            </a:r>
-            <a:r>
-              <a:rPr lang="vi-VN" dirty="0"/>
-              <a:t> </a:t>
-            </a:r>
-            <a:r>
-              <a:rPr dirty="0" err="1"/>
-              <a:t>Điểm</a:t>
-            </a:r>
-            <a:endParaRPr dirty="0"/>
-          </a:p>
-        </p:txBody>
-      </p:sp>
-      <p:sp>
-        <p:nvSpPr>
-          <p:cNvPr id="28" name="TextBox 27">
-            <a:extLst>
-              <a:ext uri="{FF2B5EF4-FFF2-40B4-BE49-F238E27FC236}">
-                <a16:creationId xmlns:a16="http://schemas.microsoft.com/office/drawing/2014/main" id="{87034F69-CB4F-6645-4D4F-385CFF849D44}"/>
-              </a:ext>
-            </a:extLst>
-          </p:cNvPr>
-          <p:cNvSpPr txBox="1"/>
-          <p:nvPr/>
-        </p:nvSpPr>
-        <p:spPr>
-          <a:xfrm>
-            <a:off x="318586" y="3856265"/>
-            <a:ext cx="8229600" cy="365760"/>
-          </a:xfrm>
-          <a:prstGeom prst="rect">
-            <a:avLst/>
-          </a:prstGeom>
-          <a:noFill/>
-        </p:spPr>
-        <p:txBody>
-          <a:bodyPr wrap="none">
-            <a:spAutoFit/>
-          </a:bodyPr>
-          <a:lstStyle/>
-          <a:p>
-            <a:pPr algn="ctr">
-              <a:defRPr sz="1300" i="1">
-                <a:solidFill>
-                  <a:srgbClr val="7F8C8D"/>
+              <a:rPr lang="en-US" sz="1300" b="1" dirty="0"/>
+              <a:t>Lexical Search (</a:t>
+            </a:r>
+            <a:r>
+              <a:rPr lang="en-US" sz="1300" b="1" dirty="0" err="1"/>
+              <a:t>Từ</a:t>
+            </a:r>
+            <a:r>
+              <a:rPr lang="en-US" sz="1300" b="1" dirty="0"/>
+              <a:t> </a:t>
+            </a:r>
+            <a:r>
+              <a:rPr lang="en-US" sz="1300" b="1" dirty="0" err="1"/>
+              <a:t>khóa</a:t>
+            </a:r>
+            <a:r>
+              <a:rPr lang="en-US" sz="1300" b="1" dirty="0"/>
+              <a:t>):</a:t>
+            </a:r>
+            <a:r>
+              <a:rPr lang="en-US" sz="1300" dirty="0"/>
+              <a:t> Thất </a:t>
+            </a:r>
+            <a:r>
+              <a:rPr lang="en-US" sz="1300" dirty="0" err="1"/>
+              <a:t>bại</a:t>
+            </a:r>
+            <a:r>
+              <a:rPr lang="en-US" sz="1300" dirty="0"/>
+              <a:t> (</a:t>
+            </a:r>
+            <a:r>
+              <a:rPr lang="en-US" sz="1300" dirty="0" err="1"/>
+              <a:t>điểm</a:t>
+            </a:r>
+            <a:r>
+              <a:rPr lang="en-US" sz="1300" dirty="0"/>
+              <a:t> </a:t>
+            </a:r>
+            <a:r>
+              <a:rPr lang="en-US" sz="1300" dirty="0" err="1"/>
+              <a:t>thấp</a:t>
+            </a:r>
+            <a:r>
+              <a:rPr lang="en-US" sz="1300" dirty="0"/>
+              <a:t>) </a:t>
+            </a:r>
+            <a:r>
+              <a:rPr lang="en-US" sz="1300" dirty="0" err="1"/>
+              <a:t>vì</a:t>
+            </a:r>
+            <a:r>
+              <a:rPr lang="en-US" sz="1300" dirty="0"/>
+              <a:t> </a:t>
+            </a:r>
+            <a:r>
+              <a:rPr lang="en-US" sz="1300" dirty="0" err="1"/>
+              <a:t>không</a:t>
+            </a:r>
+            <a:r>
+              <a:rPr lang="en-US" sz="1300" dirty="0"/>
+              <a:t> </a:t>
+            </a:r>
+            <a:r>
+              <a:rPr lang="en-US" sz="1300" dirty="0" err="1"/>
+              <a:t>chung</a:t>
+            </a:r>
+            <a:r>
+              <a:rPr lang="en-US" sz="1300" dirty="0"/>
+              <a:t> </a:t>
+            </a:r>
+            <a:r>
+              <a:rPr lang="en-US" sz="1300" dirty="0" err="1"/>
+              <a:t>chữ</a:t>
+            </a:r>
+            <a:r>
+              <a:rPr lang="en-US" sz="1300" dirty="0"/>
+              <a:t> </a:t>
+            </a:r>
+            <a:r>
+              <a:rPr lang="en-US" sz="1300" dirty="0" err="1"/>
+              <a:t>nào</a:t>
+            </a:r>
+            <a:endParaRPr lang="vi-VN" sz="1300" dirty="0"/>
+          </a:p>
+          <a:p>
+            <a:pPr>
+              <a:defRPr sz="1300" b="0" i="0">
+                <a:solidFill>
+                  <a:srgbClr val="595959"/>
                 </a:solidFill>
               </a:defRPr>
             </a:pPr>
             <a:r>
-              <a:t>W₁=0.54 | W₂=0.23 | W₃=0.15 | W₄=0.08</a:t>
+              <a:rPr lang="vi-VN" sz="1300" dirty="0"/>
+              <a:t>Semantic Search: AI biết “Làm” = “Xây dựng”</a:t>
+            </a:r>
+          </a:p>
+          <a:p>
+            <a:pPr>
+              <a:defRPr sz="1300" b="0" i="0">
+                <a:solidFill>
+                  <a:srgbClr val="595959"/>
+                </a:solidFill>
+              </a:defRPr>
+            </a:pPr>
+            <a:r>
+              <a:rPr lang="vi-VN" sz="1300" dirty="0"/>
+              <a:t>                             AI biết “Đường xá” = “Hạ tầng giao thông”</a:t>
             </a:r>
           </a:p>
         </p:txBody>
@@ -14072,7 +14867,7 @@
     </p:spTree>
     <p:extLst>
       <p:ext uri="{BB962C8B-B14F-4D97-AF65-F5344CB8AC3E}">
-        <p14:creationId xmlns:p14="http://schemas.microsoft.com/office/powerpoint/2010/main" val="331685062"/>
+        <p14:creationId xmlns:p14="http://schemas.microsoft.com/office/powerpoint/2010/main" val="1973997828"/>
       </p:ext>
     </p:extLst>
   </p:cSld>
@@ -15252,6 +16047,960 @@
   <p:cSld>
     <p:spTree>
       <p:nvGrpSpPr>
+        <p:cNvPr id="1" name="">
+          <a:extLst>
+            <a:ext uri="{FF2B5EF4-FFF2-40B4-BE49-F238E27FC236}">
+              <a16:creationId xmlns:a16="http://schemas.microsoft.com/office/drawing/2014/main" id="{5EAEC9C1-5393-617A-43AE-E94847B48AE5}"/>
+            </a:ext>
+          </a:extLst>
+        </p:cNvPr>
+        <p:cNvGrpSpPr/>
+        <p:nvPr/>
+      </p:nvGrpSpPr>
+      <p:grpSpPr>
+        <a:xfrm>
+          <a:off x="0" y="0"/>
+          <a:ext cx="0" cy="0"/>
+          <a:chOff x="0" y="0"/>
+          <a:chExt cx="0" cy="0"/>
+        </a:xfrm>
+      </p:grpSpPr>
+      <p:sp>
+        <p:nvSpPr>
+          <p:cNvPr id="2" name="Title 1">
+            <a:extLst>
+              <a:ext uri="{FF2B5EF4-FFF2-40B4-BE49-F238E27FC236}">
+                <a16:creationId xmlns:a16="http://schemas.microsoft.com/office/drawing/2014/main" id="{4BD28313-39B4-7B64-FC42-750164868A1C}"/>
+              </a:ext>
+            </a:extLst>
+          </p:cNvPr>
+          <p:cNvSpPr>
+            <a:spLocks noGrp="1"/>
+          </p:cNvSpPr>
+          <p:nvPr>
+            <p:ph type="title"/>
+          </p:nvPr>
+        </p:nvSpPr>
+        <p:spPr/>
+        <p:txBody>
+          <a:bodyPr/>
+          <a:lstStyle/>
+          <a:p>
+            <a:r>
+              <a:rPr lang="vi-VN" dirty="0"/>
+              <a:t>Cách hệ thống chấm điểm</a:t>
+            </a:r>
+            <a:endParaRPr lang="en-US" dirty="0"/>
+          </a:p>
+        </p:txBody>
+      </p:sp>
+      <p:sp>
+        <p:nvSpPr>
+          <p:cNvPr id="12" name="TextBox 11">
+            <a:extLst>
+              <a:ext uri="{FF2B5EF4-FFF2-40B4-BE49-F238E27FC236}">
+                <a16:creationId xmlns:a16="http://schemas.microsoft.com/office/drawing/2014/main" id="{04CC88E2-C4AA-835A-D533-C3672DF63BE7}"/>
+              </a:ext>
+            </a:extLst>
+          </p:cNvPr>
+          <p:cNvSpPr txBox="1"/>
+          <p:nvPr/>
+        </p:nvSpPr>
+        <p:spPr>
+          <a:xfrm>
+            <a:off x="731520" y="1304835"/>
+            <a:ext cx="3446777" cy="400110"/>
+          </a:xfrm>
+          <a:prstGeom prst="rect">
+            <a:avLst/>
+          </a:prstGeom>
+          <a:noFill/>
+        </p:spPr>
+        <p:txBody>
+          <a:bodyPr wrap="none">
+            <a:spAutoFit/>
+          </a:bodyPr>
+          <a:lstStyle/>
+          <a:p>
+            <a:pPr>
+              <a:defRPr sz="2800" b="1">
+                <a:solidFill>
+                  <a:srgbClr val="FFFFFF"/>
+                </a:solidFill>
+              </a:defRPr>
+            </a:pPr>
+            <a:r>
+              <a:rPr sz="2000" dirty="0">
+                <a:solidFill>
+                  <a:schemeClr val="bg2">
+                    <a:lumMod val="50000"/>
+                  </a:schemeClr>
+                </a:solidFill>
+              </a:rPr>
+              <a:t>Công </a:t>
+            </a:r>
+            <a:r>
+              <a:rPr sz="2000" dirty="0" err="1">
+                <a:solidFill>
+                  <a:schemeClr val="bg2">
+                    <a:lumMod val="50000"/>
+                  </a:schemeClr>
+                </a:solidFill>
+              </a:rPr>
+              <a:t>thức</a:t>
+            </a:r>
+            <a:r>
+              <a:rPr sz="2000" dirty="0">
+                <a:solidFill>
+                  <a:schemeClr val="bg2">
+                    <a:lumMod val="50000"/>
+                  </a:schemeClr>
+                </a:solidFill>
+              </a:rPr>
+              <a:t> </a:t>
+            </a:r>
+            <a:r>
+              <a:rPr sz="2000" dirty="0" err="1">
+                <a:solidFill>
+                  <a:schemeClr val="bg2">
+                    <a:lumMod val="50000"/>
+                  </a:schemeClr>
+                </a:solidFill>
+              </a:rPr>
+              <a:t>Tổng</a:t>
+            </a:r>
+            <a:r>
+              <a:rPr sz="2000" dirty="0">
+                <a:solidFill>
+                  <a:schemeClr val="bg2">
+                    <a:lumMod val="50000"/>
+                  </a:schemeClr>
+                </a:solidFill>
+              </a:rPr>
+              <a:t> </a:t>
+            </a:r>
+            <a:r>
+              <a:rPr sz="2000" dirty="0" err="1">
+                <a:solidFill>
+                  <a:schemeClr val="bg2">
+                    <a:lumMod val="50000"/>
+                  </a:schemeClr>
+                </a:solidFill>
+              </a:rPr>
+              <a:t>hợp</a:t>
+            </a:r>
+            <a:r>
+              <a:rPr sz="2000" dirty="0">
+                <a:solidFill>
+                  <a:schemeClr val="bg2">
+                    <a:lumMod val="50000"/>
+                  </a:schemeClr>
+                </a:solidFill>
+              </a:rPr>
+              <a:t> </a:t>
+            </a:r>
+            <a:r>
+              <a:rPr sz="2000" dirty="0" err="1">
+                <a:solidFill>
+                  <a:schemeClr val="bg2">
+                    <a:lumMod val="50000"/>
+                  </a:schemeClr>
+                </a:solidFill>
+              </a:rPr>
+              <a:t>Điểm</a:t>
+            </a:r>
+            <a:endParaRPr sz="2000" dirty="0">
+              <a:solidFill>
+                <a:schemeClr val="bg2">
+                  <a:lumMod val="50000"/>
+                </a:schemeClr>
+              </a:solidFill>
+            </a:endParaRPr>
+          </a:p>
+        </p:txBody>
+      </p:sp>
+      <p:sp>
+        <p:nvSpPr>
+          <p:cNvPr id="13" name="Rounded Rectangle 3">
+            <a:extLst>
+              <a:ext uri="{FF2B5EF4-FFF2-40B4-BE49-F238E27FC236}">
+                <a16:creationId xmlns:a16="http://schemas.microsoft.com/office/drawing/2014/main" id="{5788F7FE-A235-2BC5-D476-AE2D376E82DE}"/>
+              </a:ext>
+            </a:extLst>
+          </p:cNvPr>
+          <p:cNvSpPr/>
+          <p:nvPr/>
+        </p:nvSpPr>
+        <p:spPr>
+          <a:xfrm>
+            <a:off x="398236" y="2573565"/>
+            <a:ext cx="1487714" cy="822960"/>
+          </a:xfrm>
+          <a:prstGeom prst="roundRect">
+            <a:avLst/>
+          </a:prstGeom>
+          <a:solidFill>
+            <a:srgbClr val="005293"/>
+          </a:solidFill>
+          <a:ln>
+            <a:noFill/>
+          </a:ln>
+        </p:spPr>
+        <p:style>
+          <a:lnRef idx="1">
+            <a:schemeClr val="accent1"/>
+          </a:lnRef>
+          <a:fillRef idx="3">
+            <a:schemeClr val="accent1"/>
+          </a:fillRef>
+          <a:effectRef idx="2">
+            <a:schemeClr val="accent1"/>
+          </a:effectRef>
+          <a:fontRef idx="minor">
+            <a:schemeClr val="lt1"/>
+          </a:fontRef>
+        </p:style>
+        <p:txBody>
+          <a:bodyPr rtlCol="0" anchor="ctr"/>
+          <a:lstStyle/>
+          <a:p>
+            <a:pPr algn="ctr"/>
+            <a:endParaRPr/>
+          </a:p>
+        </p:txBody>
+      </p:sp>
+      <p:sp>
+        <p:nvSpPr>
+          <p:cNvPr id="14" name="TextBox 13">
+            <a:extLst>
+              <a:ext uri="{FF2B5EF4-FFF2-40B4-BE49-F238E27FC236}">
+                <a16:creationId xmlns:a16="http://schemas.microsoft.com/office/drawing/2014/main" id="{886871AF-BE16-238C-5FC4-924ABEDF7D88}"/>
+              </a:ext>
+            </a:extLst>
+          </p:cNvPr>
+          <p:cNvSpPr txBox="1"/>
+          <p:nvPr/>
+        </p:nvSpPr>
+        <p:spPr>
+          <a:xfrm>
+            <a:off x="296636" y="2710725"/>
+            <a:ext cx="1589314" cy="461665"/>
+          </a:xfrm>
+          <a:prstGeom prst="rect">
+            <a:avLst/>
+          </a:prstGeom>
+          <a:noFill/>
+        </p:spPr>
+        <p:txBody>
+          <a:bodyPr wrap="square">
+            <a:spAutoFit/>
+          </a:bodyPr>
+          <a:lstStyle/>
+          <a:p>
+            <a:pPr algn="ctr">
+              <a:defRPr sz="1200" b="1">
+                <a:solidFill>
+                  <a:srgbClr val="FFFFFF"/>
+                </a:solidFill>
+              </a:defRPr>
+            </a:pPr>
+            <a:r>
+              <a:t>W₁×Lex</a:t>
+            </a:r>
+            <a:br/>
+            <a:r>
+              <a:t>Lexical</a:t>
+            </a:r>
+          </a:p>
+        </p:txBody>
+      </p:sp>
+      <p:sp>
+        <p:nvSpPr>
+          <p:cNvPr id="15" name="Right Arrow 5">
+            <a:extLst>
+              <a:ext uri="{FF2B5EF4-FFF2-40B4-BE49-F238E27FC236}">
+                <a16:creationId xmlns:a16="http://schemas.microsoft.com/office/drawing/2014/main" id="{EEC667EF-E440-C008-50B6-A2EBAE7183F8}"/>
+              </a:ext>
+            </a:extLst>
+          </p:cNvPr>
+          <p:cNvSpPr/>
+          <p:nvPr/>
+        </p:nvSpPr>
+        <p:spPr>
+          <a:xfrm>
+            <a:off x="1904238" y="2847885"/>
+            <a:ext cx="137160" cy="274320"/>
+          </a:xfrm>
+          <a:prstGeom prst="rightArrow">
+            <a:avLst/>
+          </a:prstGeom>
+          <a:solidFill>
+            <a:srgbClr val="7F8C8D"/>
+          </a:solidFill>
+          <a:ln>
+            <a:noFill/>
+          </a:ln>
+        </p:spPr>
+        <p:style>
+          <a:lnRef idx="1">
+            <a:schemeClr val="accent1"/>
+          </a:lnRef>
+          <a:fillRef idx="3">
+            <a:schemeClr val="accent1"/>
+          </a:fillRef>
+          <a:effectRef idx="2">
+            <a:schemeClr val="accent1"/>
+          </a:effectRef>
+          <a:fontRef idx="minor">
+            <a:schemeClr val="lt1"/>
+          </a:fontRef>
+        </p:style>
+        <p:txBody>
+          <a:bodyPr rtlCol="0" anchor="ctr"/>
+          <a:lstStyle/>
+          <a:p>
+            <a:pPr algn="ctr"/>
+            <a:endParaRPr/>
+          </a:p>
+        </p:txBody>
+      </p:sp>
+      <p:sp>
+        <p:nvSpPr>
+          <p:cNvPr id="16" name="Rounded Rectangle 6">
+            <a:extLst>
+              <a:ext uri="{FF2B5EF4-FFF2-40B4-BE49-F238E27FC236}">
+                <a16:creationId xmlns:a16="http://schemas.microsoft.com/office/drawing/2014/main" id="{36BA45FF-9C2D-9BDE-0C83-272124F34DF4}"/>
+              </a:ext>
+            </a:extLst>
+          </p:cNvPr>
+          <p:cNvSpPr/>
+          <p:nvPr/>
+        </p:nvSpPr>
+        <p:spPr>
+          <a:xfrm>
+            <a:off x="2023110" y="2573565"/>
+            <a:ext cx="1487714" cy="822960"/>
+          </a:xfrm>
+          <a:prstGeom prst="roundRect">
+            <a:avLst/>
+          </a:prstGeom>
+          <a:solidFill>
+            <a:srgbClr val="008CBA"/>
+          </a:solidFill>
+          <a:ln>
+            <a:noFill/>
+          </a:ln>
+        </p:spPr>
+        <p:style>
+          <a:lnRef idx="1">
+            <a:schemeClr val="accent1"/>
+          </a:lnRef>
+          <a:fillRef idx="3">
+            <a:schemeClr val="accent1"/>
+          </a:fillRef>
+          <a:effectRef idx="2">
+            <a:schemeClr val="accent1"/>
+          </a:effectRef>
+          <a:fontRef idx="minor">
+            <a:schemeClr val="lt1"/>
+          </a:fontRef>
+        </p:style>
+        <p:txBody>
+          <a:bodyPr rtlCol="0" anchor="ctr"/>
+          <a:lstStyle/>
+          <a:p>
+            <a:pPr algn="ctr"/>
+            <a:endParaRPr/>
+          </a:p>
+        </p:txBody>
+      </p:sp>
+      <p:sp>
+        <p:nvSpPr>
+          <p:cNvPr id="17" name="TextBox 16">
+            <a:extLst>
+              <a:ext uri="{FF2B5EF4-FFF2-40B4-BE49-F238E27FC236}">
+                <a16:creationId xmlns:a16="http://schemas.microsoft.com/office/drawing/2014/main" id="{FB45B8B5-F1C4-BED2-125B-893C761D9110}"/>
+              </a:ext>
+            </a:extLst>
+          </p:cNvPr>
+          <p:cNvSpPr txBox="1"/>
+          <p:nvPr/>
+        </p:nvSpPr>
+        <p:spPr>
+          <a:xfrm>
+            <a:off x="1832024" y="2710725"/>
+            <a:ext cx="1828800" cy="822960"/>
+          </a:xfrm>
+          <a:prstGeom prst="rect">
+            <a:avLst/>
+          </a:prstGeom>
+          <a:noFill/>
+        </p:spPr>
+        <p:txBody>
+          <a:bodyPr wrap="square">
+            <a:spAutoFit/>
+          </a:bodyPr>
+          <a:lstStyle/>
+          <a:p>
+            <a:pPr algn="ctr">
+              <a:defRPr sz="1200" b="1">
+                <a:solidFill>
+                  <a:srgbClr val="FFFFFF"/>
+                </a:solidFill>
+              </a:defRPr>
+            </a:pPr>
+            <a:r>
+              <a:rPr dirty="0"/>
+              <a:t>W₂×Hist</a:t>
+            </a:r>
+            <a:br>
+              <a:rPr dirty="0"/>
+            </a:br>
+            <a:r>
+              <a:rPr dirty="0"/>
+              <a:t>Historical</a:t>
+            </a:r>
+          </a:p>
+        </p:txBody>
+      </p:sp>
+      <p:sp>
+        <p:nvSpPr>
+          <p:cNvPr id="18" name="Right Arrow 8">
+            <a:extLst>
+              <a:ext uri="{FF2B5EF4-FFF2-40B4-BE49-F238E27FC236}">
+                <a16:creationId xmlns:a16="http://schemas.microsoft.com/office/drawing/2014/main" id="{6D4B51CE-53E4-09C3-024C-00FF38338571}"/>
+              </a:ext>
+            </a:extLst>
+          </p:cNvPr>
+          <p:cNvSpPr/>
+          <p:nvPr/>
+        </p:nvSpPr>
+        <p:spPr>
+          <a:xfrm>
+            <a:off x="3561116" y="2847885"/>
+            <a:ext cx="137160" cy="274320"/>
+          </a:xfrm>
+          <a:prstGeom prst="rightArrow">
+            <a:avLst/>
+          </a:prstGeom>
+          <a:solidFill>
+            <a:srgbClr val="7F8C8D"/>
+          </a:solidFill>
+          <a:ln>
+            <a:noFill/>
+          </a:ln>
+        </p:spPr>
+        <p:style>
+          <a:lnRef idx="1">
+            <a:schemeClr val="accent1"/>
+          </a:lnRef>
+          <a:fillRef idx="3">
+            <a:schemeClr val="accent1"/>
+          </a:fillRef>
+          <a:effectRef idx="2">
+            <a:schemeClr val="accent1"/>
+          </a:effectRef>
+          <a:fontRef idx="minor">
+            <a:schemeClr val="lt1"/>
+          </a:fontRef>
+        </p:style>
+        <p:txBody>
+          <a:bodyPr rtlCol="0" anchor="ctr"/>
+          <a:lstStyle/>
+          <a:p>
+            <a:pPr algn="ctr"/>
+            <a:endParaRPr/>
+          </a:p>
+        </p:txBody>
+      </p:sp>
+      <p:sp>
+        <p:nvSpPr>
+          <p:cNvPr id="19" name="Rounded Rectangle 9">
+            <a:extLst>
+              <a:ext uri="{FF2B5EF4-FFF2-40B4-BE49-F238E27FC236}">
+                <a16:creationId xmlns:a16="http://schemas.microsoft.com/office/drawing/2014/main" id="{BAF974BB-7BA6-DE4E-0B5C-9B381BDF46BB}"/>
+              </a:ext>
+            </a:extLst>
+          </p:cNvPr>
+          <p:cNvSpPr/>
+          <p:nvPr/>
+        </p:nvSpPr>
+        <p:spPr>
+          <a:xfrm>
+            <a:off x="3738548" y="2573565"/>
+            <a:ext cx="1487715" cy="822960"/>
+          </a:xfrm>
+          <a:prstGeom prst="roundRect">
+            <a:avLst/>
+          </a:prstGeom>
+          <a:solidFill>
+            <a:srgbClr val="008CBA"/>
+          </a:solidFill>
+          <a:ln>
+            <a:noFill/>
+          </a:ln>
+        </p:spPr>
+        <p:style>
+          <a:lnRef idx="1">
+            <a:schemeClr val="accent1"/>
+          </a:lnRef>
+          <a:fillRef idx="3">
+            <a:schemeClr val="accent1"/>
+          </a:fillRef>
+          <a:effectRef idx="2">
+            <a:schemeClr val="accent1"/>
+          </a:effectRef>
+          <a:fontRef idx="minor">
+            <a:schemeClr val="lt1"/>
+          </a:fontRef>
+        </p:style>
+        <p:txBody>
+          <a:bodyPr rtlCol="0" anchor="ctr"/>
+          <a:lstStyle/>
+          <a:p>
+            <a:pPr algn="ctr"/>
+            <a:endParaRPr/>
+          </a:p>
+        </p:txBody>
+      </p:sp>
+      <p:sp>
+        <p:nvSpPr>
+          <p:cNvPr id="21" name="TextBox 20">
+            <a:extLst>
+              <a:ext uri="{FF2B5EF4-FFF2-40B4-BE49-F238E27FC236}">
+                <a16:creationId xmlns:a16="http://schemas.microsoft.com/office/drawing/2014/main" id="{B601B279-CFA6-041C-2074-FE14A03D90E8}"/>
+              </a:ext>
+            </a:extLst>
+          </p:cNvPr>
+          <p:cNvSpPr txBox="1"/>
+          <p:nvPr/>
+        </p:nvSpPr>
+        <p:spPr>
+          <a:xfrm>
+            <a:off x="3397464" y="2710725"/>
+            <a:ext cx="1828800" cy="822960"/>
+          </a:xfrm>
+          <a:prstGeom prst="rect">
+            <a:avLst/>
+          </a:prstGeom>
+          <a:noFill/>
+        </p:spPr>
+        <p:txBody>
+          <a:bodyPr wrap="square">
+            <a:spAutoFit/>
+          </a:bodyPr>
+          <a:lstStyle/>
+          <a:p>
+            <a:pPr algn="ctr">
+              <a:defRPr sz="1200" b="1">
+                <a:solidFill>
+                  <a:srgbClr val="FFFFFF"/>
+                </a:solidFill>
+              </a:defRPr>
+            </a:pPr>
+            <a:r>
+              <a:t>W₃×Price</a:t>
+            </a:r>
+            <a:br/>
+            <a:r>
+              <a:t>Price</a:t>
+            </a:r>
+          </a:p>
+        </p:txBody>
+      </p:sp>
+      <p:sp>
+        <p:nvSpPr>
+          <p:cNvPr id="22" name="Right Arrow 11">
+            <a:extLst>
+              <a:ext uri="{FF2B5EF4-FFF2-40B4-BE49-F238E27FC236}">
+                <a16:creationId xmlns:a16="http://schemas.microsoft.com/office/drawing/2014/main" id="{49A03528-C4D0-F3C4-DFE7-A3378DC6BC21}"/>
+              </a:ext>
+            </a:extLst>
+          </p:cNvPr>
+          <p:cNvSpPr/>
+          <p:nvPr/>
+        </p:nvSpPr>
+        <p:spPr>
+          <a:xfrm>
+            <a:off x="5244552" y="2847885"/>
+            <a:ext cx="137160" cy="274320"/>
+          </a:xfrm>
+          <a:prstGeom prst="rightArrow">
+            <a:avLst/>
+          </a:prstGeom>
+          <a:solidFill>
+            <a:srgbClr val="7F8C8D"/>
+          </a:solidFill>
+          <a:ln>
+            <a:noFill/>
+          </a:ln>
+        </p:spPr>
+        <p:style>
+          <a:lnRef idx="1">
+            <a:schemeClr val="accent1"/>
+          </a:lnRef>
+          <a:fillRef idx="3">
+            <a:schemeClr val="accent1"/>
+          </a:fillRef>
+          <a:effectRef idx="2">
+            <a:schemeClr val="accent1"/>
+          </a:effectRef>
+          <a:fontRef idx="minor">
+            <a:schemeClr val="lt1"/>
+          </a:fontRef>
+        </p:style>
+        <p:txBody>
+          <a:bodyPr rtlCol="0" anchor="ctr"/>
+          <a:lstStyle/>
+          <a:p>
+            <a:pPr algn="ctr"/>
+            <a:endParaRPr/>
+          </a:p>
+        </p:txBody>
+      </p:sp>
+      <p:sp>
+        <p:nvSpPr>
+          <p:cNvPr id="23" name="Rounded Rectangle 12">
+            <a:extLst>
+              <a:ext uri="{FF2B5EF4-FFF2-40B4-BE49-F238E27FC236}">
+                <a16:creationId xmlns:a16="http://schemas.microsoft.com/office/drawing/2014/main" id="{0456A7F6-8900-F67D-7782-C10C228CBF23}"/>
+              </a:ext>
+            </a:extLst>
+          </p:cNvPr>
+          <p:cNvSpPr/>
+          <p:nvPr/>
+        </p:nvSpPr>
+        <p:spPr>
+          <a:xfrm>
+            <a:off x="5376172" y="2573565"/>
+            <a:ext cx="1487718" cy="822960"/>
+          </a:xfrm>
+          <a:prstGeom prst="roundRect">
+            <a:avLst/>
+          </a:prstGeom>
+          <a:solidFill>
+            <a:srgbClr val="008CBA"/>
+          </a:solidFill>
+          <a:ln>
+            <a:noFill/>
+          </a:ln>
+        </p:spPr>
+        <p:style>
+          <a:lnRef idx="1">
+            <a:schemeClr val="accent1"/>
+          </a:lnRef>
+          <a:fillRef idx="3">
+            <a:schemeClr val="accent1"/>
+          </a:fillRef>
+          <a:effectRef idx="2">
+            <a:schemeClr val="accent1"/>
+          </a:effectRef>
+          <a:fontRef idx="minor">
+            <a:schemeClr val="lt1"/>
+          </a:fontRef>
+        </p:style>
+        <p:txBody>
+          <a:bodyPr rtlCol="0" anchor="ctr"/>
+          <a:lstStyle/>
+          <a:p>
+            <a:pPr algn="ctr"/>
+            <a:endParaRPr/>
+          </a:p>
+        </p:txBody>
+      </p:sp>
+      <p:sp>
+        <p:nvSpPr>
+          <p:cNvPr id="24" name="TextBox 23">
+            <a:extLst>
+              <a:ext uri="{FF2B5EF4-FFF2-40B4-BE49-F238E27FC236}">
+                <a16:creationId xmlns:a16="http://schemas.microsoft.com/office/drawing/2014/main" id="{27384991-6CE3-61D1-2606-D9E84C298EF2}"/>
+              </a:ext>
+            </a:extLst>
+          </p:cNvPr>
+          <p:cNvSpPr txBox="1"/>
+          <p:nvPr/>
+        </p:nvSpPr>
+        <p:spPr>
+          <a:xfrm>
+            <a:off x="5244551" y="2705746"/>
+            <a:ext cx="1643165" cy="461665"/>
+          </a:xfrm>
+          <a:prstGeom prst="rect">
+            <a:avLst/>
+          </a:prstGeom>
+          <a:noFill/>
+        </p:spPr>
+        <p:txBody>
+          <a:bodyPr wrap="square">
+            <a:spAutoFit/>
+          </a:bodyPr>
+          <a:lstStyle/>
+          <a:p>
+            <a:pPr algn="ctr">
+              <a:defRPr sz="1200" b="1">
+                <a:solidFill>
+                  <a:srgbClr val="FFFFFF"/>
+                </a:solidFill>
+              </a:defRPr>
+            </a:pPr>
+            <a:r>
+              <a:rPr dirty="0"/>
+              <a:t>W₄×Rec</a:t>
+            </a:r>
+            <a:br>
+              <a:rPr dirty="0"/>
+            </a:br>
+            <a:r>
+              <a:rPr dirty="0"/>
+              <a:t>Recency</a:t>
+            </a:r>
+          </a:p>
+        </p:txBody>
+      </p:sp>
+      <p:sp>
+        <p:nvSpPr>
+          <p:cNvPr id="25" name="Right Arrow 14">
+            <a:extLst>
+              <a:ext uri="{FF2B5EF4-FFF2-40B4-BE49-F238E27FC236}">
+                <a16:creationId xmlns:a16="http://schemas.microsoft.com/office/drawing/2014/main" id="{6FE5F59A-C69C-B700-9E0A-7C45FBE714DB}"/>
+              </a:ext>
+            </a:extLst>
+          </p:cNvPr>
+          <p:cNvSpPr/>
+          <p:nvPr/>
+        </p:nvSpPr>
+        <p:spPr>
+          <a:xfrm>
+            <a:off x="6882178" y="2847885"/>
+            <a:ext cx="137160" cy="274320"/>
+          </a:xfrm>
+          <a:prstGeom prst="rightArrow">
+            <a:avLst/>
+          </a:prstGeom>
+          <a:solidFill>
+            <a:srgbClr val="7F8C8D"/>
+          </a:solidFill>
+          <a:ln>
+            <a:noFill/>
+          </a:ln>
+        </p:spPr>
+        <p:style>
+          <a:lnRef idx="1">
+            <a:schemeClr val="accent1"/>
+          </a:lnRef>
+          <a:fillRef idx="3">
+            <a:schemeClr val="accent1"/>
+          </a:fillRef>
+          <a:effectRef idx="2">
+            <a:schemeClr val="accent1"/>
+          </a:effectRef>
+          <a:fontRef idx="minor">
+            <a:schemeClr val="lt1"/>
+          </a:fontRef>
+        </p:style>
+        <p:txBody>
+          <a:bodyPr rtlCol="0" anchor="ctr"/>
+          <a:lstStyle/>
+          <a:p>
+            <a:pPr algn="ctr"/>
+            <a:endParaRPr/>
+          </a:p>
+        </p:txBody>
+      </p:sp>
+      <p:sp>
+        <p:nvSpPr>
+          <p:cNvPr id="26" name="Rounded Rectangle 15">
+            <a:extLst>
+              <a:ext uri="{FF2B5EF4-FFF2-40B4-BE49-F238E27FC236}">
+                <a16:creationId xmlns:a16="http://schemas.microsoft.com/office/drawing/2014/main" id="{A999DC81-0A6D-A583-9E2B-08AFB951D066}"/>
+              </a:ext>
+            </a:extLst>
+          </p:cNvPr>
+          <p:cNvSpPr/>
+          <p:nvPr/>
+        </p:nvSpPr>
+        <p:spPr>
+          <a:xfrm>
+            <a:off x="7001050" y="2573565"/>
+            <a:ext cx="1487718" cy="822960"/>
+          </a:xfrm>
+          <a:prstGeom prst="roundRect">
+            <a:avLst/>
+          </a:prstGeom>
+          <a:solidFill>
+            <a:srgbClr val="008000"/>
+          </a:solidFill>
+          <a:ln>
+            <a:noFill/>
+          </a:ln>
+        </p:spPr>
+        <p:style>
+          <a:lnRef idx="1">
+            <a:schemeClr val="accent1"/>
+          </a:lnRef>
+          <a:fillRef idx="3">
+            <a:schemeClr val="accent1"/>
+          </a:fillRef>
+          <a:effectRef idx="2">
+            <a:schemeClr val="accent1"/>
+          </a:effectRef>
+          <a:fontRef idx="minor">
+            <a:schemeClr val="lt1"/>
+          </a:fontRef>
+        </p:style>
+        <p:txBody>
+          <a:bodyPr rtlCol="0" anchor="ctr"/>
+          <a:lstStyle/>
+          <a:p>
+            <a:pPr algn="ctr"/>
+            <a:endParaRPr/>
+          </a:p>
+        </p:txBody>
+      </p:sp>
+      <p:sp>
+        <p:nvSpPr>
+          <p:cNvPr id="27" name="TextBox 26">
+            <a:extLst>
+              <a:ext uri="{FF2B5EF4-FFF2-40B4-BE49-F238E27FC236}">
+                <a16:creationId xmlns:a16="http://schemas.microsoft.com/office/drawing/2014/main" id="{A0BD6590-D3DF-9457-51AA-968B2D5C1ABC}"/>
+              </a:ext>
+            </a:extLst>
+          </p:cNvPr>
+          <p:cNvSpPr txBox="1"/>
+          <p:nvPr/>
+        </p:nvSpPr>
+        <p:spPr>
+          <a:xfrm>
+            <a:off x="6714405" y="2821264"/>
+            <a:ext cx="1828800" cy="276999"/>
+          </a:xfrm>
+          <a:prstGeom prst="rect">
+            <a:avLst/>
+          </a:prstGeom>
+          <a:noFill/>
+        </p:spPr>
+        <p:txBody>
+          <a:bodyPr wrap="square">
+            <a:spAutoFit/>
+          </a:bodyPr>
+          <a:lstStyle/>
+          <a:p>
+            <a:pPr algn="ctr">
+              <a:defRPr sz="1200" b="1">
+                <a:solidFill>
+                  <a:srgbClr val="FFFFFF"/>
+                </a:solidFill>
+              </a:defRPr>
+            </a:pPr>
+            <a:r>
+              <a:rPr dirty="0"/>
+              <a:t>= </a:t>
+            </a:r>
+            <a:r>
+              <a:rPr dirty="0" err="1"/>
+              <a:t>Tổng</a:t>
+            </a:r>
+            <a:r>
+              <a:rPr lang="vi-VN" dirty="0"/>
+              <a:t> </a:t>
+            </a:r>
+            <a:r>
+              <a:rPr dirty="0" err="1"/>
+              <a:t>Điểm</a:t>
+            </a:r>
+            <a:endParaRPr dirty="0"/>
+          </a:p>
+        </p:txBody>
+      </p:sp>
+      <p:sp>
+        <p:nvSpPr>
+          <p:cNvPr id="28" name="TextBox 27">
+            <a:extLst>
+              <a:ext uri="{FF2B5EF4-FFF2-40B4-BE49-F238E27FC236}">
+                <a16:creationId xmlns:a16="http://schemas.microsoft.com/office/drawing/2014/main" id="{87034F69-CB4F-6645-4D4F-385CFF849D44}"/>
+              </a:ext>
+            </a:extLst>
+          </p:cNvPr>
+          <p:cNvSpPr txBox="1"/>
+          <p:nvPr/>
+        </p:nvSpPr>
+        <p:spPr>
+          <a:xfrm>
+            <a:off x="2459932" y="3856265"/>
+            <a:ext cx="3946914" cy="292388"/>
+          </a:xfrm>
+          <a:prstGeom prst="rect">
+            <a:avLst/>
+          </a:prstGeom>
+          <a:noFill/>
+        </p:spPr>
+        <p:txBody>
+          <a:bodyPr wrap="none">
+            <a:spAutoFit/>
+          </a:bodyPr>
+          <a:lstStyle/>
+          <a:p>
+            <a:pPr algn="ctr">
+              <a:defRPr sz="1300" i="1">
+                <a:solidFill>
+                  <a:srgbClr val="7F8C8D"/>
+                </a:solidFill>
+              </a:defRPr>
+            </a:pPr>
+            <a:r>
+              <a:rPr dirty="0"/>
+              <a:t>W₁=0.</a:t>
+            </a:r>
+            <a:r>
+              <a:rPr lang="vi-VN" dirty="0"/>
+              <a:t>35</a:t>
+            </a:r>
+            <a:r>
+              <a:rPr dirty="0"/>
+              <a:t> | W₂=0.</a:t>
+            </a:r>
+            <a:r>
+              <a:rPr lang="vi-VN" dirty="0"/>
+              <a:t>15</a:t>
+            </a:r>
+            <a:r>
+              <a:rPr dirty="0"/>
+              <a:t> | W₃=0.</a:t>
+            </a:r>
+            <a:r>
+              <a:rPr lang="vi-VN" dirty="0"/>
+              <a:t>10</a:t>
+            </a:r>
+            <a:r>
+              <a:rPr dirty="0"/>
+              <a:t> | W₄=0.</a:t>
+            </a:r>
+            <a:r>
+              <a:rPr lang="vi-VN" dirty="0"/>
+              <a:t>05 | W5 = 35</a:t>
+            </a:r>
+            <a:endParaRPr dirty="0"/>
+          </a:p>
+        </p:txBody>
+      </p:sp>
+    </p:spTree>
+    <p:extLst>
+      <p:ext uri="{BB962C8B-B14F-4D97-AF65-F5344CB8AC3E}">
+        <p14:creationId xmlns:p14="http://schemas.microsoft.com/office/powerpoint/2010/main" val="331685062"/>
+      </p:ext>
+    </p:extLst>
+  </p:cSld>
+  <p:clrMapOvr>
+    <a:masterClrMapping/>
+  </p:clrMapOvr>
+</p:sld>
+</file>
+
+<file path=ppt/slides/slide21.xml><?xml version="1.0" encoding="utf-8"?>
+<p:sld xmlns:a="http://schemas.openxmlformats.org/drawingml/2006/main" xmlns:r="http://schemas.openxmlformats.org/officeDocument/2006/relationships" xmlns:p="http://schemas.openxmlformats.org/presentationml/2006/main">
+  <p:cSld>
+    <p:spTree>
+      <p:nvGrpSpPr>
         <p:cNvPr id="1" name=""/>
         <p:cNvGrpSpPr/>
         <p:nvPr/>
@@ -15506,7 +17255,7 @@
           <p:nvPr>
             <p:extLst>
               <p:ext uri="{D42A27DB-BD31-4B8C-83A1-F6EECF244321}">
-                <p14:modId xmlns:p14="http://schemas.microsoft.com/office/powerpoint/2010/main" val="3963984765"/>
+                <p14:modId xmlns:p14="http://schemas.microsoft.com/office/powerpoint/2010/main" val="3329025818"/>
               </p:ext>
             </p:extLst>
           </p:nvPr>
@@ -15702,8 +17451,14 @@
                         </a:defRPr>
                       </a:pPr>
                       <a:r>
-                        <a:t>× 0.54</a:t>
+                        <a:rPr dirty="0"/>
+                        <a:t>× 0.</a:t>
                       </a:r>
+                      <a:r>
+                        <a:rPr lang="vi-VN" dirty="0"/>
+                        <a:t>35</a:t>
+                      </a:r>
+                      <a:endParaRPr dirty="0"/>
                     </a:p>
                   </a:txBody>
                   <a:tcPr/>
@@ -15785,8 +17540,14 @@
                         </a:defRPr>
                       </a:pPr>
                       <a:r>
-                        <a:t>× 0.00</a:t>
+                        <a:rPr dirty="0"/>
+                        <a:t>× 0.</a:t>
                       </a:r>
+                      <a:r>
+                        <a:rPr lang="vi-VN" dirty="0"/>
+                        <a:t>35</a:t>
+                      </a:r>
+                      <a:endParaRPr dirty="0"/>
                     </a:p>
                   </a:txBody>
                   <a:tcPr/>
@@ -15868,8 +17629,14 @@
                         </a:defRPr>
                       </a:pPr>
                       <a:r>
-                        <a:t>× 0.23</a:t>
+                        <a:rPr dirty="0"/>
+                        <a:t>× 0.</a:t>
                       </a:r>
+                      <a:r>
+                        <a:rPr lang="vi-VN" dirty="0"/>
+                        <a:t>15</a:t>
+                      </a:r>
+                      <a:endParaRPr dirty="0"/>
                     </a:p>
                   </a:txBody>
                   <a:tcPr/>
@@ -15953,8 +17720,13 @@
                       </a:pPr>
                       <a:r>
                         <a:rPr dirty="0"/>
-                        <a:t>× 0.15</a:t>
+                        <a:t>× 0.</a:t>
                       </a:r>
+                      <a:r>
+                        <a:rPr lang="vi-VN" dirty="0"/>
+                        <a:t>10</a:t>
+                      </a:r>
+                      <a:endParaRPr dirty="0"/>
                     </a:p>
                   </a:txBody>
                   <a:tcPr/>
@@ -16036,8 +17808,14 @@
                         </a:defRPr>
                       </a:pPr>
                       <a:r>
-                        <a:t>× 0.08</a:t>
+                        <a:rPr dirty="0"/>
+                        <a:t>× 0.</a:t>
                       </a:r>
+                      <a:r>
+                        <a:rPr lang="vi-VN" dirty="0"/>
+                        <a:t>05</a:t>
+                      </a:r>
+                      <a:endParaRPr dirty="0"/>
                     </a:p>
                   </a:txBody>
                   <a:tcPr/>
@@ -16180,7 +17958,7 @@
 </p:sld>
 </file>
 
-<file path=ppt/slides/slide21.xml><?xml version="1.0" encoding="utf-8"?>
+<file path=ppt/slides/slide22.xml><?xml version="1.0" encoding="utf-8"?>
 <p:sld xmlns:a="http://schemas.openxmlformats.org/drawingml/2006/main" xmlns:r="http://schemas.openxmlformats.org/officeDocument/2006/relationships" xmlns:p="http://schemas.openxmlformats.org/presentationml/2006/main">
   <p:cSld>
     <p:spTree>
@@ -16656,7 +18434,7 @@
 </p:sld>
 </file>
 
-<file path=ppt/slides/slide22.xml><?xml version="1.0" encoding="utf-8"?>
+<file path=ppt/slides/slide23.xml><?xml version="1.0" encoding="utf-8"?>
 <p:sld xmlns:a="http://schemas.openxmlformats.org/drawingml/2006/main" xmlns:r="http://schemas.openxmlformats.org/officeDocument/2006/relationships" xmlns:p="http://schemas.openxmlformats.org/presentationml/2006/main">
   <p:cSld>
     <p:spTree>
@@ -18132,7 +19910,7 @@
 </p:sld>
 </file>
 
-<file path=ppt/slides/slide23.xml><?xml version="1.0" encoding="utf-8"?>
+<file path=ppt/slides/slide24.xml><?xml version="1.0" encoding="utf-8"?>
 <p:sld xmlns:a="http://schemas.openxmlformats.org/drawingml/2006/main" xmlns:r="http://schemas.openxmlformats.org/officeDocument/2006/relationships" xmlns:p="http://schemas.openxmlformats.org/presentationml/2006/main">
   <p:cSld>
     <p:spTree>
@@ -19330,1221 +21108,6 @@
 </p:sld>
 </file>
 
-<file path=ppt/slides/slide24.xml><?xml version="1.0" encoding="utf-8"?>
-<p:sld xmlns:a="http://schemas.openxmlformats.org/drawingml/2006/main" xmlns:r="http://schemas.openxmlformats.org/officeDocument/2006/relationships" xmlns:p="http://schemas.openxmlformats.org/presentationml/2006/main">
-  <p:cSld>
-    <p:spTree>
-      <p:nvGrpSpPr>
-        <p:cNvPr id="1" name=""/>
-        <p:cNvGrpSpPr/>
-        <p:nvPr/>
-      </p:nvGrpSpPr>
-      <p:grpSpPr>
-        <a:xfrm>
-          <a:off x="0" y="0"/>
-          <a:ext cx="0" cy="0"/>
-          <a:chOff x="0" y="0"/>
-          <a:chExt cx="0" cy="0"/>
-        </a:xfrm>
-      </p:grpSpPr>
-      <p:sp>
-        <p:nvSpPr>
-          <p:cNvPr id="2" name="Title 1">
-            <a:extLst>
-              <a:ext uri="{FF2B5EF4-FFF2-40B4-BE49-F238E27FC236}">
-                <a16:creationId xmlns:a16="http://schemas.microsoft.com/office/drawing/2014/main" id="{B741449E-0A06-8D67-AB8E-5570492931C8}"/>
-              </a:ext>
-            </a:extLst>
-          </p:cNvPr>
-          <p:cNvSpPr>
-            <a:spLocks noGrp="1"/>
-          </p:cNvSpPr>
-          <p:nvPr>
-            <p:ph type="title"/>
-          </p:nvPr>
-        </p:nvSpPr>
-        <p:spPr/>
-        <p:txBody>
-          <a:bodyPr/>
-          <a:lstStyle/>
-          <a:p>
-            <a:r>
-              <a:rPr lang="vi-VN" dirty="0"/>
-              <a:t>Demo hệ thống</a:t>
-            </a:r>
-            <a:endParaRPr lang="en-US" dirty="0"/>
-          </a:p>
-        </p:txBody>
-      </p:sp>
-      <p:sp>
-        <p:nvSpPr>
-          <p:cNvPr id="5" name="Rounded Rectangle 4">
-            <a:extLst>
-              <a:ext uri="{FF2B5EF4-FFF2-40B4-BE49-F238E27FC236}">
-                <a16:creationId xmlns:a16="http://schemas.microsoft.com/office/drawing/2014/main" id="{545DA118-89DF-0BCD-3EBB-F63B1AB23A78}"/>
-              </a:ext>
-            </a:extLst>
-          </p:cNvPr>
-          <p:cNvSpPr/>
-          <p:nvPr/>
-        </p:nvSpPr>
-        <p:spPr>
-          <a:xfrm>
-            <a:off x="457200" y="1554480"/>
-            <a:ext cx="2651760" cy="2842591"/>
-          </a:xfrm>
-          <a:prstGeom prst="roundRect">
-            <a:avLst/>
-          </a:prstGeom>
-          <a:solidFill>
-            <a:srgbClr val="FFFFFF"/>
-          </a:solidFill>
-          <a:ln>
-            <a:solidFill>
-              <a:srgbClr val="0070C0"/>
-            </a:solidFill>
-          </a:ln>
-        </p:spPr>
-        <p:style>
-          <a:lnRef idx="1">
-            <a:schemeClr val="accent1"/>
-          </a:lnRef>
-          <a:fillRef idx="3">
-            <a:schemeClr val="accent1"/>
-          </a:fillRef>
-          <a:effectRef idx="2">
-            <a:schemeClr val="accent1"/>
-          </a:effectRef>
-          <a:fontRef idx="minor">
-            <a:schemeClr val="lt1"/>
-          </a:fontRef>
-        </p:style>
-        <p:txBody>
-          <a:bodyPr rtlCol="0" anchor="ctr"/>
-          <a:lstStyle/>
-          <a:p>
-            <a:pPr algn="ctr"/>
-            <a:endParaRPr/>
-          </a:p>
-        </p:txBody>
-      </p:sp>
-      <p:sp>
-        <p:nvSpPr>
-          <p:cNvPr id="6" name="TextBox 5">
-            <a:extLst>
-              <a:ext uri="{FF2B5EF4-FFF2-40B4-BE49-F238E27FC236}">
-                <a16:creationId xmlns:a16="http://schemas.microsoft.com/office/drawing/2014/main" id="{18E4FA88-B769-98E6-C834-11F36B9C4A1B}"/>
-              </a:ext>
-            </a:extLst>
-          </p:cNvPr>
-          <p:cNvSpPr txBox="1"/>
-          <p:nvPr/>
-        </p:nvSpPr>
-        <p:spPr>
-          <a:xfrm>
-            <a:off x="1508760" y="1691640"/>
-            <a:ext cx="548640" cy="548640"/>
-          </a:xfrm>
-          <a:prstGeom prst="rect">
-            <a:avLst/>
-          </a:prstGeom>
-          <a:noFill/>
-        </p:spPr>
-        <p:txBody>
-          <a:bodyPr wrap="square">
-            <a:spAutoFit/>
-          </a:bodyPr>
-          <a:lstStyle/>
-          <a:p>
-            <a:pPr algn="ctr">
-              <a:defRPr sz="2800" b="1" i="0">
-                <a:solidFill>
-                  <a:srgbClr val="0070C0"/>
-                </a:solidFill>
-              </a:defRPr>
-            </a:pPr>
-            <a:r>
-              <a:t>1</a:t>
-            </a:r>
-          </a:p>
-        </p:txBody>
-      </p:sp>
-      <p:sp>
-        <p:nvSpPr>
-          <p:cNvPr id="7" name="TextBox 6">
-            <a:extLst>
-              <a:ext uri="{FF2B5EF4-FFF2-40B4-BE49-F238E27FC236}">
-                <a16:creationId xmlns:a16="http://schemas.microsoft.com/office/drawing/2014/main" id="{3DB575AC-B417-B846-0F23-6DA6F2710E8C}"/>
-              </a:ext>
-            </a:extLst>
-          </p:cNvPr>
-          <p:cNvSpPr txBox="1"/>
-          <p:nvPr/>
-        </p:nvSpPr>
-        <p:spPr>
-          <a:xfrm>
-            <a:off x="548640" y="2331720"/>
-            <a:ext cx="2468880" cy="646331"/>
-          </a:xfrm>
-          <a:prstGeom prst="rect">
-            <a:avLst/>
-          </a:prstGeom>
-          <a:noFill/>
-        </p:spPr>
-        <p:txBody>
-          <a:bodyPr wrap="square">
-            <a:spAutoFit/>
-          </a:bodyPr>
-          <a:lstStyle/>
-          <a:p>
-            <a:pPr algn="ctr">
-              <a:defRPr sz="1800" b="1" i="0">
-                <a:solidFill>
-                  <a:srgbClr val="003366"/>
-                </a:solidFill>
-              </a:defRPr>
-            </a:pPr>
-            <a:r>
-              <a:rPr lang="en-US" dirty="0" err="1"/>
-              <a:t>Chạy</a:t>
-            </a:r>
-            <a:r>
-              <a:rPr lang="en-US" dirty="0"/>
-              <a:t> </a:t>
-            </a:r>
-            <a:r>
-              <a:rPr lang="en-US" dirty="0" err="1"/>
-              <a:t>nhanh</a:t>
-            </a:r>
-            <a:r>
-              <a:rPr lang="en-US" dirty="0"/>
-              <a:t> (</a:t>
-            </a:r>
-            <a:r>
-              <a:rPr lang="en-US" dirty="0" err="1"/>
-              <a:t>đã</a:t>
-            </a:r>
-            <a:r>
-              <a:rPr lang="en-US" dirty="0"/>
-              <a:t> </a:t>
-            </a:r>
-            <a:r>
-              <a:rPr lang="en-US" dirty="0" err="1"/>
-              <a:t>có</a:t>
-            </a:r>
-            <a:r>
-              <a:rPr lang="en-US" dirty="0"/>
-              <a:t> </a:t>
-            </a:r>
-            <a:r>
-              <a:rPr lang="en-US" dirty="0" err="1"/>
-              <a:t>dữ</a:t>
-            </a:r>
-            <a:r>
-              <a:rPr lang="en-US" dirty="0"/>
-              <a:t> </a:t>
-            </a:r>
-            <a:r>
-              <a:rPr lang="en-US" dirty="0" err="1"/>
-              <a:t>liệu</a:t>
-            </a:r>
-            <a:r>
-              <a:rPr lang="en-US" dirty="0"/>
-              <a:t>)</a:t>
-            </a:r>
-          </a:p>
-        </p:txBody>
-      </p:sp>
-      <p:sp>
-        <p:nvSpPr>
-          <p:cNvPr id="8" name="Rectangle 7">
-            <a:extLst>
-              <a:ext uri="{FF2B5EF4-FFF2-40B4-BE49-F238E27FC236}">
-                <a16:creationId xmlns:a16="http://schemas.microsoft.com/office/drawing/2014/main" id="{C6E30B52-F79A-D821-A4BA-54972A89E633}"/>
-              </a:ext>
-            </a:extLst>
-          </p:cNvPr>
-          <p:cNvSpPr/>
-          <p:nvPr/>
-        </p:nvSpPr>
-        <p:spPr>
-          <a:xfrm>
-            <a:off x="822960" y="3429000"/>
-            <a:ext cx="1920240" cy="45720"/>
-          </a:xfrm>
-          <a:prstGeom prst="rect">
-            <a:avLst/>
-          </a:prstGeom>
-          <a:solidFill>
-            <a:srgbClr val="0070C0"/>
-          </a:solidFill>
-          <a:ln>
-            <a:noFill/>
-          </a:ln>
-        </p:spPr>
-        <p:style>
-          <a:lnRef idx="1">
-            <a:schemeClr val="accent1"/>
-          </a:lnRef>
-          <a:fillRef idx="3">
-            <a:schemeClr val="accent1"/>
-          </a:fillRef>
-          <a:effectRef idx="2">
-            <a:schemeClr val="accent1"/>
-          </a:effectRef>
-          <a:fontRef idx="minor">
-            <a:schemeClr val="lt1"/>
-          </a:fontRef>
-        </p:style>
-        <p:txBody>
-          <a:bodyPr rtlCol="0" anchor="ctr"/>
-          <a:lstStyle/>
-          <a:p>
-            <a:pPr algn="ctr"/>
-            <a:endParaRPr/>
-          </a:p>
-        </p:txBody>
-      </p:sp>
-      <p:sp>
-        <p:nvSpPr>
-          <p:cNvPr id="9" name="TextBox 8">
-            <a:extLst>
-              <a:ext uri="{FF2B5EF4-FFF2-40B4-BE49-F238E27FC236}">
-                <a16:creationId xmlns:a16="http://schemas.microsoft.com/office/drawing/2014/main" id="{B679F5A7-3909-CDCD-2BCA-EAB279BE530D}"/>
-              </a:ext>
-            </a:extLst>
-          </p:cNvPr>
-          <p:cNvSpPr txBox="1"/>
-          <p:nvPr/>
-        </p:nvSpPr>
-        <p:spPr>
-          <a:xfrm>
-            <a:off x="594360" y="3566160"/>
-            <a:ext cx="2377440" cy="492443"/>
-          </a:xfrm>
-          <a:prstGeom prst="rect">
-            <a:avLst/>
-          </a:prstGeom>
-          <a:noFill/>
-        </p:spPr>
-        <p:txBody>
-          <a:bodyPr wrap="square">
-            <a:spAutoFit/>
-          </a:bodyPr>
-          <a:lstStyle/>
-          <a:p>
-            <a:pPr algn="ctr">
-              <a:defRPr sz="1300" b="0" i="0">
-                <a:solidFill>
-                  <a:srgbClr val="595959"/>
-                </a:solidFill>
-              </a:defRPr>
-            </a:pPr>
-            <a:r>
-              <a:rPr lang="en-US" dirty="0"/>
-              <a:t>python main.py serve</a:t>
-            </a:r>
-          </a:p>
-          <a:p>
-            <a:pPr algn="ctr">
-              <a:defRPr sz="1300" b="0" i="0">
-                <a:solidFill>
-                  <a:srgbClr val="595959"/>
-                </a:solidFill>
-              </a:defRPr>
-            </a:pPr>
-            <a:endParaRPr dirty="0"/>
-          </a:p>
-        </p:txBody>
-      </p:sp>
-      <p:sp>
-        <p:nvSpPr>
-          <p:cNvPr id="10" name="Rounded Rectangle 9">
-            <a:extLst>
-              <a:ext uri="{FF2B5EF4-FFF2-40B4-BE49-F238E27FC236}">
-                <a16:creationId xmlns:a16="http://schemas.microsoft.com/office/drawing/2014/main" id="{38227251-ECDC-D857-9303-B8BFD487396F}"/>
-              </a:ext>
-            </a:extLst>
-          </p:cNvPr>
-          <p:cNvSpPr/>
-          <p:nvPr/>
-        </p:nvSpPr>
-        <p:spPr>
-          <a:xfrm>
-            <a:off x="3383280" y="1554480"/>
-            <a:ext cx="2651760" cy="2842591"/>
-          </a:xfrm>
-          <a:prstGeom prst="roundRect">
-            <a:avLst/>
-          </a:prstGeom>
-          <a:solidFill>
-            <a:srgbClr val="FFFFFF"/>
-          </a:solidFill>
-          <a:ln>
-            <a:solidFill>
-              <a:srgbClr val="FF9900"/>
-            </a:solidFill>
-          </a:ln>
-        </p:spPr>
-        <p:style>
-          <a:lnRef idx="1">
-            <a:schemeClr val="accent1"/>
-          </a:lnRef>
-          <a:fillRef idx="3">
-            <a:schemeClr val="accent1"/>
-          </a:fillRef>
-          <a:effectRef idx="2">
-            <a:schemeClr val="accent1"/>
-          </a:effectRef>
-          <a:fontRef idx="minor">
-            <a:schemeClr val="lt1"/>
-          </a:fontRef>
-        </p:style>
-        <p:txBody>
-          <a:bodyPr rtlCol="0" anchor="ctr"/>
-          <a:lstStyle/>
-          <a:p>
-            <a:pPr algn="ctr"/>
-            <a:endParaRPr/>
-          </a:p>
-        </p:txBody>
-      </p:sp>
-      <p:sp>
-        <p:nvSpPr>
-          <p:cNvPr id="11" name="TextBox 10">
-            <a:extLst>
-              <a:ext uri="{FF2B5EF4-FFF2-40B4-BE49-F238E27FC236}">
-                <a16:creationId xmlns:a16="http://schemas.microsoft.com/office/drawing/2014/main" id="{183BC1F1-0254-9568-AE59-999F51A2606F}"/>
-              </a:ext>
-            </a:extLst>
-          </p:cNvPr>
-          <p:cNvSpPr txBox="1"/>
-          <p:nvPr/>
-        </p:nvSpPr>
-        <p:spPr>
-          <a:xfrm>
-            <a:off x="4434840" y="1783080"/>
-            <a:ext cx="548640" cy="548640"/>
-          </a:xfrm>
-          <a:prstGeom prst="rect">
-            <a:avLst/>
-          </a:prstGeom>
-          <a:noFill/>
-        </p:spPr>
-        <p:txBody>
-          <a:bodyPr wrap="square">
-            <a:spAutoFit/>
-          </a:bodyPr>
-          <a:lstStyle/>
-          <a:p>
-            <a:pPr algn="ctr">
-              <a:defRPr sz="2800" b="1" i="0">
-                <a:solidFill>
-                  <a:srgbClr val="FF9900"/>
-                </a:solidFill>
-              </a:defRPr>
-            </a:pPr>
-            <a:r>
-              <a:rPr dirty="0"/>
-              <a:t>2</a:t>
-            </a:r>
-          </a:p>
-        </p:txBody>
-      </p:sp>
-      <p:sp>
-        <p:nvSpPr>
-          <p:cNvPr id="12" name="TextBox 11">
-            <a:extLst>
-              <a:ext uri="{FF2B5EF4-FFF2-40B4-BE49-F238E27FC236}">
-                <a16:creationId xmlns:a16="http://schemas.microsoft.com/office/drawing/2014/main" id="{B627FEA8-0A11-2746-0A62-74DF66ADB83F}"/>
-              </a:ext>
-            </a:extLst>
-          </p:cNvPr>
-          <p:cNvSpPr txBox="1"/>
-          <p:nvPr/>
-        </p:nvSpPr>
-        <p:spPr>
-          <a:xfrm>
-            <a:off x="3474720" y="2331720"/>
-            <a:ext cx="2468880" cy="923330"/>
-          </a:xfrm>
-          <a:prstGeom prst="rect">
-            <a:avLst/>
-          </a:prstGeom>
-          <a:noFill/>
-        </p:spPr>
-        <p:txBody>
-          <a:bodyPr wrap="square">
-            <a:spAutoFit/>
-          </a:bodyPr>
-          <a:lstStyle/>
-          <a:p>
-            <a:pPr algn="ctr">
-              <a:defRPr sz="1800" b="1" i="0">
-                <a:solidFill>
-                  <a:srgbClr val="003366"/>
-                </a:solidFill>
-              </a:defRPr>
-            </a:pPr>
-            <a:r>
-              <a:rPr lang="en-US" dirty="0"/>
-              <a:t>Rebuild </a:t>
-            </a:r>
-            <a:r>
-              <a:rPr lang="en-US" dirty="0" err="1"/>
-              <a:t>toàn</a:t>
-            </a:r>
-            <a:r>
-              <a:rPr lang="en-US" dirty="0"/>
-              <a:t> </a:t>
-            </a:r>
-            <a:r>
-              <a:rPr lang="en-US" dirty="0" err="1"/>
-              <a:t>bộ</a:t>
-            </a:r>
-            <a:r>
-              <a:rPr lang="en-US" dirty="0"/>
-              <a:t> (</a:t>
-            </a:r>
-            <a:r>
-              <a:rPr lang="en-US" dirty="0" err="1"/>
-              <a:t>lần</a:t>
-            </a:r>
-            <a:r>
-              <a:rPr lang="en-US" dirty="0"/>
-              <a:t> </a:t>
-            </a:r>
-            <a:r>
-              <a:rPr lang="en-US" dirty="0" err="1"/>
-              <a:t>đầu</a:t>
-            </a:r>
-            <a:r>
-              <a:rPr lang="en-US" dirty="0"/>
-              <a:t> </a:t>
-            </a:r>
-            <a:r>
-              <a:rPr lang="en-US" dirty="0" err="1"/>
-              <a:t>hoặc</a:t>
-            </a:r>
-            <a:r>
-              <a:rPr lang="en-US" dirty="0"/>
-              <a:t> </a:t>
-            </a:r>
-            <a:r>
-              <a:rPr lang="en-US" dirty="0" err="1"/>
-              <a:t>khi</a:t>
-            </a:r>
-            <a:r>
-              <a:rPr lang="en-US" dirty="0"/>
-              <a:t> </a:t>
-            </a:r>
-            <a:r>
-              <a:rPr lang="en-US" dirty="0" err="1"/>
-              <a:t>cập</a:t>
-            </a:r>
-            <a:r>
-              <a:rPr lang="en-US" dirty="0"/>
-              <a:t> </a:t>
-            </a:r>
-            <a:r>
-              <a:rPr lang="en-US" dirty="0" err="1"/>
-              <a:t>nhật</a:t>
-            </a:r>
-            <a:r>
-              <a:rPr lang="en-US" dirty="0"/>
-              <a:t> </a:t>
-            </a:r>
-            <a:r>
-              <a:rPr lang="en-US" dirty="0" err="1"/>
-              <a:t>dữ</a:t>
-            </a:r>
-            <a:r>
-              <a:rPr lang="en-US" dirty="0"/>
-              <a:t> </a:t>
-            </a:r>
-            <a:r>
-              <a:rPr lang="en-US" dirty="0" err="1"/>
-              <a:t>liệu</a:t>
-            </a:r>
-            <a:r>
-              <a:rPr lang="en-US" dirty="0"/>
-              <a:t>)</a:t>
-            </a:r>
-            <a:endParaRPr dirty="0"/>
-          </a:p>
-        </p:txBody>
-      </p:sp>
-      <p:sp>
-        <p:nvSpPr>
-          <p:cNvPr id="13" name="Rectangle 12">
-            <a:extLst>
-              <a:ext uri="{FF2B5EF4-FFF2-40B4-BE49-F238E27FC236}">
-                <a16:creationId xmlns:a16="http://schemas.microsoft.com/office/drawing/2014/main" id="{3C49CC69-6E99-7F6B-0EDE-DB11E9B00D9E}"/>
-              </a:ext>
-            </a:extLst>
-          </p:cNvPr>
-          <p:cNvSpPr/>
-          <p:nvPr/>
-        </p:nvSpPr>
-        <p:spPr>
-          <a:xfrm>
-            <a:off x="3749040" y="3429000"/>
-            <a:ext cx="1920240" cy="45720"/>
-          </a:xfrm>
-          <a:prstGeom prst="rect">
-            <a:avLst/>
-          </a:prstGeom>
-          <a:solidFill>
-            <a:srgbClr val="FF9900"/>
-          </a:solidFill>
-          <a:ln>
-            <a:noFill/>
-          </a:ln>
-        </p:spPr>
-        <p:style>
-          <a:lnRef idx="1">
-            <a:schemeClr val="accent1"/>
-          </a:lnRef>
-          <a:fillRef idx="3">
-            <a:schemeClr val="accent1"/>
-          </a:fillRef>
-          <a:effectRef idx="2">
-            <a:schemeClr val="accent1"/>
-          </a:effectRef>
-          <a:fontRef idx="minor">
-            <a:schemeClr val="lt1"/>
-          </a:fontRef>
-        </p:style>
-        <p:txBody>
-          <a:bodyPr rtlCol="0" anchor="ctr"/>
-          <a:lstStyle/>
-          <a:p>
-            <a:pPr algn="ctr"/>
-            <a:endParaRPr/>
-          </a:p>
-        </p:txBody>
-      </p:sp>
-      <p:sp>
-        <p:nvSpPr>
-          <p:cNvPr id="14" name="TextBox 13">
-            <a:extLst>
-              <a:ext uri="{FF2B5EF4-FFF2-40B4-BE49-F238E27FC236}">
-                <a16:creationId xmlns:a16="http://schemas.microsoft.com/office/drawing/2014/main" id="{3363129E-F386-7E6A-80FE-D91ED50CABF8}"/>
-              </a:ext>
-            </a:extLst>
-          </p:cNvPr>
-          <p:cNvSpPr txBox="1"/>
-          <p:nvPr/>
-        </p:nvSpPr>
-        <p:spPr>
-          <a:xfrm>
-            <a:off x="3520440" y="3566160"/>
-            <a:ext cx="2377440" cy="292388"/>
-          </a:xfrm>
-          <a:prstGeom prst="rect">
-            <a:avLst/>
-          </a:prstGeom>
-          <a:noFill/>
-        </p:spPr>
-        <p:txBody>
-          <a:bodyPr wrap="square">
-            <a:spAutoFit/>
-          </a:bodyPr>
-          <a:lstStyle/>
-          <a:p>
-            <a:pPr algn="ctr">
-              <a:defRPr sz="1300" b="0" i="0">
-                <a:solidFill>
-                  <a:srgbClr val="595959"/>
-                </a:solidFill>
-              </a:defRPr>
-            </a:pPr>
-            <a:r>
-              <a:rPr lang="en-US" dirty="0"/>
-              <a:t>python main.py rebuild</a:t>
-            </a:r>
-          </a:p>
-        </p:txBody>
-      </p:sp>
-      <p:sp>
-        <p:nvSpPr>
-          <p:cNvPr id="15" name="Rounded Rectangle 14">
-            <a:extLst>
-              <a:ext uri="{FF2B5EF4-FFF2-40B4-BE49-F238E27FC236}">
-                <a16:creationId xmlns:a16="http://schemas.microsoft.com/office/drawing/2014/main" id="{F3D0D9D5-A8FC-6166-D563-C2444002545A}"/>
-              </a:ext>
-            </a:extLst>
-          </p:cNvPr>
-          <p:cNvSpPr/>
-          <p:nvPr/>
-        </p:nvSpPr>
-        <p:spPr>
-          <a:xfrm>
-            <a:off x="6309360" y="1554480"/>
-            <a:ext cx="2651760" cy="2842591"/>
-          </a:xfrm>
-          <a:prstGeom prst="roundRect">
-            <a:avLst/>
-          </a:prstGeom>
-          <a:solidFill>
-            <a:srgbClr val="FFFFFF"/>
-          </a:solidFill>
-          <a:ln>
-            <a:solidFill>
-              <a:srgbClr val="00B050"/>
-            </a:solidFill>
-          </a:ln>
-        </p:spPr>
-        <p:style>
-          <a:lnRef idx="1">
-            <a:schemeClr val="accent1"/>
-          </a:lnRef>
-          <a:fillRef idx="3">
-            <a:schemeClr val="accent1"/>
-          </a:fillRef>
-          <a:effectRef idx="2">
-            <a:schemeClr val="accent1"/>
-          </a:effectRef>
-          <a:fontRef idx="minor">
-            <a:schemeClr val="lt1"/>
-          </a:fontRef>
-        </p:style>
-        <p:txBody>
-          <a:bodyPr rtlCol="0" anchor="ctr"/>
-          <a:lstStyle/>
-          <a:p>
-            <a:pPr algn="ctr"/>
-            <a:endParaRPr/>
-          </a:p>
-        </p:txBody>
-      </p:sp>
-      <p:sp>
-        <p:nvSpPr>
-          <p:cNvPr id="16" name="TextBox 15">
-            <a:extLst>
-              <a:ext uri="{FF2B5EF4-FFF2-40B4-BE49-F238E27FC236}">
-                <a16:creationId xmlns:a16="http://schemas.microsoft.com/office/drawing/2014/main" id="{B7D479C1-BBEF-3B12-B986-4ED99093C142}"/>
-              </a:ext>
-            </a:extLst>
-          </p:cNvPr>
-          <p:cNvSpPr txBox="1"/>
-          <p:nvPr/>
-        </p:nvSpPr>
-        <p:spPr>
-          <a:xfrm>
-            <a:off x="7360920" y="1714500"/>
-            <a:ext cx="548640" cy="548640"/>
-          </a:xfrm>
-          <a:prstGeom prst="rect">
-            <a:avLst/>
-          </a:prstGeom>
-          <a:noFill/>
-        </p:spPr>
-        <p:txBody>
-          <a:bodyPr wrap="square">
-            <a:spAutoFit/>
-          </a:bodyPr>
-          <a:lstStyle/>
-          <a:p>
-            <a:pPr algn="ctr">
-              <a:defRPr sz="2800" b="1" i="0">
-                <a:solidFill>
-                  <a:srgbClr val="00B050"/>
-                </a:solidFill>
-              </a:defRPr>
-            </a:pPr>
-            <a:r>
-              <a:rPr dirty="0"/>
-              <a:t>3</a:t>
-            </a:r>
-          </a:p>
-        </p:txBody>
-      </p:sp>
-      <p:sp>
-        <p:nvSpPr>
-          <p:cNvPr id="17" name="TextBox 16">
-            <a:extLst>
-              <a:ext uri="{FF2B5EF4-FFF2-40B4-BE49-F238E27FC236}">
-                <a16:creationId xmlns:a16="http://schemas.microsoft.com/office/drawing/2014/main" id="{6BB6C036-FC6F-82B4-CA1F-0ACEB32F2E30}"/>
-              </a:ext>
-            </a:extLst>
-          </p:cNvPr>
-          <p:cNvSpPr txBox="1"/>
-          <p:nvPr/>
-        </p:nvSpPr>
-        <p:spPr>
-          <a:xfrm>
-            <a:off x="6400800" y="2331720"/>
-            <a:ext cx="2468880" cy="646331"/>
-          </a:xfrm>
-          <a:prstGeom prst="rect">
-            <a:avLst/>
-          </a:prstGeom>
-          <a:noFill/>
-        </p:spPr>
-        <p:txBody>
-          <a:bodyPr wrap="square">
-            <a:spAutoFit/>
-          </a:bodyPr>
-          <a:lstStyle/>
-          <a:p>
-            <a:pPr algn="ctr">
-              <a:defRPr sz="1800" b="1" i="0">
-                <a:solidFill>
-                  <a:srgbClr val="003366"/>
-                </a:solidFill>
-              </a:defRPr>
-            </a:pPr>
-            <a:r>
-              <a:rPr lang="vi-VN" dirty="0"/>
-              <a:t>DỄ</a:t>
-            </a:r>
-            <a:r>
-              <a:rPr dirty="0"/>
-              <a:t> </a:t>
-            </a:r>
-            <a:r>
-              <a:rPr lang="vi-VN" dirty="0"/>
-              <a:t>DÙ</a:t>
-            </a:r>
-            <a:r>
-              <a:rPr dirty="0"/>
-              <a:t>NG</a:t>
-            </a:r>
-            <a:br>
-              <a:rPr dirty="0"/>
-            </a:br>
-            <a:r>
-              <a:rPr dirty="0"/>
-              <a:t>CHO </a:t>
-            </a:r>
-            <a:r>
-              <a:rPr lang="vi-VN" dirty="0"/>
-              <a:t>MỌI</a:t>
-            </a:r>
-            <a:r>
-              <a:rPr dirty="0"/>
-              <a:t> </a:t>
-            </a:r>
-            <a:r>
-              <a:rPr lang="vi-VN" dirty="0"/>
-              <a:t>NGƯỜ</a:t>
-            </a:r>
-            <a:r>
-              <a:rPr dirty="0"/>
-              <a:t>I</a:t>
-            </a:r>
-          </a:p>
-        </p:txBody>
-      </p:sp>
-      <p:sp>
-        <p:nvSpPr>
-          <p:cNvPr id="18" name="Rectangle 17">
-            <a:extLst>
-              <a:ext uri="{FF2B5EF4-FFF2-40B4-BE49-F238E27FC236}">
-                <a16:creationId xmlns:a16="http://schemas.microsoft.com/office/drawing/2014/main" id="{20504D02-049D-AD23-6B83-4F656DD4D493}"/>
-              </a:ext>
-            </a:extLst>
-          </p:cNvPr>
-          <p:cNvSpPr/>
-          <p:nvPr/>
-        </p:nvSpPr>
-        <p:spPr>
-          <a:xfrm>
-            <a:off x="6675120" y="3429000"/>
-            <a:ext cx="1920240" cy="45720"/>
-          </a:xfrm>
-          <a:prstGeom prst="rect">
-            <a:avLst/>
-          </a:prstGeom>
-          <a:solidFill>
-            <a:srgbClr val="00B050"/>
-          </a:solidFill>
-          <a:ln>
-            <a:noFill/>
-          </a:ln>
-        </p:spPr>
-        <p:style>
-          <a:lnRef idx="1">
-            <a:schemeClr val="accent1"/>
-          </a:lnRef>
-          <a:fillRef idx="3">
-            <a:schemeClr val="accent1"/>
-          </a:fillRef>
-          <a:effectRef idx="2">
-            <a:schemeClr val="accent1"/>
-          </a:effectRef>
-          <a:fontRef idx="minor">
-            <a:schemeClr val="lt1"/>
-          </a:fontRef>
-        </p:style>
-        <p:txBody>
-          <a:bodyPr rtlCol="0" anchor="ctr"/>
-          <a:lstStyle/>
-          <a:p>
-            <a:pPr algn="ctr"/>
-            <a:endParaRPr/>
-          </a:p>
-        </p:txBody>
-      </p:sp>
-      <p:sp>
-        <p:nvSpPr>
-          <p:cNvPr id="19" name="TextBox 18">
-            <a:extLst>
-              <a:ext uri="{FF2B5EF4-FFF2-40B4-BE49-F238E27FC236}">
-                <a16:creationId xmlns:a16="http://schemas.microsoft.com/office/drawing/2014/main" id="{EC9DF6C4-B37B-14DF-13B3-EB175031D5E1}"/>
-              </a:ext>
-            </a:extLst>
-          </p:cNvPr>
-          <p:cNvSpPr txBox="1"/>
-          <p:nvPr/>
-        </p:nvSpPr>
-        <p:spPr>
-          <a:xfrm>
-            <a:off x="6446520" y="3566160"/>
-            <a:ext cx="2377440" cy="492443"/>
-          </a:xfrm>
-          <a:prstGeom prst="rect">
-            <a:avLst/>
-          </a:prstGeom>
-          <a:noFill/>
-        </p:spPr>
-        <p:txBody>
-          <a:bodyPr wrap="square">
-            <a:spAutoFit/>
-          </a:bodyPr>
-          <a:lstStyle/>
-          <a:p>
-            <a:pPr algn="ctr">
-              <a:defRPr sz="1300" b="0" i="0">
-                <a:solidFill>
-                  <a:srgbClr val="595959"/>
-                </a:solidFill>
-              </a:defRPr>
-            </a:pPr>
-            <a:r>
-              <a:rPr lang="en-US" dirty="0"/>
-              <a:t>python main.py run</a:t>
-            </a:r>
-          </a:p>
-          <a:p>
-            <a:pPr algn="ctr">
-              <a:defRPr sz="1300" b="0" i="0">
-                <a:solidFill>
-                  <a:srgbClr val="595959"/>
-                </a:solidFill>
-              </a:defRPr>
-            </a:pPr>
-            <a:endParaRPr dirty="0"/>
-          </a:p>
-        </p:txBody>
-      </p:sp>
-      <p:sp>
-        <p:nvSpPr>
-          <p:cNvPr id="21" name="TextBox 20">
-            <a:extLst>
-              <a:ext uri="{FF2B5EF4-FFF2-40B4-BE49-F238E27FC236}">
-                <a16:creationId xmlns:a16="http://schemas.microsoft.com/office/drawing/2014/main" id="{C0D20F97-D581-DB7A-CCE4-F69EA9764298}"/>
-              </a:ext>
-            </a:extLst>
-          </p:cNvPr>
-          <p:cNvSpPr txBox="1"/>
-          <p:nvPr/>
-        </p:nvSpPr>
-        <p:spPr>
-          <a:xfrm>
-            <a:off x="548640" y="942945"/>
-            <a:ext cx="4572000" cy="400110"/>
-          </a:xfrm>
-          <a:prstGeom prst="rect">
-            <a:avLst/>
-          </a:prstGeom>
-          <a:noFill/>
-        </p:spPr>
-        <p:txBody>
-          <a:bodyPr wrap="square">
-            <a:spAutoFit/>
-          </a:bodyPr>
-          <a:lstStyle/>
-          <a:p>
-            <a:pPr>
-              <a:defRPr sz="2800" b="1">
-                <a:solidFill>
-                  <a:srgbClr val="FFFFFF"/>
-                </a:solidFill>
-              </a:defRPr>
-            </a:pPr>
-            <a:r>
-              <a:rPr lang="en-US" sz="2000" dirty="0" err="1">
-                <a:solidFill>
-                  <a:schemeClr val="bg2">
-                    <a:lumMod val="50000"/>
-                  </a:schemeClr>
-                </a:solidFill>
-              </a:rPr>
-              <a:t>Cách</a:t>
-            </a:r>
-            <a:r>
-              <a:rPr lang="en-US" sz="2000" dirty="0">
-                <a:solidFill>
-                  <a:schemeClr val="bg2">
-                    <a:lumMod val="50000"/>
-                  </a:schemeClr>
-                </a:solidFill>
-              </a:rPr>
-              <a:t> </a:t>
-            </a:r>
-            <a:r>
-              <a:rPr lang="en-US" sz="2000" dirty="0" err="1">
-                <a:solidFill>
-                  <a:schemeClr val="bg2">
-                    <a:lumMod val="50000"/>
-                  </a:schemeClr>
-                </a:solidFill>
-              </a:rPr>
-              <a:t>chạy</a:t>
-            </a:r>
-            <a:r>
-              <a:rPr lang="en-US" sz="2000" dirty="0">
-                <a:solidFill>
-                  <a:schemeClr val="bg2">
-                    <a:lumMod val="50000"/>
-                  </a:schemeClr>
-                </a:solidFill>
-              </a:rPr>
-              <a:t> </a:t>
-            </a:r>
-            <a:r>
-              <a:rPr lang="en-US" sz="2000" dirty="0" err="1">
-                <a:solidFill>
-                  <a:schemeClr val="bg2">
-                    <a:lumMod val="50000"/>
-                  </a:schemeClr>
-                </a:solidFill>
-              </a:rPr>
-              <a:t>hệ</a:t>
-            </a:r>
-            <a:r>
-              <a:rPr lang="en-US" sz="2000" dirty="0">
-                <a:solidFill>
-                  <a:schemeClr val="bg2">
-                    <a:lumMod val="50000"/>
-                  </a:schemeClr>
-                </a:solidFill>
-              </a:rPr>
-              <a:t> </a:t>
-            </a:r>
-            <a:r>
-              <a:rPr lang="en-US" sz="2000" dirty="0" err="1">
-                <a:solidFill>
-                  <a:schemeClr val="bg2">
-                    <a:lumMod val="50000"/>
-                  </a:schemeClr>
-                </a:solidFill>
-              </a:rPr>
-              <a:t>thống</a:t>
-            </a:r>
-            <a:r>
-              <a:rPr lang="en-US" sz="2000" dirty="0">
-                <a:solidFill>
-                  <a:schemeClr val="bg2">
-                    <a:lumMod val="50000"/>
-                  </a:schemeClr>
-                </a:solidFill>
-              </a:rPr>
-              <a:t> (Demo)</a:t>
-            </a:r>
-          </a:p>
-        </p:txBody>
-      </p:sp>
-      <p:sp>
-        <p:nvSpPr>
-          <p:cNvPr id="22" name="TextBox 21">
-            <a:extLst>
-              <a:ext uri="{FF2B5EF4-FFF2-40B4-BE49-F238E27FC236}">
-                <a16:creationId xmlns:a16="http://schemas.microsoft.com/office/drawing/2014/main" id="{4FB37DD4-2AC1-FC65-EB6E-FE77A42DE292}"/>
-              </a:ext>
-            </a:extLst>
-          </p:cNvPr>
-          <p:cNvSpPr txBox="1"/>
-          <p:nvPr/>
-        </p:nvSpPr>
-        <p:spPr>
-          <a:xfrm>
-            <a:off x="1238415" y="4714726"/>
-            <a:ext cx="7764449" cy="1200329"/>
-          </a:xfrm>
-          <a:prstGeom prst="rect">
-            <a:avLst/>
-          </a:prstGeom>
-          <a:noFill/>
-        </p:spPr>
-        <p:txBody>
-          <a:bodyPr wrap="square">
-            <a:spAutoFit/>
-          </a:bodyPr>
-          <a:lstStyle/>
-          <a:p>
-            <a:pPr>
-              <a:defRPr sz="1300" i="1">
-                <a:solidFill>
-                  <a:srgbClr val="7F8C8D"/>
-                </a:solidFill>
-              </a:defRPr>
-            </a:pPr>
-            <a:r>
-              <a:rPr lang="en-US" sz="1800" dirty="0"/>
-              <a:t>Sau </a:t>
-            </a:r>
-            <a:r>
-              <a:rPr lang="en-US" sz="1800" dirty="0" err="1"/>
-              <a:t>khi</a:t>
-            </a:r>
-            <a:r>
-              <a:rPr lang="en-US" sz="1800" dirty="0"/>
-              <a:t> </a:t>
-            </a:r>
-            <a:r>
-              <a:rPr lang="en-US" sz="1800" dirty="0" err="1"/>
-              <a:t>chạy</a:t>
-            </a:r>
-            <a:r>
-              <a:rPr lang="en-US" sz="1800" dirty="0"/>
-              <a:t>, </a:t>
-            </a:r>
-            <a:r>
-              <a:rPr lang="en-US" sz="1800" dirty="0" err="1"/>
-              <a:t>hệ</a:t>
-            </a:r>
-            <a:r>
-              <a:rPr lang="en-US" sz="1800" dirty="0"/>
-              <a:t> </a:t>
-            </a:r>
-            <a:r>
-              <a:rPr lang="en-US" sz="1800" dirty="0" err="1"/>
-              <a:t>thống</a:t>
-            </a:r>
-            <a:r>
-              <a:rPr lang="en-US" sz="1800" dirty="0"/>
-              <a:t> </a:t>
-            </a:r>
-            <a:r>
-              <a:rPr lang="en-US" sz="1800" dirty="0" err="1"/>
-              <a:t>sẽ</a:t>
-            </a:r>
-            <a:r>
-              <a:rPr lang="en-US" sz="1800" dirty="0"/>
-              <a:t> </a:t>
-            </a:r>
-            <a:r>
-              <a:rPr lang="en-US" sz="1800" dirty="0" err="1"/>
-              <a:t>mở</a:t>
-            </a:r>
-            <a:r>
-              <a:rPr lang="en-US" sz="1800" dirty="0"/>
-              <a:t> </a:t>
-            </a:r>
-            <a:r>
-              <a:rPr lang="en-US" sz="1800" dirty="0" err="1"/>
-              <a:t>trình</a:t>
-            </a:r>
-            <a:r>
-              <a:rPr lang="en-US" sz="1800" dirty="0"/>
-              <a:t> </a:t>
-            </a:r>
-            <a:r>
-              <a:rPr lang="en-US" sz="1800" dirty="0" err="1"/>
-              <a:t>duyệt</a:t>
-            </a:r>
-            <a:r>
-              <a:rPr lang="en-US" sz="1800" dirty="0"/>
-              <a:t> web </a:t>
-            </a:r>
-            <a:r>
-              <a:rPr lang="en-US" sz="1800" dirty="0" err="1"/>
-              <a:t>tự</a:t>
-            </a:r>
-            <a:r>
-              <a:rPr lang="en-US" sz="1800" dirty="0"/>
-              <a:t> </a:t>
-            </a:r>
-            <a:r>
-              <a:rPr lang="en-US" sz="1800" dirty="0" err="1"/>
-              <a:t>động</a:t>
-            </a:r>
-            <a:endParaRPr lang="en-US" sz="1800" dirty="0"/>
-          </a:p>
-          <a:p>
-            <a:pPr>
-              <a:defRPr sz="1300" i="1">
-                <a:solidFill>
-                  <a:srgbClr val="7F8C8D"/>
-                </a:solidFill>
-              </a:defRPr>
-            </a:pPr>
-            <a:r>
-              <a:rPr lang="en-US" sz="1800" dirty="0" err="1"/>
-              <a:t>Truy</a:t>
-            </a:r>
-            <a:r>
-              <a:rPr lang="en-US" sz="1800" dirty="0"/>
-              <a:t> </a:t>
-            </a:r>
-            <a:r>
-              <a:rPr lang="en-US" sz="1800" dirty="0" err="1"/>
-              <a:t>cập</a:t>
-            </a:r>
-            <a:r>
-              <a:rPr lang="en-US" sz="1800" dirty="0"/>
-              <a:t> </a:t>
-            </a:r>
-            <a:r>
-              <a:rPr lang="en-US" sz="1800" dirty="0" err="1"/>
-              <a:t>tại</a:t>
-            </a:r>
-            <a:r>
-              <a:rPr lang="en-US" sz="1800" dirty="0"/>
-              <a:t>: http://localhost:8501</a:t>
-            </a:r>
-          </a:p>
-          <a:p>
-            <a:pPr>
-              <a:defRPr sz="1300" i="1">
-                <a:solidFill>
-                  <a:srgbClr val="7F8C8D"/>
-                </a:solidFill>
-              </a:defRPr>
-            </a:pPr>
-            <a:r>
-              <a:rPr lang="vi-VN" sz="1800" dirty="0"/>
-              <a:t>Lưu ý: Cần cài đặt Python và các thư viện trước (xem README.md)</a:t>
-            </a:r>
-          </a:p>
-          <a:p>
-            <a:pPr>
-              <a:defRPr sz="1300" i="1">
-                <a:solidFill>
-                  <a:srgbClr val="7F8C8D"/>
-                </a:solidFill>
-              </a:defRPr>
-            </a:pPr>
-            <a:endParaRPr sz="1800" dirty="0"/>
-          </a:p>
-        </p:txBody>
-      </p:sp>
-    </p:spTree>
-    <p:extLst>
-      <p:ext uri="{BB962C8B-B14F-4D97-AF65-F5344CB8AC3E}">
-        <p14:creationId xmlns:p14="http://schemas.microsoft.com/office/powerpoint/2010/main" val="2608871639"/>
-      </p:ext>
-    </p:extLst>
-  </p:cSld>
-  <p:clrMapOvr>
-    <a:masterClrMapping/>
-  </p:clrMapOvr>
-</p:sld>
-</file>
-
 <file path=ppt/slides/slide25.xml><?xml version="1.0" encoding="utf-8"?>
 <p:sld xmlns:a="http://schemas.openxmlformats.org/drawingml/2006/main" xmlns:r="http://schemas.openxmlformats.org/officeDocument/2006/relationships" xmlns:p="http://schemas.openxmlformats.org/presentationml/2006/main">
   <p:cSld>
@@ -20567,6 +21130,1221 @@
           <p:cNvPr id="2" name="Title 1">
             <a:extLst>
               <a:ext uri="{FF2B5EF4-FFF2-40B4-BE49-F238E27FC236}">
+                <a16:creationId xmlns:a16="http://schemas.microsoft.com/office/drawing/2014/main" id="{B741449E-0A06-8D67-AB8E-5570492931C8}"/>
+              </a:ext>
+            </a:extLst>
+          </p:cNvPr>
+          <p:cNvSpPr>
+            <a:spLocks noGrp="1"/>
+          </p:cNvSpPr>
+          <p:nvPr>
+            <p:ph type="title"/>
+          </p:nvPr>
+        </p:nvSpPr>
+        <p:spPr/>
+        <p:txBody>
+          <a:bodyPr/>
+          <a:lstStyle/>
+          <a:p>
+            <a:r>
+              <a:rPr lang="vi-VN" dirty="0"/>
+              <a:t>Demo hệ thống</a:t>
+            </a:r>
+            <a:endParaRPr lang="en-US" dirty="0"/>
+          </a:p>
+        </p:txBody>
+      </p:sp>
+      <p:sp>
+        <p:nvSpPr>
+          <p:cNvPr id="5" name="Rounded Rectangle 4">
+            <a:extLst>
+              <a:ext uri="{FF2B5EF4-FFF2-40B4-BE49-F238E27FC236}">
+                <a16:creationId xmlns:a16="http://schemas.microsoft.com/office/drawing/2014/main" id="{545DA118-89DF-0BCD-3EBB-F63B1AB23A78}"/>
+              </a:ext>
+            </a:extLst>
+          </p:cNvPr>
+          <p:cNvSpPr/>
+          <p:nvPr/>
+        </p:nvSpPr>
+        <p:spPr>
+          <a:xfrm>
+            <a:off x="457200" y="1554480"/>
+            <a:ext cx="2651760" cy="2842591"/>
+          </a:xfrm>
+          <a:prstGeom prst="roundRect">
+            <a:avLst/>
+          </a:prstGeom>
+          <a:solidFill>
+            <a:srgbClr val="FFFFFF"/>
+          </a:solidFill>
+          <a:ln>
+            <a:solidFill>
+              <a:srgbClr val="0070C0"/>
+            </a:solidFill>
+          </a:ln>
+        </p:spPr>
+        <p:style>
+          <a:lnRef idx="1">
+            <a:schemeClr val="accent1"/>
+          </a:lnRef>
+          <a:fillRef idx="3">
+            <a:schemeClr val="accent1"/>
+          </a:fillRef>
+          <a:effectRef idx="2">
+            <a:schemeClr val="accent1"/>
+          </a:effectRef>
+          <a:fontRef idx="minor">
+            <a:schemeClr val="lt1"/>
+          </a:fontRef>
+        </p:style>
+        <p:txBody>
+          <a:bodyPr rtlCol="0" anchor="ctr"/>
+          <a:lstStyle/>
+          <a:p>
+            <a:pPr algn="ctr"/>
+            <a:endParaRPr/>
+          </a:p>
+        </p:txBody>
+      </p:sp>
+      <p:sp>
+        <p:nvSpPr>
+          <p:cNvPr id="6" name="TextBox 5">
+            <a:extLst>
+              <a:ext uri="{FF2B5EF4-FFF2-40B4-BE49-F238E27FC236}">
+                <a16:creationId xmlns:a16="http://schemas.microsoft.com/office/drawing/2014/main" id="{18E4FA88-B769-98E6-C834-11F36B9C4A1B}"/>
+              </a:ext>
+            </a:extLst>
+          </p:cNvPr>
+          <p:cNvSpPr txBox="1"/>
+          <p:nvPr/>
+        </p:nvSpPr>
+        <p:spPr>
+          <a:xfrm>
+            <a:off x="1508760" y="1691640"/>
+            <a:ext cx="548640" cy="548640"/>
+          </a:xfrm>
+          <a:prstGeom prst="rect">
+            <a:avLst/>
+          </a:prstGeom>
+          <a:noFill/>
+        </p:spPr>
+        <p:txBody>
+          <a:bodyPr wrap="square">
+            <a:spAutoFit/>
+          </a:bodyPr>
+          <a:lstStyle/>
+          <a:p>
+            <a:pPr algn="ctr">
+              <a:defRPr sz="2800" b="1" i="0">
+                <a:solidFill>
+                  <a:srgbClr val="0070C0"/>
+                </a:solidFill>
+              </a:defRPr>
+            </a:pPr>
+            <a:r>
+              <a:t>1</a:t>
+            </a:r>
+          </a:p>
+        </p:txBody>
+      </p:sp>
+      <p:sp>
+        <p:nvSpPr>
+          <p:cNvPr id="7" name="TextBox 6">
+            <a:extLst>
+              <a:ext uri="{FF2B5EF4-FFF2-40B4-BE49-F238E27FC236}">
+                <a16:creationId xmlns:a16="http://schemas.microsoft.com/office/drawing/2014/main" id="{3DB575AC-B417-B846-0F23-6DA6F2710E8C}"/>
+              </a:ext>
+            </a:extLst>
+          </p:cNvPr>
+          <p:cNvSpPr txBox="1"/>
+          <p:nvPr/>
+        </p:nvSpPr>
+        <p:spPr>
+          <a:xfrm>
+            <a:off x="548640" y="2331720"/>
+            <a:ext cx="2468880" cy="646331"/>
+          </a:xfrm>
+          <a:prstGeom prst="rect">
+            <a:avLst/>
+          </a:prstGeom>
+          <a:noFill/>
+        </p:spPr>
+        <p:txBody>
+          <a:bodyPr wrap="square">
+            <a:spAutoFit/>
+          </a:bodyPr>
+          <a:lstStyle/>
+          <a:p>
+            <a:pPr algn="ctr">
+              <a:defRPr sz="1800" b="1" i="0">
+                <a:solidFill>
+                  <a:srgbClr val="003366"/>
+                </a:solidFill>
+              </a:defRPr>
+            </a:pPr>
+            <a:r>
+              <a:rPr lang="en-US" dirty="0" err="1"/>
+              <a:t>Chạy</a:t>
+            </a:r>
+            <a:r>
+              <a:rPr lang="en-US" dirty="0"/>
+              <a:t> </a:t>
+            </a:r>
+            <a:r>
+              <a:rPr lang="en-US" dirty="0" err="1"/>
+              <a:t>nhanh</a:t>
+            </a:r>
+            <a:r>
+              <a:rPr lang="en-US" dirty="0"/>
+              <a:t> (</a:t>
+            </a:r>
+            <a:r>
+              <a:rPr lang="en-US" dirty="0" err="1"/>
+              <a:t>đã</a:t>
+            </a:r>
+            <a:r>
+              <a:rPr lang="en-US" dirty="0"/>
+              <a:t> </a:t>
+            </a:r>
+            <a:r>
+              <a:rPr lang="en-US" dirty="0" err="1"/>
+              <a:t>có</a:t>
+            </a:r>
+            <a:r>
+              <a:rPr lang="en-US" dirty="0"/>
+              <a:t> </a:t>
+            </a:r>
+            <a:r>
+              <a:rPr lang="en-US" dirty="0" err="1"/>
+              <a:t>dữ</a:t>
+            </a:r>
+            <a:r>
+              <a:rPr lang="en-US" dirty="0"/>
+              <a:t> </a:t>
+            </a:r>
+            <a:r>
+              <a:rPr lang="en-US" dirty="0" err="1"/>
+              <a:t>liệu</a:t>
+            </a:r>
+            <a:r>
+              <a:rPr lang="en-US" dirty="0"/>
+              <a:t>)</a:t>
+            </a:r>
+          </a:p>
+        </p:txBody>
+      </p:sp>
+      <p:sp>
+        <p:nvSpPr>
+          <p:cNvPr id="8" name="Rectangle 7">
+            <a:extLst>
+              <a:ext uri="{FF2B5EF4-FFF2-40B4-BE49-F238E27FC236}">
+                <a16:creationId xmlns:a16="http://schemas.microsoft.com/office/drawing/2014/main" id="{C6E30B52-F79A-D821-A4BA-54972A89E633}"/>
+              </a:ext>
+            </a:extLst>
+          </p:cNvPr>
+          <p:cNvSpPr/>
+          <p:nvPr/>
+        </p:nvSpPr>
+        <p:spPr>
+          <a:xfrm>
+            <a:off x="822960" y="3429000"/>
+            <a:ext cx="1920240" cy="45720"/>
+          </a:xfrm>
+          <a:prstGeom prst="rect">
+            <a:avLst/>
+          </a:prstGeom>
+          <a:solidFill>
+            <a:srgbClr val="0070C0"/>
+          </a:solidFill>
+          <a:ln>
+            <a:noFill/>
+          </a:ln>
+        </p:spPr>
+        <p:style>
+          <a:lnRef idx="1">
+            <a:schemeClr val="accent1"/>
+          </a:lnRef>
+          <a:fillRef idx="3">
+            <a:schemeClr val="accent1"/>
+          </a:fillRef>
+          <a:effectRef idx="2">
+            <a:schemeClr val="accent1"/>
+          </a:effectRef>
+          <a:fontRef idx="minor">
+            <a:schemeClr val="lt1"/>
+          </a:fontRef>
+        </p:style>
+        <p:txBody>
+          <a:bodyPr rtlCol="0" anchor="ctr"/>
+          <a:lstStyle/>
+          <a:p>
+            <a:pPr algn="ctr"/>
+            <a:endParaRPr/>
+          </a:p>
+        </p:txBody>
+      </p:sp>
+      <p:sp>
+        <p:nvSpPr>
+          <p:cNvPr id="9" name="TextBox 8">
+            <a:extLst>
+              <a:ext uri="{FF2B5EF4-FFF2-40B4-BE49-F238E27FC236}">
+                <a16:creationId xmlns:a16="http://schemas.microsoft.com/office/drawing/2014/main" id="{B679F5A7-3909-CDCD-2BCA-EAB279BE530D}"/>
+              </a:ext>
+            </a:extLst>
+          </p:cNvPr>
+          <p:cNvSpPr txBox="1"/>
+          <p:nvPr/>
+        </p:nvSpPr>
+        <p:spPr>
+          <a:xfrm>
+            <a:off x="594360" y="3566160"/>
+            <a:ext cx="2377440" cy="492443"/>
+          </a:xfrm>
+          <a:prstGeom prst="rect">
+            <a:avLst/>
+          </a:prstGeom>
+          <a:noFill/>
+        </p:spPr>
+        <p:txBody>
+          <a:bodyPr wrap="square">
+            <a:spAutoFit/>
+          </a:bodyPr>
+          <a:lstStyle/>
+          <a:p>
+            <a:pPr algn="ctr">
+              <a:defRPr sz="1300" b="0" i="0">
+                <a:solidFill>
+                  <a:srgbClr val="595959"/>
+                </a:solidFill>
+              </a:defRPr>
+            </a:pPr>
+            <a:r>
+              <a:rPr lang="en-US" dirty="0"/>
+              <a:t>python main.py serve</a:t>
+            </a:r>
+          </a:p>
+          <a:p>
+            <a:pPr algn="ctr">
+              <a:defRPr sz="1300" b="0" i="0">
+                <a:solidFill>
+                  <a:srgbClr val="595959"/>
+                </a:solidFill>
+              </a:defRPr>
+            </a:pPr>
+            <a:endParaRPr dirty="0"/>
+          </a:p>
+        </p:txBody>
+      </p:sp>
+      <p:sp>
+        <p:nvSpPr>
+          <p:cNvPr id="10" name="Rounded Rectangle 9">
+            <a:extLst>
+              <a:ext uri="{FF2B5EF4-FFF2-40B4-BE49-F238E27FC236}">
+                <a16:creationId xmlns:a16="http://schemas.microsoft.com/office/drawing/2014/main" id="{38227251-ECDC-D857-9303-B8BFD487396F}"/>
+              </a:ext>
+            </a:extLst>
+          </p:cNvPr>
+          <p:cNvSpPr/>
+          <p:nvPr/>
+        </p:nvSpPr>
+        <p:spPr>
+          <a:xfrm>
+            <a:off x="3383280" y="1554480"/>
+            <a:ext cx="2651760" cy="2842591"/>
+          </a:xfrm>
+          <a:prstGeom prst="roundRect">
+            <a:avLst/>
+          </a:prstGeom>
+          <a:solidFill>
+            <a:srgbClr val="FFFFFF"/>
+          </a:solidFill>
+          <a:ln>
+            <a:solidFill>
+              <a:srgbClr val="FF9900"/>
+            </a:solidFill>
+          </a:ln>
+        </p:spPr>
+        <p:style>
+          <a:lnRef idx="1">
+            <a:schemeClr val="accent1"/>
+          </a:lnRef>
+          <a:fillRef idx="3">
+            <a:schemeClr val="accent1"/>
+          </a:fillRef>
+          <a:effectRef idx="2">
+            <a:schemeClr val="accent1"/>
+          </a:effectRef>
+          <a:fontRef idx="minor">
+            <a:schemeClr val="lt1"/>
+          </a:fontRef>
+        </p:style>
+        <p:txBody>
+          <a:bodyPr rtlCol="0" anchor="ctr"/>
+          <a:lstStyle/>
+          <a:p>
+            <a:pPr algn="ctr"/>
+            <a:endParaRPr/>
+          </a:p>
+        </p:txBody>
+      </p:sp>
+      <p:sp>
+        <p:nvSpPr>
+          <p:cNvPr id="11" name="TextBox 10">
+            <a:extLst>
+              <a:ext uri="{FF2B5EF4-FFF2-40B4-BE49-F238E27FC236}">
+                <a16:creationId xmlns:a16="http://schemas.microsoft.com/office/drawing/2014/main" id="{183BC1F1-0254-9568-AE59-999F51A2606F}"/>
+              </a:ext>
+            </a:extLst>
+          </p:cNvPr>
+          <p:cNvSpPr txBox="1"/>
+          <p:nvPr/>
+        </p:nvSpPr>
+        <p:spPr>
+          <a:xfrm>
+            <a:off x="4434840" y="1783080"/>
+            <a:ext cx="548640" cy="548640"/>
+          </a:xfrm>
+          <a:prstGeom prst="rect">
+            <a:avLst/>
+          </a:prstGeom>
+          <a:noFill/>
+        </p:spPr>
+        <p:txBody>
+          <a:bodyPr wrap="square">
+            <a:spAutoFit/>
+          </a:bodyPr>
+          <a:lstStyle/>
+          <a:p>
+            <a:pPr algn="ctr">
+              <a:defRPr sz="2800" b="1" i="0">
+                <a:solidFill>
+                  <a:srgbClr val="FF9900"/>
+                </a:solidFill>
+              </a:defRPr>
+            </a:pPr>
+            <a:r>
+              <a:rPr dirty="0"/>
+              <a:t>2</a:t>
+            </a:r>
+          </a:p>
+        </p:txBody>
+      </p:sp>
+      <p:sp>
+        <p:nvSpPr>
+          <p:cNvPr id="12" name="TextBox 11">
+            <a:extLst>
+              <a:ext uri="{FF2B5EF4-FFF2-40B4-BE49-F238E27FC236}">
+                <a16:creationId xmlns:a16="http://schemas.microsoft.com/office/drawing/2014/main" id="{B627FEA8-0A11-2746-0A62-74DF66ADB83F}"/>
+              </a:ext>
+            </a:extLst>
+          </p:cNvPr>
+          <p:cNvSpPr txBox="1"/>
+          <p:nvPr/>
+        </p:nvSpPr>
+        <p:spPr>
+          <a:xfrm>
+            <a:off x="3474720" y="2331720"/>
+            <a:ext cx="2468880" cy="923330"/>
+          </a:xfrm>
+          <a:prstGeom prst="rect">
+            <a:avLst/>
+          </a:prstGeom>
+          <a:noFill/>
+        </p:spPr>
+        <p:txBody>
+          <a:bodyPr wrap="square">
+            <a:spAutoFit/>
+          </a:bodyPr>
+          <a:lstStyle/>
+          <a:p>
+            <a:pPr algn="ctr">
+              <a:defRPr sz="1800" b="1" i="0">
+                <a:solidFill>
+                  <a:srgbClr val="003366"/>
+                </a:solidFill>
+              </a:defRPr>
+            </a:pPr>
+            <a:r>
+              <a:rPr lang="en-US" dirty="0"/>
+              <a:t>Rebuild </a:t>
+            </a:r>
+            <a:r>
+              <a:rPr lang="en-US" dirty="0" err="1"/>
+              <a:t>toàn</a:t>
+            </a:r>
+            <a:r>
+              <a:rPr lang="en-US" dirty="0"/>
+              <a:t> </a:t>
+            </a:r>
+            <a:r>
+              <a:rPr lang="en-US" dirty="0" err="1"/>
+              <a:t>bộ</a:t>
+            </a:r>
+            <a:r>
+              <a:rPr lang="en-US" dirty="0"/>
+              <a:t> (</a:t>
+            </a:r>
+            <a:r>
+              <a:rPr lang="en-US" dirty="0" err="1"/>
+              <a:t>lần</a:t>
+            </a:r>
+            <a:r>
+              <a:rPr lang="en-US" dirty="0"/>
+              <a:t> </a:t>
+            </a:r>
+            <a:r>
+              <a:rPr lang="en-US" dirty="0" err="1"/>
+              <a:t>đầu</a:t>
+            </a:r>
+            <a:r>
+              <a:rPr lang="en-US" dirty="0"/>
+              <a:t> </a:t>
+            </a:r>
+            <a:r>
+              <a:rPr lang="en-US" dirty="0" err="1"/>
+              <a:t>hoặc</a:t>
+            </a:r>
+            <a:r>
+              <a:rPr lang="en-US" dirty="0"/>
+              <a:t> </a:t>
+            </a:r>
+            <a:r>
+              <a:rPr lang="en-US" dirty="0" err="1"/>
+              <a:t>khi</a:t>
+            </a:r>
+            <a:r>
+              <a:rPr lang="en-US" dirty="0"/>
+              <a:t> </a:t>
+            </a:r>
+            <a:r>
+              <a:rPr lang="en-US" dirty="0" err="1"/>
+              <a:t>cập</a:t>
+            </a:r>
+            <a:r>
+              <a:rPr lang="en-US" dirty="0"/>
+              <a:t> </a:t>
+            </a:r>
+            <a:r>
+              <a:rPr lang="en-US" dirty="0" err="1"/>
+              <a:t>nhật</a:t>
+            </a:r>
+            <a:r>
+              <a:rPr lang="en-US" dirty="0"/>
+              <a:t> </a:t>
+            </a:r>
+            <a:r>
+              <a:rPr lang="en-US" dirty="0" err="1"/>
+              <a:t>dữ</a:t>
+            </a:r>
+            <a:r>
+              <a:rPr lang="en-US" dirty="0"/>
+              <a:t> </a:t>
+            </a:r>
+            <a:r>
+              <a:rPr lang="en-US" dirty="0" err="1"/>
+              <a:t>liệu</a:t>
+            </a:r>
+            <a:r>
+              <a:rPr lang="en-US" dirty="0"/>
+              <a:t>)</a:t>
+            </a:r>
+            <a:endParaRPr dirty="0"/>
+          </a:p>
+        </p:txBody>
+      </p:sp>
+      <p:sp>
+        <p:nvSpPr>
+          <p:cNvPr id="13" name="Rectangle 12">
+            <a:extLst>
+              <a:ext uri="{FF2B5EF4-FFF2-40B4-BE49-F238E27FC236}">
+                <a16:creationId xmlns:a16="http://schemas.microsoft.com/office/drawing/2014/main" id="{3C49CC69-6E99-7F6B-0EDE-DB11E9B00D9E}"/>
+              </a:ext>
+            </a:extLst>
+          </p:cNvPr>
+          <p:cNvSpPr/>
+          <p:nvPr/>
+        </p:nvSpPr>
+        <p:spPr>
+          <a:xfrm>
+            <a:off x="3749040" y="3429000"/>
+            <a:ext cx="1920240" cy="45720"/>
+          </a:xfrm>
+          <a:prstGeom prst="rect">
+            <a:avLst/>
+          </a:prstGeom>
+          <a:solidFill>
+            <a:srgbClr val="FF9900"/>
+          </a:solidFill>
+          <a:ln>
+            <a:noFill/>
+          </a:ln>
+        </p:spPr>
+        <p:style>
+          <a:lnRef idx="1">
+            <a:schemeClr val="accent1"/>
+          </a:lnRef>
+          <a:fillRef idx="3">
+            <a:schemeClr val="accent1"/>
+          </a:fillRef>
+          <a:effectRef idx="2">
+            <a:schemeClr val="accent1"/>
+          </a:effectRef>
+          <a:fontRef idx="minor">
+            <a:schemeClr val="lt1"/>
+          </a:fontRef>
+        </p:style>
+        <p:txBody>
+          <a:bodyPr rtlCol="0" anchor="ctr"/>
+          <a:lstStyle/>
+          <a:p>
+            <a:pPr algn="ctr"/>
+            <a:endParaRPr/>
+          </a:p>
+        </p:txBody>
+      </p:sp>
+      <p:sp>
+        <p:nvSpPr>
+          <p:cNvPr id="14" name="TextBox 13">
+            <a:extLst>
+              <a:ext uri="{FF2B5EF4-FFF2-40B4-BE49-F238E27FC236}">
+                <a16:creationId xmlns:a16="http://schemas.microsoft.com/office/drawing/2014/main" id="{3363129E-F386-7E6A-80FE-D91ED50CABF8}"/>
+              </a:ext>
+            </a:extLst>
+          </p:cNvPr>
+          <p:cNvSpPr txBox="1"/>
+          <p:nvPr/>
+        </p:nvSpPr>
+        <p:spPr>
+          <a:xfrm>
+            <a:off x="3520440" y="3566160"/>
+            <a:ext cx="2377440" cy="292388"/>
+          </a:xfrm>
+          <a:prstGeom prst="rect">
+            <a:avLst/>
+          </a:prstGeom>
+          <a:noFill/>
+        </p:spPr>
+        <p:txBody>
+          <a:bodyPr wrap="square">
+            <a:spAutoFit/>
+          </a:bodyPr>
+          <a:lstStyle/>
+          <a:p>
+            <a:pPr algn="ctr">
+              <a:defRPr sz="1300" b="0" i="0">
+                <a:solidFill>
+                  <a:srgbClr val="595959"/>
+                </a:solidFill>
+              </a:defRPr>
+            </a:pPr>
+            <a:r>
+              <a:rPr lang="en-US" dirty="0"/>
+              <a:t>python main.py rebuild</a:t>
+            </a:r>
+          </a:p>
+        </p:txBody>
+      </p:sp>
+      <p:sp>
+        <p:nvSpPr>
+          <p:cNvPr id="15" name="Rounded Rectangle 14">
+            <a:extLst>
+              <a:ext uri="{FF2B5EF4-FFF2-40B4-BE49-F238E27FC236}">
+                <a16:creationId xmlns:a16="http://schemas.microsoft.com/office/drawing/2014/main" id="{F3D0D9D5-A8FC-6166-D563-C2444002545A}"/>
+              </a:ext>
+            </a:extLst>
+          </p:cNvPr>
+          <p:cNvSpPr/>
+          <p:nvPr/>
+        </p:nvSpPr>
+        <p:spPr>
+          <a:xfrm>
+            <a:off x="6309360" y="1554480"/>
+            <a:ext cx="2651760" cy="2842591"/>
+          </a:xfrm>
+          <a:prstGeom prst="roundRect">
+            <a:avLst/>
+          </a:prstGeom>
+          <a:solidFill>
+            <a:srgbClr val="FFFFFF"/>
+          </a:solidFill>
+          <a:ln>
+            <a:solidFill>
+              <a:srgbClr val="00B050"/>
+            </a:solidFill>
+          </a:ln>
+        </p:spPr>
+        <p:style>
+          <a:lnRef idx="1">
+            <a:schemeClr val="accent1"/>
+          </a:lnRef>
+          <a:fillRef idx="3">
+            <a:schemeClr val="accent1"/>
+          </a:fillRef>
+          <a:effectRef idx="2">
+            <a:schemeClr val="accent1"/>
+          </a:effectRef>
+          <a:fontRef idx="minor">
+            <a:schemeClr val="lt1"/>
+          </a:fontRef>
+        </p:style>
+        <p:txBody>
+          <a:bodyPr rtlCol="0" anchor="ctr"/>
+          <a:lstStyle/>
+          <a:p>
+            <a:pPr algn="ctr"/>
+            <a:endParaRPr/>
+          </a:p>
+        </p:txBody>
+      </p:sp>
+      <p:sp>
+        <p:nvSpPr>
+          <p:cNvPr id="16" name="TextBox 15">
+            <a:extLst>
+              <a:ext uri="{FF2B5EF4-FFF2-40B4-BE49-F238E27FC236}">
+                <a16:creationId xmlns:a16="http://schemas.microsoft.com/office/drawing/2014/main" id="{B7D479C1-BBEF-3B12-B986-4ED99093C142}"/>
+              </a:ext>
+            </a:extLst>
+          </p:cNvPr>
+          <p:cNvSpPr txBox="1"/>
+          <p:nvPr/>
+        </p:nvSpPr>
+        <p:spPr>
+          <a:xfrm>
+            <a:off x="7360920" y="1714500"/>
+            <a:ext cx="548640" cy="548640"/>
+          </a:xfrm>
+          <a:prstGeom prst="rect">
+            <a:avLst/>
+          </a:prstGeom>
+          <a:noFill/>
+        </p:spPr>
+        <p:txBody>
+          <a:bodyPr wrap="square">
+            <a:spAutoFit/>
+          </a:bodyPr>
+          <a:lstStyle/>
+          <a:p>
+            <a:pPr algn="ctr">
+              <a:defRPr sz="2800" b="1" i="0">
+                <a:solidFill>
+                  <a:srgbClr val="00B050"/>
+                </a:solidFill>
+              </a:defRPr>
+            </a:pPr>
+            <a:r>
+              <a:rPr dirty="0"/>
+              <a:t>3</a:t>
+            </a:r>
+          </a:p>
+        </p:txBody>
+      </p:sp>
+      <p:sp>
+        <p:nvSpPr>
+          <p:cNvPr id="17" name="TextBox 16">
+            <a:extLst>
+              <a:ext uri="{FF2B5EF4-FFF2-40B4-BE49-F238E27FC236}">
+                <a16:creationId xmlns:a16="http://schemas.microsoft.com/office/drawing/2014/main" id="{6BB6C036-FC6F-82B4-CA1F-0ACEB32F2E30}"/>
+              </a:ext>
+            </a:extLst>
+          </p:cNvPr>
+          <p:cNvSpPr txBox="1"/>
+          <p:nvPr/>
+        </p:nvSpPr>
+        <p:spPr>
+          <a:xfrm>
+            <a:off x="6400800" y="2331720"/>
+            <a:ext cx="2468880" cy="646331"/>
+          </a:xfrm>
+          <a:prstGeom prst="rect">
+            <a:avLst/>
+          </a:prstGeom>
+          <a:noFill/>
+        </p:spPr>
+        <p:txBody>
+          <a:bodyPr wrap="square">
+            <a:spAutoFit/>
+          </a:bodyPr>
+          <a:lstStyle/>
+          <a:p>
+            <a:pPr algn="ctr">
+              <a:defRPr sz="1800" b="1" i="0">
+                <a:solidFill>
+                  <a:srgbClr val="003366"/>
+                </a:solidFill>
+              </a:defRPr>
+            </a:pPr>
+            <a:r>
+              <a:rPr lang="vi-VN" dirty="0"/>
+              <a:t>DỄ</a:t>
+            </a:r>
+            <a:r>
+              <a:rPr dirty="0"/>
+              <a:t> </a:t>
+            </a:r>
+            <a:r>
+              <a:rPr lang="vi-VN" dirty="0"/>
+              <a:t>DÙ</a:t>
+            </a:r>
+            <a:r>
+              <a:rPr dirty="0"/>
+              <a:t>NG</a:t>
+            </a:r>
+            <a:br>
+              <a:rPr dirty="0"/>
+            </a:br>
+            <a:r>
+              <a:rPr dirty="0"/>
+              <a:t>CHO </a:t>
+            </a:r>
+            <a:r>
+              <a:rPr lang="vi-VN" dirty="0"/>
+              <a:t>MỌI</a:t>
+            </a:r>
+            <a:r>
+              <a:rPr dirty="0"/>
+              <a:t> </a:t>
+            </a:r>
+            <a:r>
+              <a:rPr lang="vi-VN" dirty="0"/>
+              <a:t>NGƯỜ</a:t>
+            </a:r>
+            <a:r>
+              <a:rPr dirty="0"/>
+              <a:t>I</a:t>
+            </a:r>
+          </a:p>
+        </p:txBody>
+      </p:sp>
+      <p:sp>
+        <p:nvSpPr>
+          <p:cNvPr id="18" name="Rectangle 17">
+            <a:extLst>
+              <a:ext uri="{FF2B5EF4-FFF2-40B4-BE49-F238E27FC236}">
+                <a16:creationId xmlns:a16="http://schemas.microsoft.com/office/drawing/2014/main" id="{20504D02-049D-AD23-6B83-4F656DD4D493}"/>
+              </a:ext>
+            </a:extLst>
+          </p:cNvPr>
+          <p:cNvSpPr/>
+          <p:nvPr/>
+        </p:nvSpPr>
+        <p:spPr>
+          <a:xfrm>
+            <a:off x="6675120" y="3429000"/>
+            <a:ext cx="1920240" cy="45720"/>
+          </a:xfrm>
+          <a:prstGeom prst="rect">
+            <a:avLst/>
+          </a:prstGeom>
+          <a:solidFill>
+            <a:srgbClr val="00B050"/>
+          </a:solidFill>
+          <a:ln>
+            <a:noFill/>
+          </a:ln>
+        </p:spPr>
+        <p:style>
+          <a:lnRef idx="1">
+            <a:schemeClr val="accent1"/>
+          </a:lnRef>
+          <a:fillRef idx="3">
+            <a:schemeClr val="accent1"/>
+          </a:fillRef>
+          <a:effectRef idx="2">
+            <a:schemeClr val="accent1"/>
+          </a:effectRef>
+          <a:fontRef idx="minor">
+            <a:schemeClr val="lt1"/>
+          </a:fontRef>
+        </p:style>
+        <p:txBody>
+          <a:bodyPr rtlCol="0" anchor="ctr"/>
+          <a:lstStyle/>
+          <a:p>
+            <a:pPr algn="ctr"/>
+            <a:endParaRPr/>
+          </a:p>
+        </p:txBody>
+      </p:sp>
+      <p:sp>
+        <p:nvSpPr>
+          <p:cNvPr id="19" name="TextBox 18">
+            <a:extLst>
+              <a:ext uri="{FF2B5EF4-FFF2-40B4-BE49-F238E27FC236}">
+                <a16:creationId xmlns:a16="http://schemas.microsoft.com/office/drawing/2014/main" id="{EC9DF6C4-B37B-14DF-13B3-EB175031D5E1}"/>
+              </a:ext>
+            </a:extLst>
+          </p:cNvPr>
+          <p:cNvSpPr txBox="1"/>
+          <p:nvPr/>
+        </p:nvSpPr>
+        <p:spPr>
+          <a:xfrm>
+            <a:off x="6446520" y="3566160"/>
+            <a:ext cx="2377440" cy="492443"/>
+          </a:xfrm>
+          <a:prstGeom prst="rect">
+            <a:avLst/>
+          </a:prstGeom>
+          <a:noFill/>
+        </p:spPr>
+        <p:txBody>
+          <a:bodyPr wrap="square">
+            <a:spAutoFit/>
+          </a:bodyPr>
+          <a:lstStyle/>
+          <a:p>
+            <a:pPr algn="ctr">
+              <a:defRPr sz="1300" b="0" i="0">
+                <a:solidFill>
+                  <a:srgbClr val="595959"/>
+                </a:solidFill>
+              </a:defRPr>
+            </a:pPr>
+            <a:r>
+              <a:rPr lang="en-US" dirty="0"/>
+              <a:t>python main.py run</a:t>
+            </a:r>
+          </a:p>
+          <a:p>
+            <a:pPr algn="ctr">
+              <a:defRPr sz="1300" b="0" i="0">
+                <a:solidFill>
+                  <a:srgbClr val="595959"/>
+                </a:solidFill>
+              </a:defRPr>
+            </a:pPr>
+            <a:endParaRPr dirty="0"/>
+          </a:p>
+        </p:txBody>
+      </p:sp>
+      <p:sp>
+        <p:nvSpPr>
+          <p:cNvPr id="21" name="TextBox 20">
+            <a:extLst>
+              <a:ext uri="{FF2B5EF4-FFF2-40B4-BE49-F238E27FC236}">
+                <a16:creationId xmlns:a16="http://schemas.microsoft.com/office/drawing/2014/main" id="{C0D20F97-D581-DB7A-CCE4-F69EA9764298}"/>
+              </a:ext>
+            </a:extLst>
+          </p:cNvPr>
+          <p:cNvSpPr txBox="1"/>
+          <p:nvPr/>
+        </p:nvSpPr>
+        <p:spPr>
+          <a:xfrm>
+            <a:off x="548640" y="942945"/>
+            <a:ext cx="4572000" cy="400110"/>
+          </a:xfrm>
+          <a:prstGeom prst="rect">
+            <a:avLst/>
+          </a:prstGeom>
+          <a:noFill/>
+        </p:spPr>
+        <p:txBody>
+          <a:bodyPr wrap="square">
+            <a:spAutoFit/>
+          </a:bodyPr>
+          <a:lstStyle/>
+          <a:p>
+            <a:pPr>
+              <a:defRPr sz="2800" b="1">
+                <a:solidFill>
+                  <a:srgbClr val="FFFFFF"/>
+                </a:solidFill>
+              </a:defRPr>
+            </a:pPr>
+            <a:r>
+              <a:rPr lang="en-US" sz="2000" dirty="0" err="1">
+                <a:solidFill>
+                  <a:schemeClr val="bg2">
+                    <a:lumMod val="50000"/>
+                  </a:schemeClr>
+                </a:solidFill>
+              </a:rPr>
+              <a:t>Cách</a:t>
+            </a:r>
+            <a:r>
+              <a:rPr lang="en-US" sz="2000" dirty="0">
+                <a:solidFill>
+                  <a:schemeClr val="bg2">
+                    <a:lumMod val="50000"/>
+                  </a:schemeClr>
+                </a:solidFill>
+              </a:rPr>
+              <a:t> </a:t>
+            </a:r>
+            <a:r>
+              <a:rPr lang="en-US" sz="2000" dirty="0" err="1">
+                <a:solidFill>
+                  <a:schemeClr val="bg2">
+                    <a:lumMod val="50000"/>
+                  </a:schemeClr>
+                </a:solidFill>
+              </a:rPr>
+              <a:t>chạy</a:t>
+            </a:r>
+            <a:r>
+              <a:rPr lang="en-US" sz="2000" dirty="0">
+                <a:solidFill>
+                  <a:schemeClr val="bg2">
+                    <a:lumMod val="50000"/>
+                  </a:schemeClr>
+                </a:solidFill>
+              </a:rPr>
+              <a:t> </a:t>
+            </a:r>
+            <a:r>
+              <a:rPr lang="en-US" sz="2000" dirty="0" err="1">
+                <a:solidFill>
+                  <a:schemeClr val="bg2">
+                    <a:lumMod val="50000"/>
+                  </a:schemeClr>
+                </a:solidFill>
+              </a:rPr>
+              <a:t>hệ</a:t>
+            </a:r>
+            <a:r>
+              <a:rPr lang="en-US" sz="2000" dirty="0">
+                <a:solidFill>
+                  <a:schemeClr val="bg2">
+                    <a:lumMod val="50000"/>
+                  </a:schemeClr>
+                </a:solidFill>
+              </a:rPr>
+              <a:t> </a:t>
+            </a:r>
+            <a:r>
+              <a:rPr lang="en-US" sz="2000" dirty="0" err="1">
+                <a:solidFill>
+                  <a:schemeClr val="bg2">
+                    <a:lumMod val="50000"/>
+                  </a:schemeClr>
+                </a:solidFill>
+              </a:rPr>
+              <a:t>thống</a:t>
+            </a:r>
+            <a:r>
+              <a:rPr lang="en-US" sz="2000" dirty="0">
+                <a:solidFill>
+                  <a:schemeClr val="bg2">
+                    <a:lumMod val="50000"/>
+                  </a:schemeClr>
+                </a:solidFill>
+              </a:rPr>
+              <a:t> (Demo)</a:t>
+            </a:r>
+          </a:p>
+        </p:txBody>
+      </p:sp>
+      <p:sp>
+        <p:nvSpPr>
+          <p:cNvPr id="22" name="TextBox 21">
+            <a:extLst>
+              <a:ext uri="{FF2B5EF4-FFF2-40B4-BE49-F238E27FC236}">
+                <a16:creationId xmlns:a16="http://schemas.microsoft.com/office/drawing/2014/main" id="{4FB37DD4-2AC1-FC65-EB6E-FE77A42DE292}"/>
+              </a:ext>
+            </a:extLst>
+          </p:cNvPr>
+          <p:cNvSpPr txBox="1"/>
+          <p:nvPr/>
+        </p:nvSpPr>
+        <p:spPr>
+          <a:xfrm>
+            <a:off x="1238415" y="4714726"/>
+            <a:ext cx="7764449" cy="1200329"/>
+          </a:xfrm>
+          <a:prstGeom prst="rect">
+            <a:avLst/>
+          </a:prstGeom>
+          <a:noFill/>
+        </p:spPr>
+        <p:txBody>
+          <a:bodyPr wrap="square">
+            <a:spAutoFit/>
+          </a:bodyPr>
+          <a:lstStyle/>
+          <a:p>
+            <a:pPr>
+              <a:defRPr sz="1300" i="1">
+                <a:solidFill>
+                  <a:srgbClr val="7F8C8D"/>
+                </a:solidFill>
+              </a:defRPr>
+            </a:pPr>
+            <a:r>
+              <a:rPr lang="en-US" sz="1800" dirty="0"/>
+              <a:t>Sau </a:t>
+            </a:r>
+            <a:r>
+              <a:rPr lang="en-US" sz="1800" dirty="0" err="1"/>
+              <a:t>khi</a:t>
+            </a:r>
+            <a:r>
+              <a:rPr lang="en-US" sz="1800" dirty="0"/>
+              <a:t> </a:t>
+            </a:r>
+            <a:r>
+              <a:rPr lang="en-US" sz="1800" dirty="0" err="1"/>
+              <a:t>chạy</a:t>
+            </a:r>
+            <a:r>
+              <a:rPr lang="en-US" sz="1800" dirty="0"/>
+              <a:t>, </a:t>
+            </a:r>
+            <a:r>
+              <a:rPr lang="en-US" sz="1800" dirty="0" err="1"/>
+              <a:t>hệ</a:t>
+            </a:r>
+            <a:r>
+              <a:rPr lang="en-US" sz="1800" dirty="0"/>
+              <a:t> </a:t>
+            </a:r>
+            <a:r>
+              <a:rPr lang="en-US" sz="1800" dirty="0" err="1"/>
+              <a:t>thống</a:t>
+            </a:r>
+            <a:r>
+              <a:rPr lang="en-US" sz="1800" dirty="0"/>
+              <a:t> </a:t>
+            </a:r>
+            <a:r>
+              <a:rPr lang="en-US" sz="1800" dirty="0" err="1"/>
+              <a:t>sẽ</a:t>
+            </a:r>
+            <a:r>
+              <a:rPr lang="en-US" sz="1800" dirty="0"/>
+              <a:t> </a:t>
+            </a:r>
+            <a:r>
+              <a:rPr lang="en-US" sz="1800" dirty="0" err="1"/>
+              <a:t>mở</a:t>
+            </a:r>
+            <a:r>
+              <a:rPr lang="en-US" sz="1800" dirty="0"/>
+              <a:t> </a:t>
+            </a:r>
+            <a:r>
+              <a:rPr lang="en-US" sz="1800" dirty="0" err="1"/>
+              <a:t>trình</a:t>
+            </a:r>
+            <a:r>
+              <a:rPr lang="en-US" sz="1800" dirty="0"/>
+              <a:t> </a:t>
+            </a:r>
+            <a:r>
+              <a:rPr lang="en-US" sz="1800" dirty="0" err="1"/>
+              <a:t>duyệt</a:t>
+            </a:r>
+            <a:r>
+              <a:rPr lang="en-US" sz="1800" dirty="0"/>
+              <a:t> web </a:t>
+            </a:r>
+            <a:r>
+              <a:rPr lang="en-US" sz="1800" dirty="0" err="1"/>
+              <a:t>tự</a:t>
+            </a:r>
+            <a:r>
+              <a:rPr lang="en-US" sz="1800" dirty="0"/>
+              <a:t> </a:t>
+            </a:r>
+            <a:r>
+              <a:rPr lang="en-US" sz="1800" dirty="0" err="1"/>
+              <a:t>động</a:t>
+            </a:r>
+            <a:endParaRPr lang="en-US" sz="1800" dirty="0"/>
+          </a:p>
+          <a:p>
+            <a:pPr>
+              <a:defRPr sz="1300" i="1">
+                <a:solidFill>
+                  <a:srgbClr val="7F8C8D"/>
+                </a:solidFill>
+              </a:defRPr>
+            </a:pPr>
+            <a:r>
+              <a:rPr lang="en-US" sz="1800" dirty="0" err="1"/>
+              <a:t>Truy</a:t>
+            </a:r>
+            <a:r>
+              <a:rPr lang="en-US" sz="1800" dirty="0"/>
+              <a:t> </a:t>
+            </a:r>
+            <a:r>
+              <a:rPr lang="en-US" sz="1800" dirty="0" err="1"/>
+              <a:t>cập</a:t>
+            </a:r>
+            <a:r>
+              <a:rPr lang="en-US" sz="1800" dirty="0"/>
+              <a:t> </a:t>
+            </a:r>
+            <a:r>
+              <a:rPr lang="en-US" sz="1800" dirty="0" err="1"/>
+              <a:t>tại</a:t>
+            </a:r>
+            <a:r>
+              <a:rPr lang="en-US" sz="1800" dirty="0"/>
+              <a:t>: http://localhost:8501</a:t>
+            </a:r>
+          </a:p>
+          <a:p>
+            <a:pPr>
+              <a:defRPr sz="1300" i="1">
+                <a:solidFill>
+                  <a:srgbClr val="7F8C8D"/>
+                </a:solidFill>
+              </a:defRPr>
+            </a:pPr>
+            <a:r>
+              <a:rPr lang="vi-VN" sz="1800" dirty="0"/>
+              <a:t>Lưu ý: Cần cài đặt Python và các thư viện trước (xem README.md)</a:t>
+            </a:r>
+          </a:p>
+          <a:p>
+            <a:pPr>
+              <a:defRPr sz="1300" i="1">
+                <a:solidFill>
+                  <a:srgbClr val="7F8C8D"/>
+                </a:solidFill>
+              </a:defRPr>
+            </a:pPr>
+            <a:endParaRPr sz="1800" dirty="0"/>
+          </a:p>
+        </p:txBody>
+      </p:sp>
+    </p:spTree>
+    <p:extLst>
+      <p:ext uri="{BB962C8B-B14F-4D97-AF65-F5344CB8AC3E}">
+        <p14:creationId xmlns:p14="http://schemas.microsoft.com/office/powerpoint/2010/main" val="2608871639"/>
+      </p:ext>
+    </p:extLst>
+  </p:cSld>
+  <p:clrMapOvr>
+    <a:masterClrMapping/>
+  </p:clrMapOvr>
+</p:sld>
+</file>
+
+<file path=ppt/slides/slide26.xml><?xml version="1.0" encoding="utf-8"?>
+<p:sld xmlns:a="http://schemas.openxmlformats.org/drawingml/2006/main" xmlns:r="http://schemas.openxmlformats.org/officeDocument/2006/relationships" xmlns:p="http://schemas.openxmlformats.org/presentationml/2006/main">
+  <p:cSld>
+    <p:spTree>
+      <p:nvGrpSpPr>
+        <p:cNvPr id="1" name=""/>
+        <p:cNvGrpSpPr/>
+        <p:nvPr/>
+      </p:nvGrpSpPr>
+      <p:grpSpPr>
+        <a:xfrm>
+          <a:off x="0" y="0"/>
+          <a:ext cx="0" cy="0"/>
+          <a:chOff x="0" y="0"/>
+          <a:chExt cx="0" cy="0"/>
+        </a:xfrm>
+      </p:grpSpPr>
+      <p:sp>
+        <p:nvSpPr>
+          <p:cNvPr id="2" name="Title 1">
+            <a:extLst>
+              <a:ext uri="{FF2B5EF4-FFF2-40B4-BE49-F238E27FC236}">
                 <a16:creationId xmlns:a16="http://schemas.microsoft.com/office/drawing/2014/main" id="{1E2FA283-A35C-5EF0-8B67-302EB5559503}"/>
               </a:ext>
             </a:extLst>
@@ -20630,7 +22408,7 @@
 </p:sld>
 </file>
 
-<file path=ppt/slides/slide26.xml><?xml version="1.0" encoding="utf-8"?>
+<file path=ppt/slides/slide27.xml><?xml version="1.0" encoding="utf-8"?>
 <p:sld xmlns:a="http://schemas.openxmlformats.org/drawingml/2006/main" xmlns:r="http://schemas.openxmlformats.org/officeDocument/2006/relationships" xmlns:p="http://schemas.openxmlformats.org/presentationml/2006/main">
   <p:cSld>
     <p:spTree>
@@ -20721,7 +22499,7 @@
 </p:sld>
 </file>
 
-<file path=ppt/slides/slide27.xml><?xml version="1.0" encoding="utf-8"?>
+<file path=ppt/slides/slide28.xml><?xml version="1.0" encoding="utf-8"?>
 <p:sld xmlns:a="http://schemas.openxmlformats.org/drawingml/2006/main" xmlns:r="http://schemas.openxmlformats.org/officeDocument/2006/relationships" xmlns:p="http://schemas.openxmlformats.org/presentationml/2006/main">
   <p:cSld>
     <p:spTree>
@@ -20812,7 +22590,7 @@
 </p:sld>
 </file>
 
-<file path=ppt/slides/slide28.xml><?xml version="1.0" encoding="utf-8"?>
+<file path=ppt/slides/slide29.xml><?xml version="1.0" encoding="utf-8"?>
 <p:sld xmlns:a="http://schemas.openxmlformats.org/drawingml/2006/main" xmlns:r="http://schemas.openxmlformats.org/officeDocument/2006/relationships" xmlns:p="http://schemas.openxmlformats.org/presentationml/2006/main">
   <p:cSld>
     <p:spTree>
@@ -22812,766 +24590,6 @@
 </p:sld>
 </file>
 
-<file path=ppt/slides/slide29.xml><?xml version="1.0" encoding="utf-8"?>
-<p:sld xmlns:a="http://schemas.openxmlformats.org/drawingml/2006/main" xmlns:r="http://schemas.openxmlformats.org/officeDocument/2006/relationships" xmlns:p="http://schemas.openxmlformats.org/presentationml/2006/main">
-  <p:cSld>
-    <p:spTree>
-      <p:nvGrpSpPr>
-        <p:cNvPr id="1" name=""/>
-        <p:cNvGrpSpPr/>
-        <p:nvPr/>
-      </p:nvGrpSpPr>
-      <p:grpSpPr>
-        <a:xfrm>
-          <a:off x="0" y="0"/>
-          <a:ext cx="0" cy="0"/>
-          <a:chOff x="0" y="0"/>
-          <a:chExt cx="0" cy="0"/>
-        </a:xfrm>
-      </p:grpSpPr>
-      <p:sp>
-        <p:nvSpPr>
-          <p:cNvPr id="2" name="Title 1">
-            <a:extLst>
-              <a:ext uri="{FF2B5EF4-FFF2-40B4-BE49-F238E27FC236}">
-                <a16:creationId xmlns:a16="http://schemas.microsoft.com/office/drawing/2014/main" id="{107739C3-9867-63EC-F46D-6A9C9C055399}"/>
-              </a:ext>
-            </a:extLst>
-          </p:cNvPr>
-          <p:cNvSpPr>
-            <a:spLocks noGrp="1"/>
-          </p:cNvSpPr>
-          <p:nvPr>
-            <p:ph type="title"/>
-          </p:nvPr>
-        </p:nvSpPr>
-        <p:spPr/>
-        <p:txBody>
-          <a:bodyPr>
-            <a:normAutofit/>
-          </a:bodyPr>
-          <a:lstStyle/>
-          <a:p>
-            <a:r>
-              <a:rPr lang="en-US" dirty="0" err="1"/>
-              <a:t>Kết</a:t>
-            </a:r>
-            <a:r>
-              <a:rPr lang="en-US" dirty="0"/>
-              <a:t> </a:t>
-            </a:r>
-            <a:r>
-              <a:rPr lang="en-US" dirty="0" err="1"/>
-              <a:t>luận</a:t>
-            </a:r>
-            <a:endParaRPr lang="en-US" dirty="0"/>
-          </a:p>
-        </p:txBody>
-      </p:sp>
-      <p:sp>
-        <p:nvSpPr>
-          <p:cNvPr id="50" name="TextBox 49">
-            <a:extLst>
-              <a:ext uri="{FF2B5EF4-FFF2-40B4-BE49-F238E27FC236}">
-                <a16:creationId xmlns:a16="http://schemas.microsoft.com/office/drawing/2014/main" id="{18BCDBDD-67E7-D61F-B9B3-BF6442041F34}"/>
-              </a:ext>
-            </a:extLst>
-          </p:cNvPr>
-          <p:cNvSpPr txBox="1"/>
-          <p:nvPr/>
-        </p:nvSpPr>
-        <p:spPr>
-          <a:xfrm>
-            <a:off x="640080" y="1236428"/>
-            <a:ext cx="8046719" cy="5016758"/>
-          </a:xfrm>
-          <a:prstGeom prst="rect">
-            <a:avLst/>
-          </a:prstGeom>
-          <a:noFill/>
-        </p:spPr>
-        <p:txBody>
-          <a:bodyPr wrap="square">
-            <a:spAutoFit/>
-          </a:bodyPr>
-          <a:lstStyle/>
-          <a:p>
-            <a:pPr>
-              <a:spcBef>
-                <a:spcPts val="1000"/>
-              </a:spcBef>
-              <a:spcAft>
-                <a:spcPts val="500"/>
-              </a:spcAft>
-              <a:defRPr sz="2000">
-                <a:solidFill>
-                  <a:srgbClr val="000000"/>
-                </a:solidFill>
-              </a:defRPr>
-            </a:pPr>
-            <a:r>
-              <a:rPr dirty="0"/>
-              <a:t> </a:t>
-            </a:r>
-            <a:r>
-              <a:rPr lang="vi-VN" dirty="0"/>
-              <a:t>H</a:t>
-            </a:r>
-            <a:r>
-              <a:rPr dirty="0"/>
-              <a:t>ệ </a:t>
-            </a:r>
-            <a:r>
-              <a:rPr dirty="0" err="1"/>
-              <a:t>thống</a:t>
-            </a:r>
-            <a:r>
-              <a:rPr dirty="0"/>
-              <a:t> </a:t>
-            </a:r>
-            <a:r>
-              <a:rPr dirty="0" err="1"/>
-              <a:t>Gợi</a:t>
-            </a:r>
-            <a:r>
-              <a:rPr dirty="0"/>
-              <a:t> ý </a:t>
-            </a:r>
-            <a:r>
-              <a:rPr dirty="0" err="1"/>
-              <a:t>Gói</a:t>
-            </a:r>
-            <a:r>
-              <a:rPr dirty="0"/>
-              <a:t> </a:t>
-            </a:r>
-            <a:r>
-              <a:rPr dirty="0" err="1"/>
-              <a:t>Thầu</a:t>
-            </a:r>
-            <a:r>
-              <a:rPr dirty="0"/>
-              <a:t> </a:t>
-            </a:r>
-            <a:r>
-              <a:rPr dirty="0" err="1"/>
-              <a:t>VietinBank</a:t>
-            </a:r>
-            <a:r>
-              <a:rPr dirty="0"/>
-              <a:t> v2.0 — </a:t>
-            </a:r>
-            <a:r>
-              <a:rPr dirty="0" err="1"/>
-              <a:t>là</a:t>
-            </a:r>
-            <a:r>
-              <a:rPr dirty="0"/>
-              <a:t> CÔNG CỤ THÔNG MINH</a:t>
-            </a:r>
-            <a:r>
-              <a:rPr lang="vi-VN" dirty="0"/>
-              <a:t> </a:t>
-            </a:r>
-            <a:r>
-              <a:rPr dirty="0" err="1"/>
-              <a:t>giúp</a:t>
-            </a:r>
-            <a:r>
-              <a:rPr dirty="0"/>
-              <a:t> </a:t>
-            </a:r>
-            <a:r>
-              <a:rPr dirty="0" err="1"/>
-              <a:t>doanh</a:t>
-            </a:r>
-            <a:r>
-              <a:rPr dirty="0"/>
-              <a:t> </a:t>
-            </a:r>
-            <a:r>
-              <a:rPr dirty="0" err="1"/>
-              <a:t>nghiệp</a:t>
-            </a:r>
-            <a:r>
-              <a:rPr dirty="0"/>
-              <a:t> </a:t>
-            </a:r>
-            <a:r>
-              <a:rPr dirty="0" err="1"/>
-              <a:t>tìm</a:t>
-            </a:r>
-            <a:r>
-              <a:rPr dirty="0"/>
-              <a:t> </a:t>
-            </a:r>
-            <a:r>
-              <a:rPr dirty="0" err="1"/>
-              <a:t>đúng</a:t>
-            </a:r>
-            <a:r>
-              <a:rPr dirty="0"/>
-              <a:t> </a:t>
-            </a:r>
-            <a:r>
-              <a:rPr dirty="0" err="1"/>
-              <a:t>gói</a:t>
-            </a:r>
-            <a:r>
-              <a:rPr dirty="0"/>
-              <a:t> </a:t>
-            </a:r>
-            <a:r>
-              <a:rPr dirty="0" err="1"/>
-              <a:t>thầu</a:t>
-            </a:r>
-            <a:r>
-              <a:rPr dirty="0"/>
-              <a:t> </a:t>
-            </a:r>
-            <a:r>
-              <a:rPr dirty="0" err="1"/>
-              <a:t>và</a:t>
-            </a:r>
-            <a:r>
-              <a:rPr dirty="0"/>
-              <a:t> </a:t>
-            </a:r>
-            <a:r>
-              <a:rPr dirty="0" err="1"/>
-              <a:t>hiểu</a:t>
-            </a:r>
-            <a:r>
-              <a:rPr dirty="0"/>
-              <a:t> </a:t>
-            </a:r>
-            <a:r>
-              <a:rPr dirty="0" err="1"/>
-              <a:t>rõ</a:t>
-            </a:r>
-            <a:r>
-              <a:rPr dirty="0"/>
-              <a:t> </a:t>
-            </a:r>
-            <a:r>
-              <a:rPr dirty="0" err="1"/>
-              <a:t>đối</a:t>
-            </a:r>
-            <a:r>
-              <a:rPr dirty="0"/>
-              <a:t> </a:t>
-            </a:r>
-            <a:r>
-              <a:rPr dirty="0" err="1"/>
-              <a:t>thủ</a:t>
-            </a:r>
-            <a:r>
-              <a:rPr dirty="0"/>
-              <a:t> </a:t>
-            </a:r>
-            <a:r>
-              <a:rPr dirty="0" err="1"/>
-              <a:t>cạnh</a:t>
-            </a:r>
-            <a:r>
-              <a:rPr dirty="0"/>
-              <a:t> </a:t>
-            </a:r>
-            <a:r>
-              <a:rPr dirty="0" err="1"/>
-              <a:t>tranh</a:t>
-            </a:r>
-            <a:r>
-              <a:rPr dirty="0"/>
-              <a:t>.</a:t>
-            </a:r>
-          </a:p>
-          <a:p>
-            <a:pPr>
-              <a:spcBef>
-                <a:spcPts val="1000"/>
-              </a:spcBef>
-              <a:spcAft>
-                <a:spcPts val="500"/>
-              </a:spcAft>
-              <a:defRPr sz="2000">
-                <a:solidFill>
-                  <a:srgbClr val="000000"/>
-                </a:solidFill>
-              </a:defRPr>
-            </a:pPr>
-            <a:r>
-              <a:rPr dirty="0"/>
-              <a:t> </a:t>
-            </a:r>
-            <a:r>
-              <a:rPr dirty="0" err="1"/>
-              <a:t>Tóm</a:t>
-            </a:r>
-            <a:r>
-              <a:rPr dirty="0"/>
-              <a:t> </a:t>
-            </a:r>
-            <a:r>
-              <a:rPr dirty="0" err="1"/>
-              <a:t>tắt</a:t>
-            </a:r>
-            <a:r>
-              <a:rPr dirty="0"/>
-              <a:t> 3 </a:t>
-            </a:r>
-            <a:r>
-              <a:rPr dirty="0" err="1"/>
-              <a:t>điểm</a:t>
-            </a:r>
-            <a:r>
-              <a:rPr dirty="0"/>
-              <a:t> </a:t>
-            </a:r>
-            <a:r>
-              <a:rPr dirty="0" err="1"/>
-              <a:t>chính</a:t>
-            </a:r>
-            <a:r>
-              <a:rPr dirty="0"/>
-              <a:t>:</a:t>
-            </a:r>
-          </a:p>
-          <a:p>
-            <a:pPr>
-              <a:spcBef>
-                <a:spcPts val="1000"/>
-              </a:spcBef>
-              <a:spcAft>
-                <a:spcPts val="500"/>
-              </a:spcAft>
-              <a:defRPr sz="2000">
-                <a:solidFill>
-                  <a:srgbClr val="000000"/>
-                </a:solidFill>
-              </a:defRPr>
-            </a:pPr>
-            <a:r>
-              <a:rPr dirty="0"/>
-              <a:t> ① GỢI Ý THÔNG MINH</a:t>
-            </a:r>
-          </a:p>
-          <a:p>
-            <a:pPr>
-              <a:spcBef>
-                <a:spcPts val="1000"/>
-              </a:spcBef>
-              <a:spcAft>
-                <a:spcPts val="500"/>
-              </a:spcAft>
-              <a:defRPr sz="2000">
-                <a:solidFill>
-                  <a:srgbClr val="000000"/>
-                </a:solidFill>
-              </a:defRPr>
-            </a:pPr>
-            <a:r>
-              <a:rPr lang="en-US" dirty="0"/>
-              <a:t>•</a:t>
-            </a:r>
-            <a:r>
-              <a:rPr dirty="0"/>
-              <a:t>    </a:t>
-            </a:r>
-            <a:r>
-              <a:rPr dirty="0" err="1"/>
-              <a:t>Thuật</a:t>
-            </a:r>
-            <a:r>
-              <a:rPr dirty="0"/>
-              <a:t> </a:t>
-            </a:r>
-            <a:r>
-              <a:rPr dirty="0" err="1"/>
-              <a:t>toán</a:t>
-            </a:r>
-            <a:r>
-              <a:rPr dirty="0"/>
-              <a:t> Hybrid (TF-IDF + Historical + Price + Recency)</a:t>
-            </a:r>
-          </a:p>
-          <a:p>
-            <a:pPr>
-              <a:spcBef>
-                <a:spcPts val="1000"/>
-              </a:spcBef>
-              <a:spcAft>
-                <a:spcPts val="500"/>
-              </a:spcAft>
-              <a:defRPr sz="2000">
-                <a:solidFill>
-                  <a:srgbClr val="000000"/>
-                </a:solidFill>
-              </a:defRPr>
-            </a:pPr>
-            <a:r>
-              <a:rPr lang="en-US" dirty="0"/>
-              <a:t>•</a:t>
-            </a:r>
-            <a:r>
-              <a:rPr dirty="0"/>
-              <a:t>    </a:t>
-            </a:r>
-            <a:r>
-              <a:rPr dirty="0" err="1"/>
-              <a:t>tự</a:t>
-            </a:r>
-            <a:r>
-              <a:rPr dirty="0"/>
-              <a:t> </a:t>
-            </a:r>
-            <a:r>
-              <a:rPr dirty="0" err="1"/>
-              <a:t>động</a:t>
-            </a:r>
-            <a:r>
-              <a:rPr dirty="0"/>
-              <a:t> </a:t>
-            </a:r>
-            <a:r>
-              <a:rPr dirty="0" err="1"/>
-              <a:t>xếp</a:t>
-            </a:r>
-            <a:r>
-              <a:rPr dirty="0"/>
-              <a:t> </a:t>
-            </a:r>
-            <a:r>
-              <a:rPr dirty="0" err="1"/>
-              <a:t>hạng</a:t>
-            </a:r>
-            <a:r>
-              <a:rPr dirty="0"/>
-              <a:t> </a:t>
-            </a:r>
-            <a:r>
-              <a:rPr dirty="0" err="1"/>
-              <a:t>gói</a:t>
-            </a:r>
-            <a:r>
-              <a:rPr dirty="0"/>
-              <a:t> </a:t>
-            </a:r>
-            <a:r>
-              <a:rPr dirty="0" err="1"/>
-              <a:t>thầu</a:t>
-            </a:r>
-            <a:r>
-              <a:rPr dirty="0"/>
-              <a:t> </a:t>
-            </a:r>
-            <a:r>
-              <a:rPr dirty="0" err="1"/>
-              <a:t>phù</a:t>
-            </a:r>
-            <a:r>
-              <a:rPr dirty="0"/>
-              <a:t> </a:t>
-            </a:r>
-            <a:r>
-              <a:rPr dirty="0" err="1"/>
-              <a:t>hợp</a:t>
-            </a:r>
-            <a:r>
-              <a:rPr dirty="0"/>
-              <a:t> </a:t>
-            </a:r>
-            <a:r>
-              <a:rPr dirty="0" err="1"/>
-              <a:t>nhất</a:t>
-            </a:r>
-            <a:endParaRPr dirty="0"/>
-          </a:p>
-          <a:p>
-            <a:pPr>
-              <a:spcBef>
-                <a:spcPts val="1000"/>
-              </a:spcBef>
-              <a:spcAft>
-                <a:spcPts val="500"/>
-              </a:spcAft>
-              <a:defRPr sz="2000">
-                <a:solidFill>
-                  <a:srgbClr val="000000"/>
-                </a:solidFill>
-              </a:defRPr>
-            </a:pPr>
-            <a:r>
-              <a:rPr dirty="0"/>
-              <a:t> ② PHÂN TÍCH ĐỐI THỦ</a:t>
-            </a:r>
-          </a:p>
-          <a:p>
-            <a:pPr>
-              <a:spcBef>
-                <a:spcPts val="1000"/>
-              </a:spcBef>
-              <a:spcAft>
-                <a:spcPts val="500"/>
-              </a:spcAft>
-              <a:defRPr sz="2000">
-                <a:solidFill>
-                  <a:srgbClr val="000000"/>
-                </a:solidFill>
-              </a:defRPr>
-            </a:pPr>
-            <a:r>
-              <a:rPr dirty="0"/>
-              <a:t>•    </a:t>
-            </a:r>
-            <a:r>
-              <a:rPr dirty="0" err="1"/>
-              <a:t>Biết</a:t>
-            </a:r>
-            <a:r>
-              <a:rPr dirty="0"/>
-              <a:t> ai </a:t>
-            </a:r>
-            <a:r>
-              <a:rPr dirty="0" err="1"/>
-              <a:t>là</a:t>
-            </a:r>
-            <a:r>
-              <a:rPr dirty="0"/>
-              <a:t> </a:t>
-            </a:r>
-            <a:r>
-              <a:rPr dirty="0" err="1"/>
-              <a:t>đối</a:t>
-            </a:r>
-            <a:r>
-              <a:rPr dirty="0"/>
-              <a:t> </a:t>
-            </a:r>
-            <a:r>
-              <a:rPr dirty="0" err="1"/>
-              <a:t>thủ</a:t>
-            </a:r>
-            <a:r>
-              <a:rPr dirty="0"/>
-              <a:t> </a:t>
-            </a:r>
-            <a:r>
-              <a:rPr dirty="0" err="1"/>
-              <a:t>nguy</a:t>
-            </a:r>
-            <a:r>
-              <a:rPr dirty="0"/>
-              <a:t> </a:t>
-            </a:r>
-            <a:r>
-              <a:rPr dirty="0" err="1"/>
-              <a:t>hiểm</a:t>
-            </a:r>
-            <a:r>
-              <a:rPr dirty="0"/>
-              <a:t> </a:t>
-            </a:r>
-            <a:r>
-              <a:rPr dirty="0" err="1"/>
-              <a:t>nhất</a:t>
-            </a:r>
-            <a:r>
-              <a:rPr dirty="0"/>
-              <a:t> </a:t>
-            </a:r>
-            <a:r>
-              <a:rPr dirty="0" err="1"/>
-              <a:t>trước</a:t>
-            </a:r>
-            <a:r>
-              <a:rPr dirty="0"/>
-              <a:t> </a:t>
-            </a:r>
-            <a:r>
-              <a:rPr dirty="0" err="1"/>
-              <a:t>khi</a:t>
-            </a:r>
-            <a:r>
-              <a:rPr dirty="0"/>
-              <a:t> </a:t>
-            </a:r>
-            <a:r>
-              <a:rPr dirty="0" err="1"/>
-              <a:t>quyết</a:t>
-            </a:r>
-            <a:r>
-              <a:rPr dirty="0"/>
-              <a:t> </a:t>
-            </a:r>
-            <a:r>
-              <a:rPr dirty="0" err="1"/>
-              <a:t>định</a:t>
-            </a:r>
-            <a:r>
-              <a:rPr dirty="0"/>
-              <a:t> </a:t>
-            </a:r>
-            <a:r>
-              <a:rPr dirty="0" err="1"/>
-              <a:t>tham</a:t>
-            </a:r>
-            <a:r>
-              <a:rPr dirty="0"/>
-              <a:t> </a:t>
-            </a:r>
-            <a:r>
-              <a:rPr dirty="0" err="1"/>
-              <a:t>gia</a:t>
-            </a:r>
-            <a:endParaRPr dirty="0"/>
-          </a:p>
-          <a:p>
-            <a:pPr>
-              <a:spcBef>
-                <a:spcPts val="1000"/>
-              </a:spcBef>
-              <a:spcAft>
-                <a:spcPts val="500"/>
-              </a:spcAft>
-              <a:defRPr sz="2000">
-                <a:solidFill>
-                  <a:srgbClr val="000000"/>
-                </a:solidFill>
-              </a:defRPr>
-            </a:pPr>
-            <a:r>
-              <a:rPr dirty="0"/>
-              <a:t> ③ GIAO DIỆN DỄ DÙNG</a:t>
-            </a:r>
-          </a:p>
-          <a:p>
-            <a:pPr>
-              <a:spcBef>
-                <a:spcPts val="1000"/>
-              </a:spcBef>
-              <a:spcAft>
-                <a:spcPts val="500"/>
-              </a:spcAft>
-              <a:defRPr sz="2000">
-                <a:solidFill>
-                  <a:srgbClr val="000000"/>
-                </a:solidFill>
-              </a:defRPr>
-            </a:pPr>
-            <a:r>
-              <a:rPr dirty="0"/>
-              <a:t>•    </a:t>
-            </a:r>
-            <a:r>
-              <a:rPr dirty="0" err="1"/>
-              <a:t>Không</a:t>
-            </a:r>
-            <a:r>
-              <a:rPr dirty="0"/>
-              <a:t> </a:t>
-            </a:r>
-            <a:r>
-              <a:rPr dirty="0" err="1"/>
-              <a:t>cần</a:t>
-            </a:r>
-            <a:r>
-              <a:rPr dirty="0"/>
-              <a:t> </a:t>
-            </a:r>
-            <a:r>
-              <a:rPr dirty="0" err="1"/>
-              <a:t>kiến</a:t>
-            </a:r>
-            <a:r>
-              <a:rPr dirty="0"/>
-              <a:t> </a:t>
-            </a:r>
-            <a:r>
-              <a:rPr dirty="0" err="1"/>
-              <a:t>thức</a:t>
-            </a:r>
-            <a:r>
-              <a:rPr dirty="0"/>
-              <a:t> IT — </a:t>
-            </a:r>
-            <a:r>
-              <a:rPr dirty="0" err="1"/>
-              <a:t>chỉ</a:t>
-            </a:r>
-            <a:r>
-              <a:rPr dirty="0"/>
-              <a:t> </a:t>
-            </a:r>
-            <a:r>
-              <a:rPr dirty="0" err="1"/>
-              <a:t>cần</a:t>
-            </a:r>
-            <a:r>
-              <a:rPr dirty="0"/>
-              <a:t> </a:t>
-            </a:r>
-            <a:r>
-              <a:rPr dirty="0" err="1"/>
-              <a:t>chọn</a:t>
-            </a:r>
-            <a:r>
-              <a:rPr dirty="0"/>
-              <a:t>, </a:t>
-            </a:r>
-            <a:r>
-              <a:rPr dirty="0" err="1"/>
-              <a:t>lọc</a:t>
-            </a:r>
-            <a:r>
-              <a:rPr dirty="0"/>
-              <a:t> </a:t>
-            </a:r>
-            <a:r>
-              <a:rPr dirty="0" err="1"/>
-              <a:t>và</a:t>
-            </a:r>
-            <a:r>
-              <a:rPr dirty="0"/>
-              <a:t> </a:t>
-            </a:r>
-            <a:r>
-              <a:rPr dirty="0" err="1"/>
-              <a:t>xem</a:t>
-            </a:r>
-            <a:r>
-              <a:rPr dirty="0"/>
-              <a:t> </a:t>
-            </a:r>
-            <a:r>
-              <a:rPr dirty="0" err="1"/>
-              <a:t>kết</a:t>
-            </a:r>
-            <a:r>
-              <a:rPr dirty="0"/>
-              <a:t> </a:t>
-            </a:r>
-            <a:r>
-              <a:rPr dirty="0" err="1"/>
-              <a:t>quả</a:t>
-            </a:r>
-            <a:endParaRPr dirty="0"/>
-          </a:p>
-        </p:txBody>
-      </p:sp>
-    </p:spTree>
-    <p:extLst>
-      <p:ext uri="{BB962C8B-B14F-4D97-AF65-F5344CB8AC3E}">
-        <p14:creationId xmlns:p14="http://schemas.microsoft.com/office/powerpoint/2010/main" val="3850406091"/>
-      </p:ext>
-    </p:extLst>
-  </p:cSld>
-  <p:clrMapOvr>
-    <a:masterClrMapping/>
-  </p:clrMapOvr>
-</p:sld>
-</file>
-
 <file path=ppt/slides/slide3.xml><?xml version="1.0" encoding="utf-8"?>
 <p:sld xmlns:a="http://schemas.openxmlformats.org/drawingml/2006/main" xmlns:r="http://schemas.openxmlformats.org/officeDocument/2006/relationships" xmlns:p="http://schemas.openxmlformats.org/presentationml/2006/main">
   <p:cSld>
@@ -23772,16 +24790,13 @@
               </a:rPr>
               <a:t>VietinBank</a:t>
             </a:r>
-            <a:r>
-              <a:rPr lang="en-US" dirty="0">
-                <a:solidFill>
-                  <a:schemeClr val="bg2">
-                    <a:lumMod val="50000"/>
-                  </a:schemeClr>
-                </a:solidFill>
-              </a:rPr>
-              <a:t>, version 12</a:t>
-            </a:r>
+            <a:endParaRPr lang="en-US" dirty="0">
+              <a:solidFill>
+                <a:schemeClr val="bg2">
+                  <a:lumMod val="50000"/>
+                </a:schemeClr>
+              </a:solidFill>
+            </a:endParaRPr>
           </a:p>
           <a:p>
             <a:pPr>
@@ -25136,6 +26151,762 @@
           <p:cNvPr id="2" name="Title 1">
             <a:extLst>
               <a:ext uri="{FF2B5EF4-FFF2-40B4-BE49-F238E27FC236}">
+                <a16:creationId xmlns:a16="http://schemas.microsoft.com/office/drawing/2014/main" id="{107739C3-9867-63EC-F46D-6A9C9C055399}"/>
+              </a:ext>
+            </a:extLst>
+          </p:cNvPr>
+          <p:cNvSpPr>
+            <a:spLocks noGrp="1"/>
+          </p:cNvSpPr>
+          <p:nvPr>
+            <p:ph type="title"/>
+          </p:nvPr>
+        </p:nvSpPr>
+        <p:spPr/>
+        <p:txBody>
+          <a:bodyPr>
+            <a:normAutofit/>
+          </a:bodyPr>
+          <a:lstStyle/>
+          <a:p>
+            <a:r>
+              <a:rPr lang="en-US" dirty="0" err="1"/>
+              <a:t>Kết</a:t>
+            </a:r>
+            <a:r>
+              <a:rPr lang="en-US" dirty="0"/>
+              <a:t> </a:t>
+            </a:r>
+            <a:r>
+              <a:rPr lang="en-US" dirty="0" err="1"/>
+              <a:t>luận</a:t>
+            </a:r>
+            <a:endParaRPr lang="en-US" dirty="0"/>
+          </a:p>
+        </p:txBody>
+      </p:sp>
+      <p:sp>
+        <p:nvSpPr>
+          <p:cNvPr id="50" name="TextBox 49">
+            <a:extLst>
+              <a:ext uri="{FF2B5EF4-FFF2-40B4-BE49-F238E27FC236}">
+                <a16:creationId xmlns:a16="http://schemas.microsoft.com/office/drawing/2014/main" id="{18BCDBDD-67E7-D61F-B9B3-BF6442041F34}"/>
+              </a:ext>
+            </a:extLst>
+          </p:cNvPr>
+          <p:cNvSpPr txBox="1"/>
+          <p:nvPr/>
+        </p:nvSpPr>
+        <p:spPr>
+          <a:xfrm>
+            <a:off x="640080" y="1236428"/>
+            <a:ext cx="8046719" cy="5016758"/>
+          </a:xfrm>
+          <a:prstGeom prst="rect">
+            <a:avLst/>
+          </a:prstGeom>
+          <a:noFill/>
+        </p:spPr>
+        <p:txBody>
+          <a:bodyPr wrap="square">
+            <a:spAutoFit/>
+          </a:bodyPr>
+          <a:lstStyle/>
+          <a:p>
+            <a:pPr>
+              <a:spcBef>
+                <a:spcPts val="1000"/>
+              </a:spcBef>
+              <a:spcAft>
+                <a:spcPts val="500"/>
+              </a:spcAft>
+              <a:defRPr sz="2000">
+                <a:solidFill>
+                  <a:srgbClr val="000000"/>
+                </a:solidFill>
+              </a:defRPr>
+            </a:pPr>
+            <a:r>
+              <a:rPr lang="vi-VN" dirty="0"/>
+              <a:t>H</a:t>
+            </a:r>
+            <a:r>
+              <a:rPr dirty="0"/>
+              <a:t>ệ </a:t>
+            </a:r>
+            <a:r>
+              <a:rPr dirty="0" err="1"/>
+              <a:t>thống</a:t>
+            </a:r>
+            <a:r>
+              <a:rPr dirty="0"/>
+              <a:t> </a:t>
+            </a:r>
+            <a:r>
+              <a:rPr dirty="0" err="1"/>
+              <a:t>Gợi</a:t>
+            </a:r>
+            <a:r>
+              <a:rPr dirty="0"/>
+              <a:t> ý </a:t>
+            </a:r>
+            <a:r>
+              <a:rPr dirty="0" err="1"/>
+              <a:t>Gói</a:t>
+            </a:r>
+            <a:r>
+              <a:rPr dirty="0"/>
+              <a:t> </a:t>
+            </a:r>
+            <a:r>
+              <a:rPr dirty="0" err="1"/>
+              <a:t>Thầu</a:t>
+            </a:r>
+            <a:r>
+              <a:rPr dirty="0"/>
+              <a:t> </a:t>
+            </a:r>
+            <a:r>
+              <a:rPr dirty="0" err="1"/>
+              <a:t>VietinBank</a:t>
+            </a:r>
+            <a:r>
+              <a:rPr dirty="0"/>
+              <a:t> v2.0 — </a:t>
+            </a:r>
+            <a:r>
+              <a:rPr dirty="0" err="1"/>
+              <a:t>là</a:t>
+            </a:r>
+            <a:r>
+              <a:rPr dirty="0"/>
+              <a:t> CÔNG CỤ THÔNG MINH</a:t>
+            </a:r>
+            <a:r>
+              <a:rPr lang="vi-VN" dirty="0"/>
+              <a:t> </a:t>
+            </a:r>
+            <a:r>
+              <a:rPr dirty="0" err="1"/>
+              <a:t>giúp</a:t>
+            </a:r>
+            <a:r>
+              <a:rPr dirty="0"/>
+              <a:t> </a:t>
+            </a:r>
+            <a:r>
+              <a:rPr dirty="0" err="1"/>
+              <a:t>doanh</a:t>
+            </a:r>
+            <a:r>
+              <a:rPr dirty="0"/>
+              <a:t> </a:t>
+            </a:r>
+            <a:r>
+              <a:rPr dirty="0" err="1"/>
+              <a:t>nghiệp</a:t>
+            </a:r>
+            <a:r>
+              <a:rPr dirty="0"/>
+              <a:t> </a:t>
+            </a:r>
+            <a:r>
+              <a:rPr dirty="0" err="1"/>
+              <a:t>tìm</a:t>
+            </a:r>
+            <a:r>
+              <a:rPr dirty="0"/>
+              <a:t> </a:t>
+            </a:r>
+            <a:r>
+              <a:rPr dirty="0" err="1"/>
+              <a:t>đúng</a:t>
+            </a:r>
+            <a:r>
+              <a:rPr dirty="0"/>
+              <a:t> </a:t>
+            </a:r>
+            <a:r>
+              <a:rPr dirty="0" err="1"/>
+              <a:t>gói</a:t>
+            </a:r>
+            <a:r>
+              <a:rPr dirty="0"/>
+              <a:t> </a:t>
+            </a:r>
+            <a:r>
+              <a:rPr dirty="0" err="1"/>
+              <a:t>thầu</a:t>
+            </a:r>
+            <a:r>
+              <a:rPr dirty="0"/>
+              <a:t> </a:t>
+            </a:r>
+            <a:r>
+              <a:rPr dirty="0" err="1"/>
+              <a:t>và</a:t>
+            </a:r>
+            <a:r>
+              <a:rPr dirty="0"/>
+              <a:t> </a:t>
+            </a:r>
+            <a:r>
+              <a:rPr dirty="0" err="1"/>
+              <a:t>hiểu</a:t>
+            </a:r>
+            <a:r>
+              <a:rPr dirty="0"/>
+              <a:t> </a:t>
+            </a:r>
+            <a:r>
+              <a:rPr dirty="0" err="1"/>
+              <a:t>rõ</a:t>
+            </a:r>
+            <a:r>
+              <a:rPr dirty="0"/>
+              <a:t> </a:t>
+            </a:r>
+            <a:r>
+              <a:rPr dirty="0" err="1"/>
+              <a:t>đối</a:t>
+            </a:r>
+            <a:r>
+              <a:rPr dirty="0"/>
+              <a:t> </a:t>
+            </a:r>
+            <a:r>
+              <a:rPr dirty="0" err="1"/>
+              <a:t>thủ</a:t>
+            </a:r>
+            <a:r>
+              <a:rPr dirty="0"/>
+              <a:t> </a:t>
+            </a:r>
+            <a:r>
+              <a:rPr dirty="0" err="1"/>
+              <a:t>cạnh</a:t>
+            </a:r>
+            <a:r>
+              <a:rPr dirty="0"/>
+              <a:t> </a:t>
+            </a:r>
+            <a:r>
+              <a:rPr dirty="0" err="1"/>
+              <a:t>tranh</a:t>
+            </a:r>
+            <a:r>
+              <a:rPr dirty="0"/>
+              <a:t>.</a:t>
+            </a:r>
+          </a:p>
+          <a:p>
+            <a:pPr>
+              <a:spcBef>
+                <a:spcPts val="1000"/>
+              </a:spcBef>
+              <a:spcAft>
+                <a:spcPts val="500"/>
+              </a:spcAft>
+              <a:defRPr sz="2000">
+                <a:solidFill>
+                  <a:srgbClr val="000000"/>
+                </a:solidFill>
+              </a:defRPr>
+            </a:pPr>
+            <a:r>
+              <a:rPr dirty="0"/>
+              <a:t> </a:t>
+            </a:r>
+            <a:r>
+              <a:rPr dirty="0" err="1"/>
+              <a:t>Tóm</a:t>
+            </a:r>
+            <a:r>
+              <a:rPr dirty="0"/>
+              <a:t> </a:t>
+            </a:r>
+            <a:r>
+              <a:rPr dirty="0" err="1"/>
+              <a:t>tắt</a:t>
+            </a:r>
+            <a:r>
+              <a:rPr dirty="0"/>
+              <a:t> 3 </a:t>
+            </a:r>
+            <a:r>
+              <a:rPr dirty="0" err="1"/>
+              <a:t>điểm</a:t>
+            </a:r>
+            <a:r>
+              <a:rPr dirty="0"/>
+              <a:t> </a:t>
+            </a:r>
+            <a:r>
+              <a:rPr dirty="0" err="1"/>
+              <a:t>chính</a:t>
+            </a:r>
+            <a:r>
+              <a:rPr dirty="0"/>
+              <a:t>:</a:t>
+            </a:r>
+          </a:p>
+          <a:p>
+            <a:pPr>
+              <a:spcBef>
+                <a:spcPts val="1000"/>
+              </a:spcBef>
+              <a:spcAft>
+                <a:spcPts val="500"/>
+              </a:spcAft>
+              <a:defRPr sz="2000">
+                <a:solidFill>
+                  <a:srgbClr val="000000"/>
+                </a:solidFill>
+              </a:defRPr>
+            </a:pPr>
+            <a:r>
+              <a:rPr dirty="0"/>
+              <a:t> ① GỢI Ý THÔNG MINH</a:t>
+            </a:r>
+          </a:p>
+          <a:p>
+            <a:pPr>
+              <a:spcBef>
+                <a:spcPts val="1000"/>
+              </a:spcBef>
+              <a:spcAft>
+                <a:spcPts val="500"/>
+              </a:spcAft>
+              <a:defRPr sz="2000">
+                <a:solidFill>
+                  <a:srgbClr val="000000"/>
+                </a:solidFill>
+              </a:defRPr>
+            </a:pPr>
+            <a:r>
+              <a:rPr lang="en-US" dirty="0"/>
+              <a:t>•</a:t>
+            </a:r>
+            <a:r>
+              <a:rPr dirty="0"/>
+              <a:t>    </a:t>
+            </a:r>
+            <a:r>
+              <a:rPr dirty="0" err="1"/>
+              <a:t>Thuật</a:t>
+            </a:r>
+            <a:r>
+              <a:rPr dirty="0"/>
+              <a:t> </a:t>
+            </a:r>
+            <a:r>
+              <a:rPr dirty="0" err="1"/>
+              <a:t>toán</a:t>
+            </a:r>
+            <a:r>
+              <a:rPr dirty="0"/>
+              <a:t> Hybrid (TF-IDF + Historical + Price + Recency)</a:t>
+            </a:r>
+          </a:p>
+          <a:p>
+            <a:pPr>
+              <a:spcBef>
+                <a:spcPts val="1000"/>
+              </a:spcBef>
+              <a:spcAft>
+                <a:spcPts val="500"/>
+              </a:spcAft>
+              <a:defRPr sz="2000">
+                <a:solidFill>
+                  <a:srgbClr val="000000"/>
+                </a:solidFill>
+              </a:defRPr>
+            </a:pPr>
+            <a:r>
+              <a:rPr lang="en-US" dirty="0"/>
+              <a:t>•</a:t>
+            </a:r>
+            <a:r>
+              <a:rPr dirty="0"/>
+              <a:t>    </a:t>
+            </a:r>
+            <a:r>
+              <a:rPr dirty="0" err="1"/>
+              <a:t>tự</a:t>
+            </a:r>
+            <a:r>
+              <a:rPr dirty="0"/>
+              <a:t> </a:t>
+            </a:r>
+            <a:r>
+              <a:rPr dirty="0" err="1"/>
+              <a:t>động</a:t>
+            </a:r>
+            <a:r>
+              <a:rPr dirty="0"/>
+              <a:t> </a:t>
+            </a:r>
+            <a:r>
+              <a:rPr dirty="0" err="1"/>
+              <a:t>xếp</a:t>
+            </a:r>
+            <a:r>
+              <a:rPr dirty="0"/>
+              <a:t> </a:t>
+            </a:r>
+            <a:r>
+              <a:rPr dirty="0" err="1"/>
+              <a:t>hạng</a:t>
+            </a:r>
+            <a:r>
+              <a:rPr dirty="0"/>
+              <a:t> </a:t>
+            </a:r>
+            <a:r>
+              <a:rPr dirty="0" err="1"/>
+              <a:t>gói</a:t>
+            </a:r>
+            <a:r>
+              <a:rPr dirty="0"/>
+              <a:t> </a:t>
+            </a:r>
+            <a:r>
+              <a:rPr dirty="0" err="1"/>
+              <a:t>thầu</a:t>
+            </a:r>
+            <a:r>
+              <a:rPr dirty="0"/>
+              <a:t> </a:t>
+            </a:r>
+            <a:r>
+              <a:rPr dirty="0" err="1"/>
+              <a:t>phù</a:t>
+            </a:r>
+            <a:r>
+              <a:rPr dirty="0"/>
+              <a:t> </a:t>
+            </a:r>
+            <a:r>
+              <a:rPr dirty="0" err="1"/>
+              <a:t>hợp</a:t>
+            </a:r>
+            <a:r>
+              <a:rPr dirty="0"/>
+              <a:t> </a:t>
+            </a:r>
+            <a:r>
+              <a:rPr dirty="0" err="1"/>
+              <a:t>nhất</a:t>
+            </a:r>
+            <a:endParaRPr dirty="0"/>
+          </a:p>
+          <a:p>
+            <a:pPr>
+              <a:spcBef>
+                <a:spcPts val="1000"/>
+              </a:spcBef>
+              <a:spcAft>
+                <a:spcPts val="500"/>
+              </a:spcAft>
+              <a:defRPr sz="2000">
+                <a:solidFill>
+                  <a:srgbClr val="000000"/>
+                </a:solidFill>
+              </a:defRPr>
+            </a:pPr>
+            <a:r>
+              <a:rPr dirty="0"/>
+              <a:t> ② PHÂN TÍCH ĐỐI THỦ</a:t>
+            </a:r>
+          </a:p>
+          <a:p>
+            <a:pPr>
+              <a:spcBef>
+                <a:spcPts val="1000"/>
+              </a:spcBef>
+              <a:spcAft>
+                <a:spcPts val="500"/>
+              </a:spcAft>
+              <a:defRPr sz="2000">
+                <a:solidFill>
+                  <a:srgbClr val="000000"/>
+                </a:solidFill>
+              </a:defRPr>
+            </a:pPr>
+            <a:r>
+              <a:rPr dirty="0"/>
+              <a:t>•    </a:t>
+            </a:r>
+            <a:r>
+              <a:rPr dirty="0" err="1"/>
+              <a:t>Biết</a:t>
+            </a:r>
+            <a:r>
+              <a:rPr dirty="0"/>
+              <a:t> ai </a:t>
+            </a:r>
+            <a:r>
+              <a:rPr dirty="0" err="1"/>
+              <a:t>là</a:t>
+            </a:r>
+            <a:r>
+              <a:rPr dirty="0"/>
+              <a:t> </a:t>
+            </a:r>
+            <a:r>
+              <a:rPr dirty="0" err="1"/>
+              <a:t>đối</a:t>
+            </a:r>
+            <a:r>
+              <a:rPr dirty="0"/>
+              <a:t> </a:t>
+            </a:r>
+            <a:r>
+              <a:rPr dirty="0" err="1"/>
+              <a:t>thủ</a:t>
+            </a:r>
+            <a:r>
+              <a:rPr dirty="0"/>
+              <a:t> </a:t>
+            </a:r>
+            <a:r>
+              <a:rPr dirty="0" err="1"/>
+              <a:t>nguy</a:t>
+            </a:r>
+            <a:r>
+              <a:rPr dirty="0"/>
+              <a:t> </a:t>
+            </a:r>
+            <a:r>
+              <a:rPr dirty="0" err="1"/>
+              <a:t>hiểm</a:t>
+            </a:r>
+            <a:r>
+              <a:rPr dirty="0"/>
+              <a:t> </a:t>
+            </a:r>
+            <a:r>
+              <a:rPr dirty="0" err="1"/>
+              <a:t>nhất</a:t>
+            </a:r>
+            <a:r>
+              <a:rPr dirty="0"/>
+              <a:t> </a:t>
+            </a:r>
+            <a:r>
+              <a:rPr dirty="0" err="1"/>
+              <a:t>trước</a:t>
+            </a:r>
+            <a:r>
+              <a:rPr dirty="0"/>
+              <a:t> </a:t>
+            </a:r>
+            <a:r>
+              <a:rPr dirty="0" err="1"/>
+              <a:t>khi</a:t>
+            </a:r>
+            <a:r>
+              <a:rPr dirty="0"/>
+              <a:t> </a:t>
+            </a:r>
+            <a:r>
+              <a:rPr dirty="0" err="1"/>
+              <a:t>quyết</a:t>
+            </a:r>
+            <a:r>
+              <a:rPr dirty="0"/>
+              <a:t> </a:t>
+            </a:r>
+            <a:r>
+              <a:rPr dirty="0" err="1"/>
+              <a:t>định</a:t>
+            </a:r>
+            <a:r>
+              <a:rPr dirty="0"/>
+              <a:t> </a:t>
+            </a:r>
+            <a:r>
+              <a:rPr dirty="0" err="1"/>
+              <a:t>tham</a:t>
+            </a:r>
+            <a:r>
+              <a:rPr dirty="0"/>
+              <a:t> </a:t>
+            </a:r>
+            <a:r>
+              <a:rPr dirty="0" err="1"/>
+              <a:t>gia</a:t>
+            </a:r>
+            <a:endParaRPr dirty="0"/>
+          </a:p>
+          <a:p>
+            <a:pPr>
+              <a:spcBef>
+                <a:spcPts val="1000"/>
+              </a:spcBef>
+              <a:spcAft>
+                <a:spcPts val="500"/>
+              </a:spcAft>
+              <a:defRPr sz="2000">
+                <a:solidFill>
+                  <a:srgbClr val="000000"/>
+                </a:solidFill>
+              </a:defRPr>
+            </a:pPr>
+            <a:r>
+              <a:rPr dirty="0"/>
+              <a:t> ③ GIAO DIỆN DỄ DÙNG</a:t>
+            </a:r>
+          </a:p>
+          <a:p>
+            <a:pPr>
+              <a:spcBef>
+                <a:spcPts val="1000"/>
+              </a:spcBef>
+              <a:spcAft>
+                <a:spcPts val="500"/>
+              </a:spcAft>
+              <a:defRPr sz="2000">
+                <a:solidFill>
+                  <a:srgbClr val="000000"/>
+                </a:solidFill>
+              </a:defRPr>
+            </a:pPr>
+            <a:r>
+              <a:rPr dirty="0"/>
+              <a:t>•    </a:t>
+            </a:r>
+            <a:r>
+              <a:rPr dirty="0" err="1"/>
+              <a:t>Không</a:t>
+            </a:r>
+            <a:r>
+              <a:rPr dirty="0"/>
+              <a:t> </a:t>
+            </a:r>
+            <a:r>
+              <a:rPr dirty="0" err="1"/>
+              <a:t>cần</a:t>
+            </a:r>
+            <a:r>
+              <a:rPr dirty="0"/>
+              <a:t> </a:t>
+            </a:r>
+            <a:r>
+              <a:rPr dirty="0" err="1"/>
+              <a:t>kiến</a:t>
+            </a:r>
+            <a:r>
+              <a:rPr dirty="0"/>
+              <a:t> </a:t>
+            </a:r>
+            <a:r>
+              <a:rPr dirty="0" err="1"/>
+              <a:t>thức</a:t>
+            </a:r>
+            <a:r>
+              <a:rPr dirty="0"/>
+              <a:t> IT — </a:t>
+            </a:r>
+            <a:r>
+              <a:rPr dirty="0" err="1"/>
+              <a:t>chỉ</a:t>
+            </a:r>
+            <a:r>
+              <a:rPr dirty="0"/>
+              <a:t> </a:t>
+            </a:r>
+            <a:r>
+              <a:rPr dirty="0" err="1"/>
+              <a:t>cần</a:t>
+            </a:r>
+            <a:r>
+              <a:rPr dirty="0"/>
+              <a:t> </a:t>
+            </a:r>
+            <a:r>
+              <a:rPr dirty="0" err="1"/>
+              <a:t>chọn</a:t>
+            </a:r>
+            <a:r>
+              <a:rPr dirty="0"/>
+              <a:t>, </a:t>
+            </a:r>
+            <a:r>
+              <a:rPr dirty="0" err="1"/>
+              <a:t>lọc</a:t>
+            </a:r>
+            <a:r>
+              <a:rPr dirty="0"/>
+              <a:t> </a:t>
+            </a:r>
+            <a:r>
+              <a:rPr dirty="0" err="1"/>
+              <a:t>và</a:t>
+            </a:r>
+            <a:r>
+              <a:rPr dirty="0"/>
+              <a:t> </a:t>
+            </a:r>
+            <a:r>
+              <a:rPr dirty="0" err="1"/>
+              <a:t>xem</a:t>
+            </a:r>
+            <a:r>
+              <a:rPr dirty="0"/>
+              <a:t> </a:t>
+            </a:r>
+            <a:r>
+              <a:rPr dirty="0" err="1"/>
+              <a:t>kết</a:t>
+            </a:r>
+            <a:r>
+              <a:rPr dirty="0"/>
+              <a:t> </a:t>
+            </a:r>
+            <a:r>
+              <a:rPr dirty="0" err="1"/>
+              <a:t>quả</a:t>
+            </a:r>
+            <a:endParaRPr dirty="0"/>
+          </a:p>
+        </p:txBody>
+      </p:sp>
+    </p:spTree>
+    <p:extLst>
+      <p:ext uri="{BB962C8B-B14F-4D97-AF65-F5344CB8AC3E}">
+        <p14:creationId xmlns:p14="http://schemas.microsoft.com/office/powerpoint/2010/main" val="3850406091"/>
+      </p:ext>
+    </p:extLst>
+  </p:cSld>
+  <p:clrMapOvr>
+    <a:masterClrMapping/>
+  </p:clrMapOvr>
+</p:sld>
+</file>
+
+<file path=ppt/slides/slide31.xml><?xml version="1.0" encoding="utf-8"?>
+<p:sld xmlns:a="http://schemas.openxmlformats.org/drawingml/2006/main" xmlns:r="http://schemas.openxmlformats.org/officeDocument/2006/relationships" xmlns:p="http://schemas.openxmlformats.org/presentationml/2006/main">
+  <p:cSld>
+    <p:spTree>
+      <p:nvGrpSpPr>
+        <p:cNvPr id="1" name=""/>
+        <p:cNvGrpSpPr/>
+        <p:nvPr/>
+      </p:nvGrpSpPr>
+      <p:grpSpPr>
+        <a:xfrm>
+          <a:off x="0" y="0"/>
+          <a:ext cx="0" cy="0"/>
+          <a:chOff x="0" y="0"/>
+          <a:chExt cx="0" cy="0"/>
+        </a:xfrm>
+      </p:grpSpPr>
+      <p:sp>
+        <p:nvSpPr>
+          <p:cNvPr id="2" name="Title 1">
+            <a:extLst>
+              <a:ext uri="{FF2B5EF4-FFF2-40B4-BE49-F238E27FC236}">
                 <a16:creationId xmlns:a16="http://schemas.microsoft.com/office/drawing/2014/main" id="{F18EB9E2-9491-E59D-C979-695CC1B67735}"/>
               </a:ext>
             </a:extLst>
@@ -25857,7 +27628,7 @@
 </p:sld>
 </file>
 
-<file path=ppt/slides/slide31.xml><?xml version="1.0" encoding="utf-8"?>
+<file path=ppt/slides/slide32.xml><?xml version="1.0" encoding="utf-8"?>
 <p:sld xmlns:a="http://schemas.openxmlformats.org/drawingml/2006/main" xmlns:r="http://schemas.openxmlformats.org/officeDocument/2006/relationships" xmlns:p="http://schemas.openxmlformats.org/presentationml/2006/main">
   <p:cSld>
     <p:spTree>
@@ -28019,16 +29790,8 @@
               <a:t> </a:t>
             </a:r>
             <a:r>
-              <a:rPr lang="en-US" dirty="0" err="1"/>
-              <a:t>điện</a:t>
-            </a:r>
-            <a:r>
-              <a:rPr lang="en-US" dirty="0"/>
-              <a:t> </a:t>
-            </a:r>
-            <a:r>
-              <a:rPr lang="en-US" dirty="0" err="1"/>
-              <a:t>thoại</a:t>
+              <a:rPr lang="vi-VN" dirty="0"/>
+              <a:t>hàng trên shoppe</a:t>
             </a:r>
             <a:endParaRPr dirty="0"/>
           </a:p>
@@ -28123,7 +29886,7 @@
             </a:pPr>
             <a:r>
               <a:rPr lang="vi-VN" dirty="0"/>
-              <a:t>Bạn có tiêu chí: giá 15tr, camera tốt, pin trâu</a:t>
+              <a:t>Bạn có tiêu chí: giá 15tr, lượt bán, đánh giá,..</a:t>
             </a:r>
           </a:p>
           <a:p>
